--- a/ProfAI_Presentation_EN.pptx
+++ b/ProfAI_Presentation_EN.pptx
@@ -13,9 +13,10 @@
     <p:sldId id="261" r:id="rId7"/>
     <p:sldId id="262" r:id="rId8"/>
     <p:sldId id="263" r:id="rId9"/>
+    <p:sldId id="264" r:id="rId10"/>
   </p:sldIdLst>
   <p:notesMasterIdLst>
-    <p:notesMasterId r:id="rId10"/>
+    <p:notesMasterId r:id="rId11"/>
   </p:notesMasterIdLst>
   <p:sldSz cx="9144000" cy="5143500"/>
   <p:notesSz cx="5143500" cy="9144000"/>
@@ -1149,6 +1150,94 @@
             <a:fld id="{F7021451-1387-4CA6-816F-3879F97B5CBC}" type="slidenum">
               <a:rPr lang="en-US"/>
               <a:t>8</a:t>
+            </a:fld>
+            <a:endParaRPr lang="en-US"/>
+          </a:p>
+        </p:txBody>
+      </p:sp>
+    </p:spTree>
+    <p:extLst>
+      <p:ext uri="{BB962C8B-B14F-4D97-AF65-F5344CB8AC3E}">
+        <p14:creationId xmlns:p14="http://schemas.microsoft.com/office/powerpoint/2010/main" val="1024086991"/>
+      </p:ext>
+    </p:extLst>
+  </p:cSld>
+  <p:clrMapOvr>
+    <a:masterClrMapping/>
+  </p:clrMapOvr>
+</p:notes>
+</file>
+
+<file path=ppt/notesSlides/notesSlide9.xml><?xml version="1.0" encoding="utf-8"?>
+<p:notes xmlns:a="http://schemas.openxmlformats.org/drawingml/2006/main" xmlns:r="http://schemas.openxmlformats.org/officeDocument/2006/relationships" xmlns:p="http://schemas.openxmlformats.org/presentationml/2006/main">
+  <p:cSld>
+    <p:spTree>
+      <p:nvGrpSpPr>
+        <p:cNvPr id="1" name=""/>
+        <p:cNvGrpSpPr/>
+        <p:nvPr/>
+      </p:nvGrpSpPr>
+      <p:grpSpPr>
+        <a:xfrm>
+          <a:off x="0" y="0"/>
+          <a:ext cx="0" cy="0"/>
+          <a:chOff x="0" y="0"/>
+          <a:chExt cx="0" cy="0"/>
+        </a:xfrm>
+      </p:grpSpPr>
+      <p:sp>
+        <p:nvSpPr>
+          <p:cNvPr id="2" name="Slide Image Placeholder 1"/>
+          <p:cNvSpPr>
+            <a:spLocks noGrp="1" noRot="1" noChangeAspect="1"/>
+          </p:cNvSpPr>
+          <p:nvPr>
+            <p:ph type="sldImg"/>
+          </p:nvPr>
+        </p:nvSpPr>
+        <p:spPr/>
+      </p:sp>
+      <p:sp>
+        <p:nvSpPr>
+          <p:cNvPr id="3" name="Notes Placeholder 2"/>
+          <p:cNvSpPr>
+            <a:spLocks noGrp="1"/>
+          </p:cNvSpPr>
+          <p:nvPr>
+            <p:ph type="body" idx="1"/>
+          </p:nvPr>
+        </p:nvSpPr>
+        <p:spPr/>
+        <p:txBody>
+          <a:bodyPr/>
+          <a:lstStyle/>
+          <a:p>
+            <a:r>
+              <a:rPr lang="en-US" dirty="0"/>
+              <a:t/>
+            </a:r>
+            <a:endParaRPr lang="en-US" dirty="0"/>
+          </a:p>
+        </p:txBody>
+      </p:sp>
+      <p:sp>
+        <p:nvSpPr>
+          <p:cNvPr id="4" name="Slide Number Placeholder 3"/>
+          <p:cNvSpPr>
+            <a:spLocks noGrp="1"/>
+          </p:cNvSpPr>
+          <p:nvPr>
+            <p:ph type="sldNum" sz="quarter" idx="10"/>
+          </p:nvPr>
+        </p:nvSpPr>
+        <p:spPr/>
+        <p:txBody>
+          <a:bodyPr/>
+          <a:lstStyle/>
+          <a:p>
+            <a:fld id="{F7021451-1387-4CA6-816F-3879F97B5CBC}" type="slidenum">
+              <a:rPr lang="en-US"/>
+              <a:t>9</a:t>
             </a:fld>
             <a:endParaRPr lang="en-US"/>
           </a:p>
@@ -1480,7 +1569,7 @@
     <p:bg>
       <p:bgPr>
         <a:solidFill>
-          <a:srgbClr val="1E2761"/>
+          <a:srgbClr val="1B2A4A"/>
         </a:solidFill>
       </p:bgPr>
     </p:bg>
@@ -1507,13 +1596,13 @@
         <p:spPr>
           <a:xfrm>
             <a:off x="0" y="0"/>
-            <a:ext cx="137160" cy="5143500"/>
+            <a:ext cx="9144000" cy="73152"/>
           </a:xfrm>
           <a:prstGeom prst="rect">
             <a:avLst/>
           </a:prstGeom>
           <a:solidFill>
-            <a:srgbClr val="4A6CF7"/>
+            <a:srgbClr val="00B4D8"/>
           </a:solidFill>
           <a:ln/>
         </p:spPr>
@@ -1526,14 +1615,14 @@
         </p:nvSpPr>
         <p:spPr>
           <a:xfrm>
-            <a:off x="0" y="4389120"/>
-            <a:ext cx="9144000" cy="54864"/>
-          </a:xfrm>
-          <a:prstGeom prst="rect">
+            <a:off x="3749040" y="731520"/>
+            <a:ext cx="1645920" cy="1645920"/>
+          </a:xfrm>
+          <a:prstGeom prst="ellipse">
             <a:avLst/>
           </a:prstGeom>
           <a:solidFill>
-            <a:srgbClr val="4A6CF7"/>
+            <a:srgbClr val="0066CC"/>
           </a:solidFill>
           <a:ln/>
         </p:spPr>
@@ -1546,65 +1635,104 @@
         </p:nvSpPr>
         <p:spPr>
           <a:xfrm>
-            <a:off x="731520" y="914400"/>
-            <a:ext cx="7772400" cy="1097280"/>
-          </a:xfrm>
-          <a:prstGeom prst="rect">
-            <a:avLst/>
-          </a:prstGeom>
-          <a:noFill/>
-          <a:ln/>
-        </p:spPr>
-        <p:txBody>
-          <a:bodyPr wrap="square" lIns="0" tIns="0" rIns="0" bIns="0" rtlCol="0" anchor="ctr"/>
-          <a:lstStyle/>
-          <a:p>
-            <a:pPr indent="0" marL="0">
-              <a:buNone/>
-            </a:pPr>
-            <a:r>
-              <a:rPr lang="en-US" sz="5400" b="1" dirty="0">
+            <a:off x="3749040" y="731520"/>
+            <a:ext cx="1645920" cy="1645920"/>
+          </a:xfrm>
+          <a:prstGeom prst="rect">
+            <a:avLst/>
+          </a:prstGeom>
+          <a:noFill/>
+          <a:ln/>
+        </p:spPr>
+        <p:txBody>
+          <a:bodyPr wrap="square" rtlCol="0" anchor="ctr"/>
+          <a:lstStyle/>
+          <a:p>
+            <a:pPr algn="ctr" indent="0" marL="0">
+              <a:buNone/>
+            </a:pPr>
+            <a:r>
+              <a:rPr lang="en-US" sz="4800" b="1" dirty="0">
                 <a:solidFill>
                   <a:srgbClr val="FFFFFF"/>
                 </a:solidFill>
+                <a:latin typeface="Arial Black" pitchFamily="34" charset="0"/>
+                <a:ea typeface="Arial Black" pitchFamily="34" charset="-122"/>
+                <a:cs typeface="Arial Black" pitchFamily="34" charset="-120"/>
+              </a:rPr>
+              <a:t>P</a:t>
+            </a:r>
+            <a:endParaRPr lang="en-US" sz="4800" dirty="0"/>
+          </a:p>
+        </p:txBody>
+      </p:sp>
+      <p:sp>
+        <p:nvSpPr>
+          <p:cNvPr id="5" name="Text 3"/>
+          <p:cNvSpPr/>
+          <p:nvPr/>
+        </p:nvSpPr>
+        <p:spPr>
+          <a:xfrm>
+            <a:off x="457200" y="2560320"/>
+            <a:ext cx="8229600" cy="731520"/>
+          </a:xfrm>
+          <a:prstGeom prst="rect">
+            <a:avLst/>
+          </a:prstGeom>
+          <a:noFill/>
+          <a:ln/>
+        </p:spPr>
+        <p:txBody>
+          <a:bodyPr wrap="square" rtlCol="0" anchor="ctr"/>
+          <a:lstStyle/>
+          <a:p>
+            <a:pPr algn="ctr" indent="0" marL="0">
+              <a:buNone/>
+            </a:pPr>
+            <a:r>
+              <a:rPr lang="en-US" sz="4400" b="1" dirty="0">
+                <a:solidFill>
+                  <a:srgbClr val="FFFFFF"/>
+                </a:solidFill>
                 <a:latin typeface="Calibri" pitchFamily="34" charset="0"/>
                 <a:ea typeface="Calibri" pitchFamily="34" charset="-122"/>
                 <a:cs typeface="Calibri" pitchFamily="34" charset="-120"/>
               </a:rPr>
               <a:t>ProfAI</a:t>
             </a:r>
-            <a:endParaRPr lang="en-US" sz="5400" dirty="0"/>
-          </a:p>
-        </p:txBody>
-      </p:sp>
-      <p:sp>
-        <p:nvSpPr>
-          <p:cNvPr id="5" name="Text 3"/>
-          <p:cNvSpPr/>
-          <p:nvPr/>
-        </p:nvSpPr>
-        <p:spPr>
-          <a:xfrm>
-            <a:off x="731520" y="1920240"/>
-            <a:ext cx="7772400" cy="640080"/>
-          </a:xfrm>
-          <a:prstGeom prst="rect">
-            <a:avLst/>
-          </a:prstGeom>
-          <a:noFill/>
-          <a:ln/>
-        </p:spPr>
-        <p:txBody>
-          <a:bodyPr wrap="square" lIns="0" tIns="0" rIns="0" bIns="0" rtlCol="0" anchor="ctr"/>
-          <a:lstStyle/>
-          <a:p>
-            <a:pPr indent="0" marL="0">
-              <a:buNone/>
-            </a:pPr>
-            <a:r>
-              <a:rPr lang="en-US" sz="2200" dirty="0">
-                <a:solidFill>
-                  <a:srgbClr val="CADCFC"/>
+            <a:endParaRPr lang="en-US" sz="4400" dirty="0"/>
+          </a:p>
+        </p:txBody>
+      </p:sp>
+      <p:sp>
+        <p:nvSpPr>
+          <p:cNvPr id="6" name="Text 4"/>
+          <p:cNvSpPr/>
+          <p:nvPr/>
+        </p:nvSpPr>
+        <p:spPr>
+          <a:xfrm>
+            <a:off x="457200" y="3200400"/>
+            <a:ext cx="8229600" cy="457200"/>
+          </a:xfrm>
+          <a:prstGeom prst="rect">
+            <a:avLst/>
+          </a:prstGeom>
+          <a:noFill/>
+          <a:ln/>
+        </p:spPr>
+        <p:txBody>
+          <a:bodyPr wrap="square" rtlCol="0" anchor="ctr"/>
+          <a:lstStyle/>
+          <a:p>
+            <a:pPr algn="ctr" indent="0" marL="0">
+              <a:buNone/>
+            </a:pPr>
+            <a:r>
+              <a:rPr lang="en-US" sz="2000" dirty="0">
+                <a:solidFill>
+                  <a:srgbClr val="00B4D8"/>
                 </a:solidFill>
                 <a:latin typeface="Calibri" pitchFamily="34" charset="0"/>
                 <a:ea typeface="Calibri" pitchFamily="34" charset="-122"/>
@@ -1612,29 +1740,9 @@
               </a:rPr>
               <a:t>Professor Exam Style Analysis Platform</a:t>
             </a:r>
-            <a:endParaRPr lang="en-US" sz="2200" dirty="0"/>
-          </a:p>
-        </p:txBody>
-      </p:sp>
-      <p:sp>
-        <p:nvSpPr>
-          <p:cNvPr id="6" name="Shape 4"/>
-          <p:cNvSpPr/>
-          <p:nvPr/>
-        </p:nvSpPr>
-        <p:spPr>
-          <a:xfrm>
-            <a:off x="731520" y="2743200"/>
-            <a:ext cx="1371600" cy="36576"/>
-          </a:xfrm>
-          <a:prstGeom prst="rect">
-            <a:avLst/>
-          </a:prstGeom>
-          <a:solidFill>
-            <a:srgbClr val="4A6CF7"/>
-          </a:solidFill>
-          <a:ln/>
-        </p:spPr>
+            <a:endParaRPr lang="en-US" sz="2000" dirty="0"/>
+          </a:p>
+        </p:txBody>
       </p:sp>
       <p:sp>
         <p:nvSpPr>
@@ -1644,26 +1752,26 @@
         </p:nvSpPr>
         <p:spPr>
           <a:xfrm>
-            <a:off x="731520" y="3017520"/>
-            <a:ext cx="7772400" cy="457200"/>
-          </a:xfrm>
-          <a:prstGeom prst="rect">
-            <a:avLst/>
-          </a:prstGeom>
-          <a:noFill/>
-          <a:ln/>
-        </p:spPr>
-        <p:txBody>
-          <a:bodyPr wrap="square" lIns="0" tIns="0" rIns="0" bIns="0" rtlCol="0" anchor="ctr"/>
-          <a:lstStyle/>
-          <a:p>
-            <a:pPr indent="0" marL="0">
-              <a:buNone/>
-            </a:pPr>
-            <a:r>
-              <a:rPr lang="en-US" sz="1600" dirty="0">
-                <a:solidFill>
-                  <a:srgbClr val="8892B0"/>
+            <a:off x="457200" y="3840480"/>
+            <a:ext cx="8229600" cy="365760"/>
+          </a:xfrm>
+          <a:prstGeom prst="rect">
+            <a:avLst/>
+          </a:prstGeom>
+          <a:noFill/>
+          <a:ln/>
+        </p:spPr>
+        <p:txBody>
+          <a:bodyPr wrap="square" rtlCol="0" anchor="ctr"/>
+          <a:lstStyle/>
+          <a:p>
+            <a:pPr algn="ctr" indent="0" marL="0">
+              <a:buNone/>
+            </a:pPr>
+            <a:r>
+              <a:rPr lang="en-US" sz="1400" dirty="0">
+                <a:solidFill>
+                  <a:srgbClr val="A0AEC0"/>
                 </a:solidFill>
                 <a:latin typeface="Calibri" pitchFamily="34" charset="0"/>
                 <a:ea typeface="Calibri" pitchFamily="34" charset="-122"/>
@@ -1671,7 +1779,7 @@
               </a:rPr>
               <a:t>UYG338 Software Project Management</a:t>
             </a:r>
-            <a:endParaRPr lang="en-US" sz="1600" dirty="0"/>
+            <a:endParaRPr lang="en-US" sz="1400" dirty="0"/>
           </a:p>
         </p:txBody>
       </p:sp>
@@ -1683,34 +1791,34 @@
         </p:nvSpPr>
         <p:spPr>
           <a:xfrm>
-            <a:off x="731520" y="3657600"/>
-            <a:ext cx="7772400" cy="457200"/>
-          </a:xfrm>
-          <a:prstGeom prst="rect">
-            <a:avLst/>
-          </a:prstGeom>
-          <a:noFill/>
-          <a:ln/>
-        </p:spPr>
-        <p:txBody>
-          <a:bodyPr wrap="square" rtlCol="0" anchor="ctr"/>
-          <a:lstStyle/>
-          <a:p>
-            <a:pPr indent="0" marL="0">
-              <a:buNone/>
-            </a:pPr>
-            <a:r>
-              <a:rPr lang="en-US" sz="1400" b="1" dirty="0">
-                <a:solidFill>
-                  <a:srgbClr val="CADCFC"/>
-                </a:solidFill>
-                <a:latin typeface="Calibri" pitchFamily="34" charset="0"/>
-                <a:ea typeface="Calibri" pitchFamily="34" charset="-122"/>
-                <a:cs typeface="Calibri" pitchFamily="34" charset="-120"/>
-              </a:rPr>
-              <a:t>Erdem Acar  ·  Enes Albas  ·  Ali Emir Erten</a:t>
-            </a:r>
-            <a:endParaRPr lang="en-US" sz="1400" dirty="0"/>
+            <a:off x="457200" y="4297680"/>
+            <a:ext cx="8229600" cy="365760"/>
+          </a:xfrm>
+          <a:prstGeom prst="rect">
+            <a:avLst/>
+          </a:prstGeom>
+          <a:noFill/>
+          <a:ln/>
+        </p:spPr>
+        <p:txBody>
+          <a:bodyPr wrap="square" rtlCol="0" anchor="ctr"/>
+          <a:lstStyle/>
+          <a:p>
+            <a:pPr algn="ctr" indent="0" marL="0">
+              <a:buNone/>
+            </a:pPr>
+            <a:r>
+              <a:rPr lang="en-US" sz="1300" dirty="0">
+                <a:solidFill>
+                  <a:srgbClr val="CBD5E0"/>
+                </a:solidFill>
+                <a:latin typeface="Calibri" pitchFamily="34" charset="0"/>
+                <a:ea typeface="Calibri" pitchFamily="34" charset="-122"/>
+                <a:cs typeface="Calibri" pitchFamily="34" charset="-120"/>
+              </a:rPr>
+              <a:t>Erdem Acar  •  Enes Albas  •  Ali Emir Erten</a:t>
+            </a:r>
+            <a:endParaRPr lang="en-US" sz="1300" dirty="0"/>
           </a:p>
         </p:txBody>
       </p:sp>
@@ -1722,26 +1830,26 @@
         </p:nvSpPr>
         <p:spPr>
           <a:xfrm>
-            <a:off x="5486400" y="4434840"/>
-            <a:ext cx="3200400" cy="457200"/>
-          </a:xfrm>
-          <a:prstGeom prst="rect">
-            <a:avLst/>
-          </a:prstGeom>
-          <a:noFill/>
-          <a:ln/>
-        </p:spPr>
-        <p:txBody>
-          <a:bodyPr wrap="square" rtlCol="0" anchor="ctr"/>
-          <a:lstStyle/>
-          <a:p>
-            <a:pPr algn="r" indent="0" marL="0">
-              <a:buNone/>
-            </a:pPr>
-            <a:r>
-              <a:rPr lang="en-US" sz="1200" dirty="0">
-                <a:solidFill>
-                  <a:srgbClr val="8892B0"/>
+            <a:off x="457200" y="4663440"/>
+            <a:ext cx="8229600" cy="274320"/>
+          </a:xfrm>
+          <a:prstGeom prst="rect">
+            <a:avLst/>
+          </a:prstGeom>
+          <a:noFill/>
+          <a:ln/>
+        </p:spPr>
+        <p:txBody>
+          <a:bodyPr wrap="square" rtlCol="0" anchor="ctr"/>
+          <a:lstStyle/>
+          <a:p>
+            <a:pPr algn="ctr" indent="0" marL="0">
+              <a:buNone/>
+            </a:pPr>
+            <a:r>
+              <a:rPr lang="en-US" sz="1100" dirty="0">
+                <a:solidFill>
+                  <a:srgbClr val="718096"/>
                 </a:solidFill>
                 <a:latin typeface="Calibri" pitchFamily="34" charset="0"/>
                 <a:ea typeface="Calibri" pitchFamily="34" charset="-122"/>
@@ -1749,7 +1857,7 @@
               </a:rPr>
               <a:t>2025 – 2026</a:t>
             </a:r>
-            <a:endParaRPr lang="en-US" sz="1200" dirty="0"/>
+            <a:endParaRPr lang="en-US" sz="1100" dirty="0"/>
           </a:p>
         </p:txBody>
       </p:sp>
@@ -1767,7 +1875,7 @@
     <p:bg>
       <p:bgPr>
         <a:solidFill>
-          <a:srgbClr val="F0F3FA"/>
+          <a:srgbClr val="F0F4F8"/>
         </a:solidFill>
       </p:bgPr>
     </p:bg>
@@ -1794,13 +1902,13 @@
         <p:spPr>
           <a:xfrm>
             <a:off x="0" y="0"/>
-            <a:ext cx="9144000" cy="822960"/>
+            <a:ext cx="9144000" cy="54864"/>
           </a:xfrm>
           <a:prstGeom prst="rect">
             <a:avLst/>
           </a:prstGeom>
           <a:solidFill>
-            <a:srgbClr val="1E2761"/>
+            <a:srgbClr val="00B4D8"/>
           </a:solidFill>
           <a:ln/>
         </p:spPr>
@@ -1813,26 +1921,26 @@
         </p:nvSpPr>
         <p:spPr>
           <a:xfrm>
-            <a:off x="548640" y="0"/>
-            <a:ext cx="8229600" cy="822960"/>
-          </a:xfrm>
-          <a:prstGeom prst="rect">
-            <a:avLst/>
-          </a:prstGeom>
-          <a:noFill/>
-          <a:ln/>
-        </p:spPr>
-        <p:txBody>
-          <a:bodyPr wrap="square" rtlCol="0" anchor="ctr"/>
+            <a:off x="548640" y="228600"/>
+            <a:ext cx="8229600" cy="548640"/>
+          </a:xfrm>
+          <a:prstGeom prst="rect">
+            <a:avLst/>
+          </a:prstGeom>
+          <a:noFill/>
+          <a:ln/>
+        </p:spPr>
+        <p:txBody>
+          <a:bodyPr wrap="square" lIns="0" tIns="0" rIns="0" bIns="0" rtlCol="0" anchor="ctr"/>
           <a:lstStyle/>
           <a:p>
             <a:pPr indent="0" marL="0">
               <a:buNone/>
             </a:pPr>
             <a:r>
-              <a:rPr lang="en-US" sz="2200" b="1" dirty="0">
-                <a:solidFill>
-                  <a:srgbClr val="FFFFFF"/>
+              <a:rPr lang="en-US" sz="2800" b="1" dirty="0">
+                <a:solidFill>
+                  <a:srgbClr val="1B2A4A"/>
                 </a:solidFill>
                 <a:latin typeface="Calibri" pitchFamily="34" charset="0"/>
                 <a:ea typeface="Calibri" pitchFamily="34" charset="-122"/>
@@ -1840,32 +1948,96 @@
               </a:rPr>
               <a:t>Project Overview</a:t>
             </a:r>
-            <a:endParaRPr lang="en-US" sz="2200" dirty="0"/>
-          </a:p>
-        </p:txBody>
-      </p:sp>
-      <p:sp>
-        <p:nvSpPr>
-          <p:cNvPr id="4" name="Shape 2"/>
-          <p:cNvSpPr/>
-          <p:nvPr/>
-        </p:nvSpPr>
-        <p:spPr>
-          <a:xfrm>
-            <a:off x="457200" y="1097280"/>
-            <a:ext cx="8229600" cy="1097280"/>
-          </a:xfrm>
-          <a:prstGeom prst="rect">
-            <a:avLst/>
+            <a:endParaRPr lang="en-US" sz="2800" dirty="0"/>
+          </a:p>
+        </p:txBody>
+      </p:sp>
+      <p:sp>
+        <p:nvSpPr>
+          <p:cNvPr id="4" name="Text 2"/>
+          <p:cNvSpPr/>
+          <p:nvPr/>
+        </p:nvSpPr>
+        <p:spPr>
+          <a:xfrm>
+            <a:off x="548640" y="914400"/>
+            <a:ext cx="8046720" cy="731520"/>
+          </a:xfrm>
+          <a:prstGeom prst="rect">
+            <a:avLst/>
+          </a:prstGeom>
+          <a:noFill/>
+          <a:ln/>
+        </p:spPr>
+        <p:txBody>
+          <a:bodyPr wrap="square" rtlCol="0" anchor="ctr"/>
+          <a:lstStyle/>
+          <a:p>
+            <a:pPr indent="0" marL="0">
+              <a:lnSpc>
+                <a:spcPct val="130000"/>
+              </a:lnSpc>
+              <a:buNone/>
+            </a:pPr>
+            <a:r>
+              <a:rPr lang="en-US" sz="1300" dirty="0">
+                <a:solidFill>
+                  <a:srgbClr val="2D3748"/>
+                </a:solidFill>
+                <a:latin typeface="Calibri" pitchFamily="34" charset="0"/>
+                <a:ea typeface="Calibri" pitchFamily="34" charset="-122"/>
+                <a:cs typeface="Calibri" pitchFamily="34" charset="-120"/>
+              </a:rPr>
+              <a:t>A web platform that analyzes university professors' exam styles.</a:t>
+            </a:r>
+            <a:endParaRPr lang="en-US" sz="1300" dirty="0"/>
+          </a:p>
+          <a:p>
+            <a:pPr indent="0" marL="0">
+              <a:lnSpc>
+                <a:spcPct val="130000"/>
+              </a:lnSpc>
+              <a:buNone/>
+            </a:pPr>
+            <a:r>
+              <a:rPr lang="en-US" sz="1300" dirty="0">
+                <a:solidFill>
+                  <a:srgbClr val="2D3748"/>
+                </a:solidFill>
+                <a:latin typeface="Calibri" pitchFamily="34" charset="0"/>
+                <a:ea typeface="Calibri" pitchFamily="34" charset="-122"/>
+                <a:cs typeface="Calibri" pitchFamily="34" charset="-120"/>
+              </a:rPr>
+              <a:t>Helps students prepare for exams with question type distribution, topic analysis, and difficulty scores.</a:t>
+            </a:r>
+            <a:endParaRPr lang="en-US" sz="1300" dirty="0"/>
+          </a:p>
+        </p:txBody>
+      </p:sp>
+      <p:sp>
+        <p:nvSpPr>
+          <p:cNvPr id="5" name="Shape 3"/>
+          <p:cNvSpPr/>
+          <p:nvPr/>
+        </p:nvSpPr>
+        <p:spPr>
+          <a:xfrm>
+            <a:off x="548640" y="1920240"/>
+            <a:ext cx="2651760" cy="2377440"/>
+          </a:xfrm>
+          <a:prstGeom prst="roundRect">
+            <a:avLst>
+              <a:gd name="adj" fmla="val 4615"/>
+            </a:avLst>
           </a:prstGeom>
           <a:solidFill>
             <a:srgbClr val="FFFFFF"/>
           </a:solidFill>
           <a:ln/>
           <a:effectLst>
-            <a:outerShdw sx="100000" sy="100000" kx="0" ky="0" algn="bl" rotWithShape="0" blurRad="101600" dist="38100" dir="8100000">
+            <a:outerShdw sx="100000" sy="100000" kx="0" ky="0" algn="bl" rotWithShape="0" blurRad="101600" dist="25400" dir="8100000">
               <a:srgbClr val="000000">
-                <a:alpha val="12000"/>
+                <a:alpha val="10000"/>
               </a:srgbClr>
             </a:outerShdw>
           </a:effectLst>
@@ -1873,102 +2045,185 @@
       </p:sp>
       <p:sp>
         <p:nvSpPr>
-          <p:cNvPr id="5" name="Shape 3"/>
-          <p:cNvSpPr/>
-          <p:nvPr/>
-        </p:nvSpPr>
-        <p:spPr>
-          <a:xfrm>
-            <a:off x="457200" y="1097280"/>
-            <a:ext cx="73152" cy="1097280"/>
-          </a:xfrm>
-          <a:prstGeom prst="rect">
+          <p:cNvPr id="6" name="Shape 4"/>
+          <p:cNvSpPr/>
+          <p:nvPr/>
+        </p:nvSpPr>
+        <p:spPr>
+          <a:xfrm>
+            <a:off x="1371600" y="2103120"/>
+            <a:ext cx="1005840" cy="1005840"/>
+          </a:xfrm>
+          <a:prstGeom prst="ellipse">
             <a:avLst/>
           </a:prstGeom>
           <a:solidFill>
-            <a:srgbClr val="4A6CF7"/>
+            <a:srgbClr val="E8F0FE"/>
           </a:solidFill>
           <a:ln/>
         </p:spPr>
       </p:sp>
       <p:sp>
         <p:nvSpPr>
-          <p:cNvPr id="6" name="Text 4"/>
-          <p:cNvSpPr/>
-          <p:nvPr/>
-        </p:nvSpPr>
-        <p:spPr>
-          <a:xfrm>
-            <a:off x="731520" y="1143000"/>
-            <a:ext cx="7772400" cy="1005840"/>
-          </a:xfrm>
-          <a:prstGeom prst="rect">
-            <a:avLst/>
-          </a:prstGeom>
-          <a:noFill/>
-          <a:ln/>
-        </p:spPr>
-        <p:txBody>
-          <a:bodyPr wrap="square" lIns="0" tIns="0" rIns="0" bIns="0" rtlCol="0" anchor="ctr"/>
-          <a:lstStyle/>
-          <a:p>
-            <a:pPr indent="0" marL="0">
-              <a:buNone/>
-            </a:pPr>
-            <a:r>
-              <a:rPr lang="en-US" sz="1400" dirty="0">
-                <a:solidFill>
-                  <a:srgbClr val="495670"/>
-                </a:solidFill>
-                <a:latin typeface="Calibri" pitchFamily="34" charset="0"/>
-                <a:ea typeface="Calibri" pitchFamily="34" charset="-122"/>
-                <a:cs typeface="Calibri" pitchFamily="34" charset="-120"/>
-              </a:rPr>
-              <a:t>A web platform that analyzes university professors' exam styles.</a:t>
-            </a:r>
-            <a:endParaRPr lang="en-US" sz="1400" dirty="0"/>
-          </a:p>
-          <a:p>
-            <a:pPr indent="0" marL="0">
-              <a:buNone/>
-            </a:pPr>
-            <a:r>
-              <a:rPr lang="en-US" sz="1400" dirty="0">
-                <a:solidFill>
-                  <a:srgbClr val="495670"/>
-                </a:solidFill>
-                <a:latin typeface="Calibri" pitchFamily="34" charset="0"/>
-                <a:ea typeface="Calibri" pitchFamily="34" charset="-122"/>
-                <a:cs typeface="Calibri" pitchFamily="34" charset="-120"/>
-              </a:rPr>
-              <a:t>Helps students prepare for exams by providing question type distribution, topic analysis, and difficulty scores.</a:t>
-            </a:r>
-            <a:endParaRPr lang="en-US" sz="1400" dirty="0"/>
-          </a:p>
-        </p:txBody>
-      </p:sp>
-      <p:sp>
-        <p:nvSpPr>
-          <p:cNvPr id="7" name="Shape 5"/>
-          <p:cNvSpPr/>
-          <p:nvPr/>
-        </p:nvSpPr>
-        <p:spPr>
-          <a:xfrm>
-            <a:off x="457200" y="2560320"/>
-            <a:ext cx="2560320" cy="1645920"/>
-          </a:xfrm>
-          <a:prstGeom prst="rect">
-            <a:avLst/>
+          <p:cNvPr id="7" name="Text 5"/>
+          <p:cNvSpPr/>
+          <p:nvPr/>
+        </p:nvSpPr>
+        <p:spPr>
+          <a:xfrm>
+            <a:off x="1371600" y="2148840"/>
+            <a:ext cx="1005840" cy="914400"/>
+          </a:xfrm>
+          <a:prstGeom prst="rect">
+            <a:avLst/>
+          </a:prstGeom>
+          <a:noFill/>
+          <a:ln/>
+        </p:spPr>
+        <p:txBody>
+          <a:bodyPr wrap="square" rtlCol="0" anchor="ctr"/>
+          <a:lstStyle/>
+          <a:p>
+            <a:pPr algn="ctr" indent="0" marL="0">
+              <a:buNone/>
+            </a:pPr>
+            <a:r>
+              <a:rPr lang="en-US" sz="3000" dirty="0">
+                <a:solidFill>
+                  <a:srgbClr val="000000"/>
+                </a:solidFill>
+              </a:rPr>
+              <a:t>📊</a:t>
+            </a:r>
+            <a:endParaRPr lang="en-US" sz="3000" dirty="0"/>
+          </a:p>
+        </p:txBody>
+      </p:sp>
+      <p:sp>
+        <p:nvSpPr>
+          <p:cNvPr id="8" name="Text 6"/>
+          <p:cNvSpPr/>
+          <p:nvPr/>
+        </p:nvSpPr>
+        <p:spPr>
+          <a:xfrm>
+            <a:off x="685800" y="3200400"/>
+            <a:ext cx="2377440" cy="365760"/>
+          </a:xfrm>
+          <a:prstGeom prst="rect">
+            <a:avLst/>
+          </a:prstGeom>
+          <a:noFill/>
+          <a:ln/>
+        </p:spPr>
+        <p:txBody>
+          <a:bodyPr wrap="square" rtlCol="0" anchor="ctr"/>
+          <a:lstStyle/>
+          <a:p>
+            <a:pPr algn="ctr" indent="0" marL="0">
+              <a:buNone/>
+            </a:pPr>
+            <a:r>
+              <a:rPr lang="en-US" sz="1300" b="1" dirty="0">
+                <a:solidFill>
+                  <a:srgbClr val="1B2A4A"/>
+                </a:solidFill>
+                <a:latin typeface="Calibri" pitchFamily="34" charset="0"/>
+                <a:ea typeface="Calibri" pitchFamily="34" charset="-122"/>
+                <a:cs typeface="Calibri" pitchFamily="34" charset="-120"/>
+              </a:rPr>
+              <a:t>Question Type Analysis</a:t>
+            </a:r>
+            <a:endParaRPr lang="en-US" sz="1300" dirty="0"/>
+          </a:p>
+        </p:txBody>
+      </p:sp>
+      <p:sp>
+        <p:nvSpPr>
+          <p:cNvPr id="9" name="Text 7"/>
+          <p:cNvSpPr/>
+          <p:nvPr/>
+        </p:nvSpPr>
+        <p:spPr>
+          <a:xfrm>
+            <a:off x="685800" y="3566160"/>
+            <a:ext cx="2377440" cy="640080"/>
+          </a:xfrm>
+          <a:prstGeom prst="rect">
+            <a:avLst/>
+          </a:prstGeom>
+          <a:noFill/>
+          <a:ln/>
+        </p:spPr>
+        <p:txBody>
+          <a:bodyPr wrap="square" rtlCol="0" anchor="ctr"/>
+          <a:lstStyle/>
+          <a:p>
+            <a:pPr algn="ctr" indent="0" marL="0">
+              <a:lnSpc>
+                <a:spcPct val="120000"/>
+              </a:lnSpc>
+              <a:buNone/>
+            </a:pPr>
+            <a:r>
+              <a:rPr lang="en-US" sz="1100" dirty="0">
+                <a:solidFill>
+                  <a:srgbClr val="718096"/>
+                </a:solidFill>
+                <a:latin typeface="Calibri" pitchFamily="34" charset="0"/>
+                <a:ea typeface="Calibri" pitchFamily="34" charset="-122"/>
+                <a:cs typeface="Calibri" pitchFamily="34" charset="-120"/>
+              </a:rPr>
+              <a:t>Multiple choice, open-ended,</a:t>
+            </a:r>
+            <a:endParaRPr lang="en-US" sz="1100" dirty="0"/>
+          </a:p>
+          <a:p>
+            <a:pPr algn="ctr" indent="0" marL="0">
+              <a:lnSpc>
+                <a:spcPct val="120000"/>
+              </a:lnSpc>
+              <a:buNone/>
+            </a:pPr>
+            <a:r>
+              <a:rPr lang="en-US" sz="1100" dirty="0">
+                <a:solidFill>
+                  <a:srgbClr val="718096"/>
+                </a:solidFill>
+                <a:latin typeface="Calibri" pitchFamily="34" charset="0"/>
+                <a:ea typeface="Calibri" pitchFamily="34" charset="-122"/>
+                <a:cs typeface="Calibri" pitchFamily="34" charset="-120"/>
+              </a:rPr>
+              <a:t>true/false distribution</a:t>
+            </a:r>
+            <a:endParaRPr lang="en-US" sz="1100" dirty="0"/>
+          </a:p>
+        </p:txBody>
+      </p:sp>
+      <p:sp>
+        <p:nvSpPr>
+          <p:cNvPr id="10" name="Shape 8"/>
+          <p:cNvSpPr/>
+          <p:nvPr/>
+        </p:nvSpPr>
+        <p:spPr>
+          <a:xfrm>
+            <a:off x="3383280" y="1920240"/>
+            <a:ext cx="2651760" cy="2377440"/>
+          </a:xfrm>
+          <a:prstGeom prst="roundRect">
+            <a:avLst>
+              <a:gd name="adj" fmla="val 4615"/>
+            </a:avLst>
           </a:prstGeom>
           <a:solidFill>
             <a:srgbClr val="FFFFFF"/>
           </a:solidFill>
           <a:ln/>
           <a:effectLst>
-            <a:outerShdw sx="100000" sy="100000" kx="0" ky="0" algn="bl" rotWithShape="0" blurRad="101600" dist="38100" dir="8100000">
+            <a:outerShdw sx="100000" sy="100000" kx="0" ky="0" algn="bl" rotWithShape="0" blurRad="101600" dist="25400" dir="8100000">
               <a:srgbClr val="000000">
-                <a:alpha val="12000"/>
+                <a:alpha val="10000"/>
               </a:srgbClr>
             </a:outerShdw>
           </a:effectLst>
@@ -1976,58 +2231,94 @@
       </p:sp>
       <p:sp>
         <p:nvSpPr>
-          <p:cNvPr id="8" name="Shape 6"/>
-          <p:cNvSpPr/>
-          <p:nvPr/>
-        </p:nvSpPr>
-        <p:spPr>
-          <a:xfrm>
-            <a:off x="457200" y="2560320"/>
-            <a:ext cx="2560320" cy="54864"/>
-          </a:xfrm>
-          <a:prstGeom prst="rect">
+          <p:cNvPr id="11" name="Shape 9"/>
+          <p:cNvSpPr/>
+          <p:nvPr/>
+        </p:nvSpPr>
+        <p:spPr>
+          <a:xfrm>
+            <a:off x="4206240" y="2103120"/>
+            <a:ext cx="1005840" cy="1005840"/>
+          </a:xfrm>
+          <a:prstGeom prst="ellipse">
             <a:avLst/>
           </a:prstGeom>
           <a:solidFill>
-            <a:srgbClr val="4A6CF7"/>
+            <a:srgbClr val="E8F0FE"/>
           </a:solidFill>
           <a:ln/>
         </p:spPr>
       </p:sp>
       <p:sp>
         <p:nvSpPr>
-          <p:cNvPr id="9" name="Text 7"/>
-          <p:cNvSpPr/>
-          <p:nvPr/>
-        </p:nvSpPr>
-        <p:spPr>
-          <a:xfrm>
-            <a:off x="594360" y="2743200"/>
-            <a:ext cx="2286000" cy="365760"/>
-          </a:xfrm>
-          <a:prstGeom prst="rect">
-            <a:avLst/>
-          </a:prstGeom>
-          <a:noFill/>
-          <a:ln/>
-        </p:spPr>
-        <p:txBody>
-          <a:bodyPr wrap="square" lIns="0" tIns="0" rIns="0" bIns="0" rtlCol="0" anchor="ctr"/>
-          <a:lstStyle/>
-          <a:p>
-            <a:pPr indent="0" marL="0">
+          <p:cNvPr id="12" name="Text 10"/>
+          <p:cNvSpPr/>
+          <p:nvPr/>
+        </p:nvSpPr>
+        <p:spPr>
+          <a:xfrm>
+            <a:off x="4206240" y="2148840"/>
+            <a:ext cx="1005840" cy="914400"/>
+          </a:xfrm>
+          <a:prstGeom prst="rect">
+            <a:avLst/>
+          </a:prstGeom>
+          <a:noFill/>
+          <a:ln/>
+        </p:spPr>
+        <p:txBody>
+          <a:bodyPr wrap="square" rtlCol="0" anchor="ctr"/>
+          <a:lstStyle/>
+          <a:p>
+            <a:pPr algn="ctr" indent="0" marL="0">
+              <a:buNone/>
+            </a:pPr>
+            <a:r>
+              <a:rPr lang="en-US" sz="3000" dirty="0">
+                <a:solidFill>
+                  <a:srgbClr val="000000"/>
+                </a:solidFill>
+              </a:rPr>
+              <a:t>📖</a:t>
+            </a:r>
+            <a:endParaRPr lang="en-US" sz="3000" dirty="0"/>
+          </a:p>
+        </p:txBody>
+      </p:sp>
+      <p:sp>
+        <p:nvSpPr>
+          <p:cNvPr id="13" name="Text 11"/>
+          <p:cNvSpPr/>
+          <p:nvPr/>
+        </p:nvSpPr>
+        <p:spPr>
+          <a:xfrm>
+            <a:off x="3520440" y="3200400"/>
+            <a:ext cx="2377440" cy="365760"/>
+          </a:xfrm>
+          <a:prstGeom prst="rect">
+            <a:avLst/>
+          </a:prstGeom>
+          <a:noFill/>
+          <a:ln/>
+        </p:spPr>
+        <p:txBody>
+          <a:bodyPr wrap="square" rtlCol="0" anchor="ctr"/>
+          <a:lstStyle/>
+          <a:p>
+            <a:pPr algn="ctr" indent="0" marL="0">
               <a:buNone/>
             </a:pPr>
             <a:r>
               <a:rPr lang="en-US" sz="1300" b="1" dirty="0">
                 <a:solidFill>
-                  <a:srgbClr val="1E2761"/>
-                </a:solidFill>
-                <a:latin typeface="Calibri" pitchFamily="34" charset="0"/>
-                <a:ea typeface="Calibri" pitchFamily="34" charset="-122"/>
-                <a:cs typeface="Calibri" pitchFamily="34" charset="-120"/>
-              </a:rPr>
-              <a:t>Question Type Analysis</a:t>
+                  <a:srgbClr val="1B2A4A"/>
+                </a:solidFill>
+                <a:latin typeface="Calibri" pitchFamily="34" charset="0"/>
+                <a:ea typeface="Calibri" pitchFamily="34" charset="-122"/>
+                <a:cs typeface="Calibri" pitchFamily="34" charset="-120"/>
+              </a:rPr>
+              <a:t>Topic Distribution</a:t>
             </a:r>
             <a:endParaRPr lang="en-US" sz="1300" dirty="0"/>
           </a:p>
@@ -2035,65 +2326,90 @@
       </p:sp>
       <p:sp>
         <p:nvSpPr>
-          <p:cNvPr id="10" name="Text 8"/>
-          <p:cNvSpPr/>
-          <p:nvPr/>
-        </p:nvSpPr>
-        <p:spPr>
-          <a:xfrm>
-            <a:off x="594360" y="3108960"/>
-            <a:ext cx="2286000" cy="914400"/>
-          </a:xfrm>
-          <a:prstGeom prst="rect">
-            <a:avLst/>
-          </a:prstGeom>
-          <a:noFill/>
-          <a:ln/>
-        </p:spPr>
-        <p:txBody>
-          <a:bodyPr wrap="square" lIns="0" tIns="0" rIns="0" bIns="0" rtlCol="0" anchor="ctr"/>
-          <a:lstStyle/>
-          <a:p>
-            <a:pPr indent="0" marL="0">
+          <p:cNvPr id="14" name="Text 12"/>
+          <p:cNvSpPr/>
+          <p:nvPr/>
+        </p:nvSpPr>
+        <p:spPr>
+          <a:xfrm>
+            <a:off x="3520440" y="3566160"/>
+            <a:ext cx="2377440" cy="640080"/>
+          </a:xfrm>
+          <a:prstGeom prst="rect">
+            <a:avLst/>
+          </a:prstGeom>
+          <a:noFill/>
+          <a:ln/>
+        </p:spPr>
+        <p:txBody>
+          <a:bodyPr wrap="square" rtlCol="0" anchor="ctr"/>
+          <a:lstStyle/>
+          <a:p>
+            <a:pPr algn="ctr" indent="0" marL="0">
+              <a:lnSpc>
+                <a:spcPct val="120000"/>
+              </a:lnSpc>
               <a:buNone/>
             </a:pPr>
             <a:r>
               <a:rPr lang="en-US" sz="1100" dirty="0">
                 <a:solidFill>
-                  <a:srgbClr val="495670"/>
-                </a:solidFill>
-                <a:latin typeface="Calibri" pitchFamily="34" charset="0"/>
-                <a:ea typeface="Calibri" pitchFamily="34" charset="-122"/>
-                <a:cs typeface="Calibri" pitchFamily="34" charset="-120"/>
-              </a:rPr>
-              <a:t>Multiple choice, open-ended, true/false distribution</a:t>
+                  <a:srgbClr val="718096"/>
+                </a:solidFill>
+                <a:latin typeface="Calibri" pitchFamily="34" charset="0"/>
+                <a:ea typeface="Calibri" pitchFamily="34" charset="-122"/>
+                <a:cs typeface="Calibri" pitchFamily="34" charset="-120"/>
+              </a:rPr>
+              <a:t>Shows how frequently each</a:t>
             </a:r>
             <a:endParaRPr lang="en-US" sz="1100" dirty="0"/>
           </a:p>
-        </p:txBody>
-      </p:sp>
-      <p:sp>
-        <p:nvSpPr>
-          <p:cNvPr id="11" name="Shape 9"/>
-          <p:cNvSpPr/>
-          <p:nvPr/>
-        </p:nvSpPr>
-        <p:spPr>
-          <a:xfrm>
-            <a:off x="3291840" y="2560320"/>
-            <a:ext cx="2560320" cy="1645920"/>
-          </a:xfrm>
-          <a:prstGeom prst="rect">
-            <a:avLst/>
+          <a:p>
+            <a:pPr algn="ctr" indent="0" marL="0">
+              <a:lnSpc>
+                <a:spcPct val="120000"/>
+              </a:lnSpc>
+              <a:buNone/>
+            </a:pPr>
+            <a:r>
+              <a:rPr lang="en-US" sz="1100" dirty="0">
+                <a:solidFill>
+                  <a:srgbClr val="718096"/>
+                </a:solidFill>
+                <a:latin typeface="Calibri" pitchFamily="34" charset="0"/>
+                <a:ea typeface="Calibri" pitchFamily="34" charset="-122"/>
+                <a:cs typeface="Calibri" pitchFamily="34" charset="-120"/>
+              </a:rPr>
+              <a:t>topic appears in exams</a:t>
+            </a:r>
+            <a:endParaRPr lang="en-US" sz="1100" dirty="0"/>
+          </a:p>
+        </p:txBody>
+      </p:sp>
+      <p:sp>
+        <p:nvSpPr>
+          <p:cNvPr id="15" name="Shape 13"/>
+          <p:cNvSpPr/>
+          <p:nvPr/>
+        </p:nvSpPr>
+        <p:spPr>
+          <a:xfrm>
+            <a:off x="6217920" y="1920240"/>
+            <a:ext cx="2651760" cy="2377440"/>
+          </a:xfrm>
+          <a:prstGeom prst="roundRect">
+            <a:avLst>
+              <a:gd name="adj" fmla="val 4615"/>
+            </a:avLst>
           </a:prstGeom>
           <a:solidFill>
             <a:srgbClr val="FFFFFF"/>
           </a:solidFill>
           <a:ln/>
           <a:effectLst>
-            <a:outerShdw sx="100000" sy="100000" kx="0" ky="0" algn="bl" rotWithShape="0" blurRad="101600" dist="38100" dir="8100000">
+            <a:outerShdw sx="100000" sy="100000" kx="0" ky="0" algn="bl" rotWithShape="0" blurRad="101600" dist="25400" dir="8100000">
               <a:srgbClr val="000000">
-                <a:alpha val="12000"/>
+                <a:alpha val="10000"/>
               </a:srgbClr>
             </a:outerShdw>
           </a:effectLst>
@@ -2101,276 +2417,193 @@
       </p:sp>
       <p:sp>
         <p:nvSpPr>
-          <p:cNvPr id="12" name="Shape 10"/>
-          <p:cNvSpPr/>
-          <p:nvPr/>
-        </p:nvSpPr>
-        <p:spPr>
-          <a:xfrm>
-            <a:off x="3291840" y="2560320"/>
-            <a:ext cx="2560320" cy="54864"/>
-          </a:xfrm>
-          <a:prstGeom prst="rect">
+          <p:cNvPr id="16" name="Shape 14"/>
+          <p:cNvSpPr/>
+          <p:nvPr/>
+        </p:nvSpPr>
+        <p:spPr>
+          <a:xfrm>
+            <a:off x="7040880" y="2103120"/>
+            <a:ext cx="1005840" cy="1005840"/>
+          </a:xfrm>
+          <a:prstGeom prst="ellipse">
             <a:avLst/>
           </a:prstGeom>
           <a:solidFill>
-            <a:srgbClr val="4A6CF7"/>
+            <a:srgbClr val="E8F0FE"/>
           </a:solidFill>
           <a:ln/>
         </p:spPr>
       </p:sp>
       <p:sp>
         <p:nvSpPr>
-          <p:cNvPr id="13" name="Text 11"/>
-          <p:cNvSpPr/>
-          <p:nvPr/>
-        </p:nvSpPr>
-        <p:spPr>
-          <a:xfrm>
-            <a:off x="3429000" y="2743200"/>
-            <a:ext cx="2286000" cy="365760"/>
-          </a:xfrm>
-          <a:prstGeom prst="rect">
-            <a:avLst/>
-          </a:prstGeom>
-          <a:noFill/>
-          <a:ln/>
-        </p:spPr>
-        <p:txBody>
-          <a:bodyPr wrap="square" lIns="0" tIns="0" rIns="0" bIns="0" rtlCol="0" anchor="ctr"/>
+          <p:cNvPr id="17" name="Text 15"/>
+          <p:cNvSpPr/>
+          <p:nvPr/>
+        </p:nvSpPr>
+        <p:spPr>
+          <a:xfrm>
+            <a:off x="7040880" y="2148840"/>
+            <a:ext cx="1005840" cy="914400"/>
+          </a:xfrm>
+          <a:prstGeom prst="rect">
+            <a:avLst/>
+          </a:prstGeom>
+          <a:noFill/>
+          <a:ln/>
+        </p:spPr>
+        <p:txBody>
+          <a:bodyPr wrap="square" rtlCol="0" anchor="ctr"/>
+          <a:lstStyle/>
+          <a:p>
+            <a:pPr algn="ctr" indent="0" marL="0">
+              <a:buNone/>
+            </a:pPr>
+            <a:r>
+              <a:rPr lang="en-US" sz="3000" dirty="0">
+                <a:solidFill>
+                  <a:srgbClr val="000000"/>
+                </a:solidFill>
+              </a:rPr>
+              <a:t>🎯</a:t>
+            </a:r>
+            <a:endParaRPr lang="en-US" sz="3000" dirty="0"/>
+          </a:p>
+        </p:txBody>
+      </p:sp>
+      <p:sp>
+        <p:nvSpPr>
+          <p:cNvPr id="18" name="Text 16"/>
+          <p:cNvSpPr/>
+          <p:nvPr/>
+        </p:nvSpPr>
+        <p:spPr>
+          <a:xfrm>
+            <a:off x="6355080" y="3200400"/>
+            <a:ext cx="2377440" cy="365760"/>
+          </a:xfrm>
+          <a:prstGeom prst="rect">
+            <a:avLst/>
+          </a:prstGeom>
+          <a:noFill/>
+          <a:ln/>
+        </p:spPr>
+        <p:txBody>
+          <a:bodyPr wrap="square" rtlCol="0" anchor="ctr"/>
+          <a:lstStyle/>
+          <a:p>
+            <a:pPr algn="ctr" indent="0" marL="0">
+              <a:buNone/>
+            </a:pPr>
+            <a:r>
+              <a:rPr lang="en-US" sz="1300" b="1" dirty="0">
+                <a:solidFill>
+                  <a:srgbClr val="1B2A4A"/>
+                </a:solidFill>
+                <a:latin typeface="Calibri" pitchFamily="34" charset="0"/>
+                <a:ea typeface="Calibri" pitchFamily="34" charset="-122"/>
+                <a:cs typeface="Calibri" pitchFamily="34" charset="-120"/>
+              </a:rPr>
+              <a:t>Difficulty Score</a:t>
+            </a:r>
+            <a:endParaRPr lang="en-US" sz="1300" dirty="0"/>
+          </a:p>
+        </p:txBody>
+      </p:sp>
+      <p:sp>
+        <p:nvSpPr>
+          <p:cNvPr id="19" name="Text 17"/>
+          <p:cNvSpPr/>
+          <p:nvPr/>
+        </p:nvSpPr>
+        <p:spPr>
+          <a:xfrm>
+            <a:off x="6355080" y="3566160"/>
+            <a:ext cx="2377440" cy="640080"/>
+          </a:xfrm>
+          <a:prstGeom prst="rect">
+            <a:avLst/>
+          </a:prstGeom>
+          <a:noFill/>
+          <a:ln/>
+        </p:spPr>
+        <p:txBody>
+          <a:bodyPr wrap="square" rtlCol="0" anchor="ctr"/>
+          <a:lstStyle/>
+          <a:p>
+            <a:pPr algn="ctr" indent="0" marL="0">
+              <a:lnSpc>
+                <a:spcPct val="120000"/>
+              </a:lnSpc>
+              <a:buNone/>
+            </a:pPr>
+            <a:r>
+              <a:rPr lang="en-US" sz="1100" dirty="0">
+                <a:solidFill>
+                  <a:srgbClr val="718096"/>
+                </a:solidFill>
+                <a:latin typeface="Calibri" pitchFamily="34" charset="0"/>
+                <a:ea typeface="Calibri" pitchFamily="34" charset="-122"/>
+                <a:cs typeface="Calibri" pitchFamily="34" charset="-120"/>
+              </a:rPr>
+              <a:t>Calculates the overall</a:t>
+            </a:r>
+            <a:endParaRPr lang="en-US" sz="1100" dirty="0"/>
+          </a:p>
+          <a:p>
+            <a:pPr algn="ctr" indent="0" marL="0">
+              <a:lnSpc>
+                <a:spcPct val="120000"/>
+              </a:lnSpc>
+              <a:buNone/>
+            </a:pPr>
+            <a:r>
+              <a:rPr lang="en-US" sz="1100" dirty="0">
+                <a:solidFill>
+                  <a:srgbClr val="718096"/>
+                </a:solidFill>
+                <a:latin typeface="Calibri" pitchFamily="34" charset="0"/>
+                <a:ea typeface="Calibri" pitchFamily="34" charset="-122"/>
+                <a:cs typeface="Calibri" pitchFamily="34" charset="-120"/>
+              </a:rPr>
+              <a:t>difficulty level of exams</a:t>
+            </a:r>
+            <a:endParaRPr lang="en-US" sz="1100" dirty="0"/>
+          </a:p>
+        </p:txBody>
+      </p:sp>
+      <p:sp>
+        <p:nvSpPr>
+          <p:cNvPr id="20" name="Text 18"/>
+          <p:cNvSpPr/>
+          <p:nvPr/>
+        </p:nvSpPr>
+        <p:spPr>
+          <a:xfrm>
+            <a:off x="457200" y="4663440"/>
+            <a:ext cx="6400800" cy="365760"/>
+          </a:xfrm>
+          <a:prstGeom prst="rect">
+            <a:avLst/>
+          </a:prstGeom>
+          <a:noFill/>
+          <a:ln/>
+        </p:spPr>
+        <p:txBody>
+          <a:bodyPr wrap="square" rtlCol="0" anchor="ctr"/>
           <a:lstStyle/>
           <a:p>
             <a:pPr indent="0" marL="0">
               <a:buNone/>
             </a:pPr>
             <a:r>
-              <a:rPr lang="en-US" sz="1300" b="1" dirty="0">
-                <a:solidFill>
-                  <a:srgbClr val="1E2761"/>
-                </a:solidFill>
-                <a:latin typeface="Calibri" pitchFamily="34" charset="0"/>
-                <a:ea typeface="Calibri" pitchFamily="34" charset="-122"/>
-                <a:cs typeface="Calibri" pitchFamily="34" charset="-120"/>
-              </a:rPr>
-              <a:t>Topic Distribution</a:t>
-            </a:r>
-            <a:endParaRPr lang="en-US" sz="1300" dirty="0"/>
-          </a:p>
-        </p:txBody>
-      </p:sp>
-      <p:sp>
-        <p:nvSpPr>
-          <p:cNvPr id="14" name="Text 12"/>
-          <p:cNvSpPr/>
-          <p:nvPr/>
-        </p:nvSpPr>
-        <p:spPr>
-          <a:xfrm>
-            <a:off x="3429000" y="3108960"/>
-            <a:ext cx="2286000" cy="914400"/>
-          </a:xfrm>
-          <a:prstGeom prst="rect">
-            <a:avLst/>
-          </a:prstGeom>
-          <a:noFill/>
-          <a:ln/>
-        </p:spPr>
-        <p:txBody>
-          <a:bodyPr wrap="square" lIns="0" tIns="0" rIns="0" bIns="0" rtlCol="0" anchor="ctr"/>
-          <a:lstStyle/>
-          <a:p>
-            <a:pPr indent="0" marL="0">
-              <a:buNone/>
-            </a:pPr>
-            <a:r>
-              <a:rPr lang="en-US" sz="1100" dirty="0">
-                <a:solidFill>
-                  <a:srgbClr val="495670"/>
-                </a:solidFill>
-                <a:latin typeface="Calibri" pitchFamily="34" charset="0"/>
-                <a:ea typeface="Calibri" pitchFamily="34" charset="-122"/>
-                <a:cs typeface="Calibri" pitchFamily="34" charset="-120"/>
-              </a:rPr>
-              <a:t>Shows how frequently each topic appears in exams</a:t>
-            </a:r>
-            <a:endParaRPr lang="en-US" sz="1100" dirty="0"/>
-          </a:p>
-        </p:txBody>
-      </p:sp>
-      <p:sp>
-        <p:nvSpPr>
-          <p:cNvPr id="15" name="Shape 13"/>
-          <p:cNvSpPr/>
-          <p:nvPr/>
-        </p:nvSpPr>
-        <p:spPr>
-          <a:xfrm>
-            <a:off x="6126480" y="2560320"/>
-            <a:ext cx="2560320" cy="1645920"/>
-          </a:xfrm>
-          <a:prstGeom prst="rect">
-            <a:avLst/>
-          </a:prstGeom>
-          <a:solidFill>
-            <a:srgbClr val="FFFFFF"/>
-          </a:solidFill>
-          <a:ln/>
-          <a:effectLst>
-            <a:outerShdw sx="100000" sy="100000" kx="0" ky="0" algn="bl" rotWithShape="0" blurRad="101600" dist="38100" dir="8100000">
-              <a:srgbClr val="000000">
-                <a:alpha val="12000"/>
-              </a:srgbClr>
-            </a:outerShdw>
-          </a:effectLst>
-        </p:spPr>
-      </p:sp>
-      <p:sp>
-        <p:nvSpPr>
-          <p:cNvPr id="16" name="Shape 14"/>
-          <p:cNvSpPr/>
-          <p:nvPr/>
-        </p:nvSpPr>
-        <p:spPr>
-          <a:xfrm>
-            <a:off x="6126480" y="2560320"/>
-            <a:ext cx="2560320" cy="54864"/>
-          </a:xfrm>
-          <a:prstGeom prst="rect">
-            <a:avLst/>
-          </a:prstGeom>
-          <a:solidFill>
-            <a:srgbClr val="4A6CF7"/>
-          </a:solidFill>
-          <a:ln/>
-        </p:spPr>
-      </p:sp>
-      <p:sp>
-        <p:nvSpPr>
-          <p:cNvPr id="17" name="Text 15"/>
-          <p:cNvSpPr/>
-          <p:nvPr/>
-        </p:nvSpPr>
-        <p:spPr>
-          <a:xfrm>
-            <a:off x="6263640" y="2743200"/>
-            <a:ext cx="2286000" cy="365760"/>
-          </a:xfrm>
-          <a:prstGeom prst="rect">
-            <a:avLst/>
-          </a:prstGeom>
-          <a:noFill/>
-          <a:ln/>
-        </p:spPr>
-        <p:txBody>
-          <a:bodyPr wrap="square" lIns="0" tIns="0" rIns="0" bIns="0" rtlCol="0" anchor="ctr"/>
-          <a:lstStyle/>
-          <a:p>
-            <a:pPr indent="0" marL="0">
-              <a:buNone/>
-            </a:pPr>
-            <a:r>
-              <a:rPr lang="en-US" sz="1300" b="1" dirty="0">
-                <a:solidFill>
-                  <a:srgbClr val="1E2761"/>
-                </a:solidFill>
-                <a:latin typeface="Calibri" pitchFamily="34" charset="0"/>
-                <a:ea typeface="Calibri" pitchFamily="34" charset="-122"/>
-                <a:cs typeface="Calibri" pitchFamily="34" charset="-120"/>
-              </a:rPr>
-              <a:t>Difficulty Score</a:t>
-            </a:r>
-            <a:endParaRPr lang="en-US" sz="1300" dirty="0"/>
-          </a:p>
-        </p:txBody>
-      </p:sp>
-      <p:sp>
-        <p:nvSpPr>
-          <p:cNvPr id="18" name="Text 16"/>
-          <p:cNvSpPr/>
-          <p:nvPr/>
-        </p:nvSpPr>
-        <p:spPr>
-          <a:xfrm>
-            <a:off x="6263640" y="3108960"/>
-            <a:ext cx="2286000" cy="914400"/>
-          </a:xfrm>
-          <a:prstGeom prst="rect">
-            <a:avLst/>
-          </a:prstGeom>
-          <a:noFill/>
-          <a:ln/>
-        </p:spPr>
-        <p:txBody>
-          <a:bodyPr wrap="square" lIns="0" tIns="0" rIns="0" bIns="0" rtlCol="0" anchor="ctr"/>
-          <a:lstStyle/>
-          <a:p>
-            <a:pPr indent="0" marL="0">
-              <a:buNone/>
-            </a:pPr>
-            <a:r>
-              <a:rPr lang="en-US" sz="1100" dirty="0">
-                <a:solidFill>
-                  <a:srgbClr val="495670"/>
-                </a:solidFill>
-                <a:latin typeface="Calibri" pitchFamily="34" charset="0"/>
-                <a:ea typeface="Calibri" pitchFamily="34" charset="-122"/>
-                <a:cs typeface="Calibri" pitchFamily="34" charset="-120"/>
-              </a:rPr>
-              <a:t>Calculates the overall difficulty level of exams</a:t>
-            </a:r>
-            <a:endParaRPr lang="en-US" sz="1100" dirty="0"/>
-          </a:p>
-        </p:txBody>
-      </p:sp>
-      <p:sp>
-        <p:nvSpPr>
-          <p:cNvPr id="19" name="Shape 17"/>
-          <p:cNvSpPr/>
-          <p:nvPr/>
-        </p:nvSpPr>
-        <p:spPr>
-          <a:xfrm>
-            <a:off x="0" y="4754880"/>
-            <a:ext cx="9144000" cy="388620"/>
-          </a:xfrm>
-          <a:prstGeom prst="rect">
-            <a:avLst/>
-          </a:prstGeom>
-          <a:solidFill>
-            <a:srgbClr val="1E2761"/>
-          </a:solidFill>
-          <a:ln/>
-        </p:spPr>
-      </p:sp>
-      <p:sp>
-        <p:nvSpPr>
-          <p:cNvPr id="20" name="Text 18"/>
-          <p:cNvSpPr/>
-          <p:nvPr/>
-        </p:nvSpPr>
-        <p:spPr>
-          <a:xfrm>
-            <a:off x="457200" y="4754880"/>
-            <a:ext cx="6400800" cy="388620"/>
-          </a:xfrm>
-          <a:prstGeom prst="rect">
-            <a:avLst/>
-          </a:prstGeom>
-          <a:noFill/>
-          <a:ln/>
-        </p:spPr>
-        <p:txBody>
-          <a:bodyPr wrap="square" rtlCol="0" anchor="ctr"/>
-          <a:lstStyle/>
-          <a:p>
-            <a:pPr indent="0" marL="0">
-              <a:buNone/>
-            </a:pPr>
-            <a:r>
               <a:rPr lang="en-US" sz="900" dirty="0">
                 <a:solidFill>
-                  <a:srgbClr val="CADCFC"/>
-                </a:solidFill>
+                  <a:srgbClr val="718096"/>
+                </a:solidFill>
+                <a:latin typeface="Calibri" pitchFamily="34" charset="0"/>
+                <a:ea typeface="Calibri" pitchFamily="34" charset="-122"/>
+                <a:cs typeface="Calibri" pitchFamily="34" charset="-120"/>
               </a:rPr>
               <a:t>ProfAI – UYG338 Software Project Management</a:t>
             </a:r>
@@ -2386,8 +2619,8 @@
         </p:nvSpPr>
         <p:spPr>
           <a:xfrm>
-            <a:off x="7772400" y="4754880"/>
-            <a:ext cx="914400" cy="388620"/>
+            <a:off x="7772400" y="4663440"/>
+            <a:ext cx="914400" cy="365760"/>
           </a:xfrm>
           <a:prstGeom prst="rect">
             <a:avLst/>
@@ -2405,10 +2638,13 @@
             <a:r>
               <a:rPr lang="en-US" sz="900" dirty="0">
                 <a:solidFill>
-                  <a:srgbClr val="CADCFC"/>
-                </a:solidFill>
-              </a:rPr>
-              <a:t>2/8</a:t>
+                  <a:srgbClr val="718096"/>
+                </a:solidFill>
+                <a:latin typeface="Calibri" pitchFamily="34" charset="0"/>
+                <a:ea typeface="Calibri" pitchFamily="34" charset="-122"/>
+                <a:cs typeface="Calibri" pitchFamily="34" charset="-120"/>
+              </a:rPr>
+              <a:t>2/9</a:t>
             </a:r>
             <a:endParaRPr lang="en-US" sz="900" dirty="0"/>
           </a:p>
@@ -2428,7 +2664,7 @@
     <p:bg>
       <p:bgPr>
         <a:solidFill>
-          <a:srgbClr val="F0F3FA"/>
+          <a:srgbClr val="F0F4F8"/>
         </a:solidFill>
       </p:bgPr>
     </p:bg>
@@ -2455,13 +2691,13 @@
         <p:spPr>
           <a:xfrm>
             <a:off x="0" y="0"/>
-            <a:ext cx="9144000" cy="822960"/>
+            <a:ext cx="9144000" cy="54864"/>
           </a:xfrm>
           <a:prstGeom prst="rect">
             <a:avLst/>
           </a:prstGeom>
           <a:solidFill>
-            <a:srgbClr val="1E2761"/>
+            <a:srgbClr val="00B4D8"/>
           </a:solidFill>
           <a:ln/>
         </p:spPr>
@@ -2474,26 +2710,26 @@
         </p:nvSpPr>
         <p:spPr>
           <a:xfrm>
-            <a:off x="548640" y="0"/>
-            <a:ext cx="8229600" cy="822960"/>
-          </a:xfrm>
-          <a:prstGeom prst="rect">
-            <a:avLst/>
-          </a:prstGeom>
-          <a:noFill/>
-          <a:ln/>
-        </p:spPr>
-        <p:txBody>
-          <a:bodyPr wrap="square" rtlCol="0" anchor="ctr"/>
+            <a:off x="548640" y="228600"/>
+            <a:ext cx="8229600" cy="548640"/>
+          </a:xfrm>
+          <a:prstGeom prst="rect">
+            <a:avLst/>
+          </a:prstGeom>
+          <a:noFill/>
+          <a:ln/>
+        </p:spPr>
+        <p:txBody>
+          <a:bodyPr wrap="square" lIns="0" tIns="0" rIns="0" bIns="0" rtlCol="0" anchor="ctr"/>
           <a:lstStyle/>
           <a:p>
             <a:pPr indent="0" marL="0">
               <a:buNone/>
             </a:pPr>
             <a:r>
-              <a:rPr lang="en-US" sz="2200" b="1" dirty="0">
-                <a:solidFill>
-                  <a:srgbClr val="FFFFFF"/>
+              <a:rPr lang="en-US" sz="2800" b="1" dirty="0">
+                <a:solidFill>
+                  <a:srgbClr val="1B2A4A"/>
                 </a:solidFill>
                 <a:latin typeface="Calibri" pitchFamily="34" charset="0"/>
                 <a:ea typeface="Calibri" pitchFamily="34" charset="-122"/>
@@ -2501,7 +2737,7 @@
               </a:rPr>
               <a:t>HW1: Project Planning</a:t>
             </a:r>
-            <a:endParaRPr lang="en-US" sz="2200" dirty="0"/>
+            <a:endParaRPr lang="en-US" sz="2800" dirty="0"/>
           </a:p>
         </p:txBody>
       </p:sp>
@@ -2513,20 +2749,22 @@
         </p:nvSpPr>
         <p:spPr>
           <a:xfrm>
-            <a:off x="457200" y="1097280"/>
-            <a:ext cx="8229600" cy="777240"/>
-          </a:xfrm>
-          <a:prstGeom prst="rect">
-            <a:avLst/>
+            <a:off x="548640" y="1005840"/>
+            <a:ext cx="8046720" cy="822960"/>
+          </a:xfrm>
+          <a:prstGeom prst="roundRect">
+            <a:avLst>
+              <a:gd name="adj" fmla="val 11111"/>
+            </a:avLst>
           </a:prstGeom>
           <a:solidFill>
             <a:srgbClr val="FFFFFF"/>
           </a:solidFill>
           <a:ln/>
           <a:effectLst>
-            <a:outerShdw sx="100000" sy="100000" kx="0" ky="0" algn="bl" rotWithShape="0" blurRad="101600" dist="38100" dir="8100000">
+            <a:outerShdw sx="100000" sy="100000" kx="0" ky="0" algn="bl" rotWithShape="0" blurRad="76200" dist="12700" dir="8100000">
               <a:srgbClr val="000000">
-                <a:alpha val="12000"/>
+                <a:alpha val="6000"/>
               </a:srgbClr>
             </a:outerShdw>
           </a:effectLst>
@@ -2540,14 +2778,16 @@
         </p:nvSpPr>
         <p:spPr>
           <a:xfrm>
-            <a:off x="457200" y="1097280"/>
-            <a:ext cx="73152" cy="777240"/>
-          </a:xfrm>
-          <a:prstGeom prst="rect">
-            <a:avLst/>
+            <a:off x="731520" y="1143000"/>
+            <a:ext cx="548640" cy="548640"/>
+          </a:xfrm>
+          <a:prstGeom prst="roundRect">
+            <a:avLst>
+              <a:gd name="adj" fmla="val 13333"/>
+            </a:avLst>
           </a:prstGeom>
           <a:solidFill>
-            <a:srgbClr val="4A6CF7"/>
+            <a:srgbClr val="E8F0FE"/>
           </a:solidFill>
           <a:ln/>
         </p:spPr>
@@ -2560,8 +2800,44 @@
         </p:nvSpPr>
         <p:spPr>
           <a:xfrm>
-            <a:off x="731520" y="1097280"/>
-            <a:ext cx="2743200" cy="777240"/>
+            <a:off x="731520" y="1143000"/>
+            <a:ext cx="548640" cy="548640"/>
+          </a:xfrm>
+          <a:prstGeom prst="rect">
+            <a:avLst/>
+          </a:prstGeom>
+          <a:noFill/>
+          <a:ln/>
+        </p:spPr>
+        <p:txBody>
+          <a:bodyPr wrap="square" rtlCol="0" anchor="ctr"/>
+          <a:lstStyle/>
+          <a:p>
+            <a:pPr algn="ctr" indent="0" marL="0">
+              <a:buNone/>
+            </a:pPr>
+            <a:r>
+              <a:rPr lang="en-US" sz="2000" dirty="0">
+                <a:solidFill>
+                  <a:srgbClr val="000000"/>
+                </a:solidFill>
+              </a:rPr>
+              <a:t>📋</a:t>
+            </a:r>
+            <a:endParaRPr lang="en-US" sz="2000" dirty="0"/>
+          </a:p>
+        </p:txBody>
+      </p:sp>
+      <p:sp>
+        <p:nvSpPr>
+          <p:cNvPr id="7" name="Text 5"/>
+          <p:cNvSpPr/>
+          <p:nvPr/>
+        </p:nvSpPr>
+        <p:spPr>
+          <a:xfrm>
+            <a:off x="1463040" y="1097280"/>
+            <a:ext cx="6400800" cy="365760"/>
           </a:xfrm>
           <a:prstGeom prst="rect">
             <a:avLst/>
@@ -2579,7 +2855,7 @@
             <a:r>
               <a:rPr lang="en-US" sz="1400" b="1" dirty="0">
                 <a:solidFill>
-                  <a:srgbClr val="1E2761"/>
+                  <a:srgbClr val="1B2A4A"/>
                 </a:solidFill>
                 <a:latin typeface="Calibri" pitchFamily="34" charset="0"/>
                 <a:ea typeface="Calibri" pitchFamily="34" charset="-122"/>
@@ -2593,14 +2869,14 @@
       </p:sp>
       <p:sp>
         <p:nvSpPr>
-          <p:cNvPr id="7" name="Text 5"/>
-          <p:cNvSpPr/>
-          <p:nvPr/>
-        </p:nvSpPr>
-        <p:spPr>
-          <a:xfrm>
-            <a:off x="3200400" y="1097280"/>
-            <a:ext cx="5303520" cy="777240"/>
+          <p:cNvPr id="8" name="Text 6"/>
+          <p:cNvSpPr/>
+          <p:nvPr/>
+        </p:nvSpPr>
+        <p:spPr>
+          <a:xfrm>
+            <a:off x="1463040" y="1417320"/>
+            <a:ext cx="6400800" cy="320040"/>
           </a:xfrm>
           <a:prstGeom prst="rect">
             <a:avLst/>
@@ -2616,9 +2892,9 @@
               <a:buNone/>
             </a:pPr>
             <a:r>
-              <a:rPr lang="en-US" sz="1200" dirty="0">
-                <a:solidFill>
-                  <a:srgbClr val="495670"/>
+              <a:rPr lang="en-US" sz="1100" dirty="0">
+                <a:solidFill>
+                  <a:srgbClr val="718096"/>
                 </a:solidFill>
                 <a:latin typeface="Calibri" pitchFamily="34" charset="0"/>
                 <a:ea typeface="Calibri" pitchFamily="34" charset="-122"/>
@@ -2626,32 +2902,34 @@
               </a:rPr>
               <a:t>4 Sprints, 30 tasks, Story Point assignments</a:t>
             </a:r>
-            <a:endParaRPr lang="en-US" sz="1200" dirty="0"/>
-          </a:p>
-        </p:txBody>
-      </p:sp>
-      <p:sp>
-        <p:nvSpPr>
-          <p:cNvPr id="8" name="Shape 6"/>
-          <p:cNvSpPr/>
-          <p:nvPr/>
-        </p:nvSpPr>
-        <p:spPr>
-          <a:xfrm>
-            <a:off x="457200" y="2011680"/>
-            <a:ext cx="8229600" cy="777240"/>
-          </a:xfrm>
-          <a:prstGeom prst="rect">
-            <a:avLst/>
+            <a:endParaRPr lang="en-US" sz="1100" dirty="0"/>
+          </a:p>
+        </p:txBody>
+      </p:sp>
+      <p:sp>
+        <p:nvSpPr>
+          <p:cNvPr id="9" name="Shape 7"/>
+          <p:cNvSpPr/>
+          <p:nvPr/>
+        </p:nvSpPr>
+        <p:spPr>
+          <a:xfrm>
+            <a:off x="548640" y="1965960"/>
+            <a:ext cx="8046720" cy="822960"/>
+          </a:xfrm>
+          <a:prstGeom prst="roundRect">
+            <a:avLst>
+              <a:gd name="adj" fmla="val 11111"/>
+            </a:avLst>
           </a:prstGeom>
           <a:solidFill>
             <a:srgbClr val="FFFFFF"/>
           </a:solidFill>
           <a:ln/>
           <a:effectLst>
-            <a:outerShdw sx="100000" sy="100000" kx="0" ky="0" algn="bl" rotWithShape="0" blurRad="101600" dist="38100" dir="8100000">
+            <a:outerShdw sx="100000" sy="100000" kx="0" ky="0" algn="bl" rotWithShape="0" blurRad="76200" dist="12700" dir="8100000">
               <a:srgbClr val="000000">
-                <a:alpha val="12000"/>
+                <a:alpha val="6000"/>
               </a:srgbClr>
             </a:outerShdw>
           </a:effectLst>
@@ -2659,34 +2937,72 @@
       </p:sp>
       <p:sp>
         <p:nvSpPr>
-          <p:cNvPr id="9" name="Shape 7"/>
-          <p:cNvSpPr/>
-          <p:nvPr/>
-        </p:nvSpPr>
-        <p:spPr>
-          <a:xfrm>
-            <a:off x="457200" y="2011680"/>
-            <a:ext cx="73152" cy="777240"/>
-          </a:xfrm>
-          <a:prstGeom prst="rect">
-            <a:avLst/>
+          <p:cNvPr id="10" name="Shape 8"/>
+          <p:cNvSpPr/>
+          <p:nvPr/>
+        </p:nvSpPr>
+        <p:spPr>
+          <a:xfrm>
+            <a:off x="731520" y="2103120"/>
+            <a:ext cx="548640" cy="548640"/>
+          </a:xfrm>
+          <a:prstGeom prst="roundRect">
+            <a:avLst>
+              <a:gd name="adj" fmla="val 13333"/>
+            </a:avLst>
           </a:prstGeom>
           <a:solidFill>
-            <a:srgbClr val="4A6CF7"/>
+            <a:srgbClr val="E8F0FE"/>
           </a:solidFill>
           <a:ln/>
         </p:spPr>
       </p:sp>
       <p:sp>
         <p:nvSpPr>
-          <p:cNvPr id="10" name="Text 8"/>
-          <p:cNvSpPr/>
-          <p:nvPr/>
-        </p:nvSpPr>
-        <p:spPr>
-          <a:xfrm>
-            <a:off x="731520" y="2011680"/>
-            <a:ext cx="2743200" cy="777240"/>
+          <p:cNvPr id="11" name="Text 9"/>
+          <p:cNvSpPr/>
+          <p:nvPr/>
+        </p:nvSpPr>
+        <p:spPr>
+          <a:xfrm>
+            <a:off x="731520" y="2103120"/>
+            <a:ext cx="548640" cy="548640"/>
+          </a:xfrm>
+          <a:prstGeom prst="rect">
+            <a:avLst/>
+          </a:prstGeom>
+          <a:noFill/>
+          <a:ln/>
+        </p:spPr>
+        <p:txBody>
+          <a:bodyPr wrap="square" rtlCol="0" anchor="ctr"/>
+          <a:lstStyle/>
+          <a:p>
+            <a:pPr algn="ctr" indent="0" marL="0">
+              <a:buNone/>
+            </a:pPr>
+            <a:r>
+              <a:rPr lang="en-US" sz="2000" dirty="0">
+                <a:solidFill>
+                  <a:srgbClr val="000000"/>
+                </a:solidFill>
+              </a:rPr>
+              <a:t>📄</a:t>
+            </a:r>
+            <a:endParaRPr lang="en-US" sz="2000" dirty="0"/>
+          </a:p>
+        </p:txBody>
+      </p:sp>
+      <p:sp>
+        <p:nvSpPr>
+          <p:cNvPr id="12" name="Text 10"/>
+          <p:cNvSpPr/>
+          <p:nvPr/>
+        </p:nvSpPr>
+        <p:spPr>
+          <a:xfrm>
+            <a:off x="1463040" y="2057400"/>
+            <a:ext cx="6400800" cy="365760"/>
           </a:xfrm>
           <a:prstGeom prst="rect">
             <a:avLst/>
@@ -2704,7 +3020,7 @@
             <a:r>
               <a:rPr lang="en-US" sz="1400" b="1" dirty="0">
                 <a:solidFill>
-                  <a:srgbClr val="1E2761"/>
+                  <a:srgbClr val="1B2A4A"/>
                 </a:solidFill>
                 <a:latin typeface="Calibri" pitchFamily="34" charset="0"/>
                 <a:ea typeface="Calibri" pitchFamily="34" charset="-122"/>
@@ -2718,14 +3034,14 @@
       </p:sp>
       <p:sp>
         <p:nvSpPr>
-          <p:cNvPr id="11" name="Text 9"/>
-          <p:cNvSpPr/>
-          <p:nvPr/>
-        </p:nvSpPr>
-        <p:spPr>
-          <a:xfrm>
-            <a:off x="3200400" y="2011680"/>
-            <a:ext cx="5303520" cy="777240"/>
+          <p:cNvPr id="13" name="Text 11"/>
+          <p:cNvSpPr/>
+          <p:nvPr/>
+        </p:nvSpPr>
+        <p:spPr>
+          <a:xfrm>
+            <a:off x="1463040" y="2377440"/>
+            <a:ext cx="6400800" cy="320040"/>
           </a:xfrm>
           <a:prstGeom prst="rect">
             <a:avLst/>
@@ -2741,42 +3057,44 @@
               <a:buNone/>
             </a:pPr>
             <a:r>
-              <a:rPr lang="en-US" sz="1200" dirty="0">
-                <a:solidFill>
-                  <a:srgbClr val="495670"/>
-                </a:solidFill>
-                <a:latin typeface="Calibri" pitchFamily="34" charset="0"/>
-                <a:ea typeface="Calibri" pitchFamily="34" charset="-122"/>
-                <a:cs typeface="Calibri" pitchFamily="34" charset="-120"/>
-              </a:rPr>
-              <a:t>Overview, Team, Timeline, Budget, Risk, SWOT, Communication</a:t>
-            </a:r>
-            <a:endParaRPr lang="en-US" sz="1200" dirty="0"/>
-          </a:p>
-        </p:txBody>
-      </p:sp>
-      <p:sp>
-        <p:nvSpPr>
-          <p:cNvPr id="12" name="Shape 10"/>
-          <p:cNvSpPr/>
-          <p:nvPr/>
-        </p:nvSpPr>
-        <p:spPr>
-          <a:xfrm>
-            <a:off x="457200" y="2926080"/>
-            <a:ext cx="8229600" cy="777240"/>
-          </a:xfrm>
-          <a:prstGeom prst="rect">
-            <a:avLst/>
+              <a:rPr lang="en-US" sz="1100" dirty="0">
+                <a:solidFill>
+                  <a:srgbClr val="718096"/>
+                </a:solidFill>
+                <a:latin typeface="Calibri" pitchFamily="34" charset="0"/>
+                <a:ea typeface="Calibri" pitchFamily="34" charset="-122"/>
+                <a:cs typeface="Calibri" pitchFamily="34" charset="-120"/>
+              </a:rPr>
+              <a:t>Overview, Team, Timeline, Budget, Risk, SWOT</a:t>
+            </a:r>
+            <a:endParaRPr lang="en-US" sz="1100" dirty="0"/>
+          </a:p>
+        </p:txBody>
+      </p:sp>
+      <p:sp>
+        <p:nvSpPr>
+          <p:cNvPr id="14" name="Shape 12"/>
+          <p:cNvSpPr/>
+          <p:nvPr/>
+        </p:nvSpPr>
+        <p:spPr>
+          <a:xfrm>
+            <a:off x="548640" y="2926080"/>
+            <a:ext cx="8046720" cy="822960"/>
+          </a:xfrm>
+          <a:prstGeom prst="roundRect">
+            <a:avLst>
+              <a:gd name="adj" fmla="val 11111"/>
+            </a:avLst>
           </a:prstGeom>
           <a:solidFill>
             <a:srgbClr val="FFFFFF"/>
           </a:solidFill>
           <a:ln/>
           <a:effectLst>
-            <a:outerShdw sx="100000" sy="100000" kx="0" ky="0" algn="bl" rotWithShape="0" blurRad="101600" dist="38100" dir="8100000">
+            <a:outerShdw sx="100000" sy="100000" kx="0" ky="0" algn="bl" rotWithShape="0" blurRad="76200" dist="12700" dir="8100000">
               <a:srgbClr val="000000">
-                <a:alpha val="12000"/>
+                <a:alpha val="6000"/>
               </a:srgbClr>
             </a:outerShdw>
           </a:effectLst>
@@ -2784,34 +3102,72 @@
       </p:sp>
       <p:sp>
         <p:nvSpPr>
-          <p:cNvPr id="13" name="Shape 11"/>
-          <p:cNvSpPr/>
-          <p:nvPr/>
-        </p:nvSpPr>
-        <p:spPr>
-          <a:xfrm>
-            <a:off x="457200" y="2926080"/>
-            <a:ext cx="73152" cy="777240"/>
-          </a:xfrm>
-          <a:prstGeom prst="rect">
-            <a:avLst/>
+          <p:cNvPr id="15" name="Shape 13"/>
+          <p:cNvSpPr/>
+          <p:nvPr/>
+        </p:nvSpPr>
+        <p:spPr>
+          <a:xfrm>
+            <a:off x="731520" y="3063240"/>
+            <a:ext cx="548640" cy="548640"/>
+          </a:xfrm>
+          <a:prstGeom prst="roundRect">
+            <a:avLst>
+              <a:gd name="adj" fmla="val 13333"/>
+            </a:avLst>
           </a:prstGeom>
           <a:solidFill>
-            <a:srgbClr val="4A6CF7"/>
+            <a:srgbClr val="E8F0FE"/>
           </a:solidFill>
           <a:ln/>
         </p:spPr>
       </p:sp>
       <p:sp>
         <p:nvSpPr>
-          <p:cNvPr id="14" name="Text 12"/>
-          <p:cNvSpPr/>
-          <p:nvPr/>
-        </p:nvSpPr>
-        <p:spPr>
-          <a:xfrm>
-            <a:off x="731520" y="2926080"/>
-            <a:ext cx="2743200" cy="777240"/>
+          <p:cNvPr id="16" name="Text 14"/>
+          <p:cNvSpPr/>
+          <p:nvPr/>
+        </p:nvSpPr>
+        <p:spPr>
+          <a:xfrm>
+            <a:off x="731520" y="3063240"/>
+            <a:ext cx="548640" cy="548640"/>
+          </a:xfrm>
+          <a:prstGeom prst="rect">
+            <a:avLst/>
+          </a:prstGeom>
+          <a:noFill/>
+          <a:ln/>
+        </p:spPr>
+        <p:txBody>
+          <a:bodyPr wrap="square" rtlCol="0" anchor="ctr"/>
+          <a:lstStyle/>
+          <a:p>
+            <a:pPr algn="ctr" indent="0" marL="0">
+              <a:buNone/>
+            </a:pPr>
+            <a:r>
+              <a:rPr lang="en-US" sz="2000" dirty="0">
+                <a:solidFill>
+                  <a:srgbClr val="000000"/>
+                </a:solidFill>
+              </a:rPr>
+              <a:t>📀</a:t>
+            </a:r>
+            <a:endParaRPr lang="en-US" sz="2000" dirty="0"/>
+          </a:p>
+        </p:txBody>
+      </p:sp>
+      <p:sp>
+        <p:nvSpPr>
+          <p:cNvPr id="17" name="Text 15"/>
+          <p:cNvSpPr/>
+          <p:nvPr/>
+        </p:nvSpPr>
+        <p:spPr>
+          <a:xfrm>
+            <a:off x="1463040" y="3017520"/>
+            <a:ext cx="6400800" cy="365760"/>
           </a:xfrm>
           <a:prstGeom prst="rect">
             <a:avLst/>
@@ -2829,7 +3185,7 @@
             <a:r>
               <a:rPr lang="en-US" sz="1400" b="1" dirty="0">
                 <a:solidFill>
-                  <a:srgbClr val="1E2761"/>
+                  <a:srgbClr val="1B2A4A"/>
                 </a:solidFill>
                 <a:latin typeface="Calibri" pitchFamily="34" charset="0"/>
                 <a:ea typeface="Calibri" pitchFamily="34" charset="-122"/>
@@ -2843,14 +3199,14 @@
       </p:sp>
       <p:sp>
         <p:nvSpPr>
-          <p:cNvPr id="15" name="Text 13"/>
-          <p:cNvSpPr/>
-          <p:nvPr/>
-        </p:nvSpPr>
-        <p:spPr>
-          <a:xfrm>
-            <a:off x="3200400" y="2926080"/>
-            <a:ext cx="5303520" cy="777240"/>
+          <p:cNvPr id="18" name="Text 16"/>
+          <p:cNvSpPr/>
+          <p:nvPr/>
+        </p:nvSpPr>
+        <p:spPr>
+          <a:xfrm>
+            <a:off x="1463040" y="3337560"/>
+            <a:ext cx="6400800" cy="320040"/>
           </a:xfrm>
           <a:prstGeom prst="rect">
             <a:avLst/>
@@ -2866,9 +3222,9 @@
               <a:buNone/>
             </a:pPr>
             <a:r>
-              <a:rPr lang="en-US" sz="1200" dirty="0">
-                <a:solidFill>
-                  <a:srgbClr val="495670"/>
+              <a:rPr lang="en-US" sz="1100" dirty="0">
+                <a:solidFill>
+                  <a:srgbClr val="718096"/>
                 </a:solidFill>
                 <a:latin typeface="Calibri" pitchFamily="34" charset="0"/>
                 <a:ea typeface="Calibri" pitchFamily="34" charset="-122"/>
@@ -2876,32 +3232,34 @@
               </a:rPr>
               <a:t>Class Diagram and Use Case Diagram</a:t>
             </a:r>
-            <a:endParaRPr lang="en-US" sz="1200" dirty="0"/>
-          </a:p>
-        </p:txBody>
-      </p:sp>
-      <p:sp>
-        <p:nvSpPr>
-          <p:cNvPr id="16" name="Shape 14"/>
-          <p:cNvSpPr/>
-          <p:nvPr/>
-        </p:nvSpPr>
-        <p:spPr>
-          <a:xfrm>
-            <a:off x="457200" y="3840480"/>
-            <a:ext cx="8229600" cy="777240"/>
-          </a:xfrm>
-          <a:prstGeom prst="rect">
-            <a:avLst/>
+            <a:endParaRPr lang="en-US" sz="1100" dirty="0"/>
+          </a:p>
+        </p:txBody>
+      </p:sp>
+      <p:sp>
+        <p:nvSpPr>
+          <p:cNvPr id="19" name="Shape 17"/>
+          <p:cNvSpPr/>
+          <p:nvPr/>
+        </p:nvSpPr>
+        <p:spPr>
+          <a:xfrm>
+            <a:off x="548640" y="3886200"/>
+            <a:ext cx="8046720" cy="822960"/>
+          </a:xfrm>
+          <a:prstGeom prst="roundRect">
+            <a:avLst>
+              <a:gd name="adj" fmla="val 11111"/>
+            </a:avLst>
           </a:prstGeom>
           <a:solidFill>
             <a:srgbClr val="FFFFFF"/>
           </a:solidFill>
           <a:ln/>
           <a:effectLst>
-            <a:outerShdw sx="100000" sy="100000" kx="0" ky="0" algn="bl" rotWithShape="0" blurRad="101600" dist="38100" dir="8100000">
+            <a:outerShdw sx="100000" sy="100000" kx="0" ky="0" algn="bl" rotWithShape="0" blurRad="76200" dist="12700" dir="8100000">
               <a:srgbClr val="000000">
-                <a:alpha val="12000"/>
+                <a:alpha val="6000"/>
               </a:srgbClr>
             </a:outerShdw>
           </a:effectLst>
@@ -2909,34 +3267,72 @@
       </p:sp>
       <p:sp>
         <p:nvSpPr>
-          <p:cNvPr id="17" name="Shape 15"/>
-          <p:cNvSpPr/>
-          <p:nvPr/>
-        </p:nvSpPr>
-        <p:spPr>
-          <a:xfrm>
-            <a:off x="457200" y="3840480"/>
-            <a:ext cx="73152" cy="777240"/>
-          </a:xfrm>
-          <a:prstGeom prst="rect">
-            <a:avLst/>
+          <p:cNvPr id="20" name="Shape 18"/>
+          <p:cNvSpPr/>
+          <p:nvPr/>
+        </p:nvSpPr>
+        <p:spPr>
+          <a:xfrm>
+            <a:off x="731520" y="4023360"/>
+            <a:ext cx="548640" cy="548640"/>
+          </a:xfrm>
+          <a:prstGeom prst="roundRect">
+            <a:avLst>
+              <a:gd name="adj" fmla="val 13333"/>
+            </a:avLst>
           </a:prstGeom>
           <a:solidFill>
-            <a:srgbClr val="4A6CF7"/>
+            <a:srgbClr val="E8F0FE"/>
           </a:solidFill>
           <a:ln/>
         </p:spPr>
       </p:sp>
       <p:sp>
         <p:nvSpPr>
-          <p:cNvPr id="18" name="Text 16"/>
-          <p:cNvSpPr/>
-          <p:nvPr/>
-        </p:nvSpPr>
-        <p:spPr>
-          <a:xfrm>
-            <a:off x="731520" y="3840480"/>
-            <a:ext cx="2743200" cy="777240"/>
+          <p:cNvPr id="21" name="Text 19"/>
+          <p:cNvSpPr/>
+          <p:nvPr/>
+        </p:nvSpPr>
+        <p:spPr>
+          <a:xfrm>
+            <a:off x="731520" y="4023360"/>
+            <a:ext cx="548640" cy="548640"/>
+          </a:xfrm>
+          <a:prstGeom prst="rect">
+            <a:avLst/>
+          </a:prstGeom>
+          <a:noFill/>
+          <a:ln/>
+        </p:spPr>
+        <p:txBody>
+          <a:bodyPr wrap="square" rtlCol="0" anchor="ctr"/>
+          <a:lstStyle/>
+          <a:p>
+            <a:pPr algn="ctr" indent="0" marL="0">
+              <a:buNone/>
+            </a:pPr>
+            <a:r>
+              <a:rPr lang="en-US" sz="2000" dirty="0">
+                <a:solidFill>
+                  <a:srgbClr val="000000"/>
+                </a:solidFill>
+              </a:rPr>
+              <a:t>💻</a:t>
+            </a:r>
+            <a:endParaRPr lang="en-US" sz="2000" dirty="0"/>
+          </a:p>
+        </p:txBody>
+      </p:sp>
+      <p:sp>
+        <p:nvSpPr>
+          <p:cNvPr id="22" name="Text 20"/>
+          <p:cNvSpPr/>
+          <p:nvPr/>
+        </p:nvSpPr>
+        <p:spPr>
+          <a:xfrm>
+            <a:off x="1463040" y="3977640"/>
+            <a:ext cx="6400800" cy="365760"/>
           </a:xfrm>
           <a:prstGeom prst="rect">
             <a:avLst/>
@@ -2954,7 +3350,7 @@
             <a:r>
               <a:rPr lang="en-US" sz="1400" b="1" dirty="0">
                 <a:solidFill>
-                  <a:srgbClr val="1E2761"/>
+                  <a:srgbClr val="1B2A4A"/>
                 </a:solidFill>
                 <a:latin typeface="Calibri" pitchFamily="34" charset="0"/>
                 <a:ea typeface="Calibri" pitchFamily="34" charset="-122"/>
@@ -2968,14 +3364,14 @@
       </p:sp>
       <p:sp>
         <p:nvSpPr>
-          <p:cNvPr id="19" name="Text 17"/>
-          <p:cNvSpPr/>
-          <p:nvPr/>
-        </p:nvSpPr>
-        <p:spPr>
-          <a:xfrm>
-            <a:off x="3200400" y="3840480"/>
-            <a:ext cx="5303520" cy="777240"/>
+          <p:cNvPr id="23" name="Text 21"/>
+          <p:cNvSpPr/>
+          <p:nvPr/>
+        </p:nvSpPr>
+        <p:spPr>
+          <a:xfrm>
+            <a:off x="1463040" y="4297680"/>
+            <a:ext cx="6400800" cy="320040"/>
           </a:xfrm>
           <a:prstGeom prst="rect">
             <a:avLst/>
@@ -2991,9 +3387,9 @@
               <a:buNone/>
             </a:pPr>
             <a:r>
-              <a:rPr lang="en-US" sz="1200" dirty="0">
-                <a:solidFill>
-                  <a:srgbClr val="495670"/>
+              <a:rPr lang="en-US" sz="1100" dirty="0">
+                <a:solidFill>
+                  <a:srgbClr val="718096"/>
                 </a:solidFill>
                 <a:latin typeface="Calibri" pitchFamily="34" charset="0"/>
                 <a:ea typeface="Calibri" pitchFamily="34" charset="-122"/>
@@ -3001,40 +3397,20 @@
               </a:rPr>
               <a:t>Monorepo structure, CI/CD pipeline</a:t>
             </a:r>
-            <a:endParaRPr lang="en-US" sz="1200" dirty="0"/>
-          </a:p>
-        </p:txBody>
-      </p:sp>
-      <p:sp>
-        <p:nvSpPr>
-          <p:cNvPr id="20" name="Shape 18"/>
-          <p:cNvSpPr/>
-          <p:nvPr/>
-        </p:nvSpPr>
-        <p:spPr>
-          <a:xfrm>
-            <a:off x="0" y="4754880"/>
-            <a:ext cx="9144000" cy="388620"/>
-          </a:xfrm>
-          <a:prstGeom prst="rect">
-            <a:avLst/>
-          </a:prstGeom>
-          <a:solidFill>
-            <a:srgbClr val="1E2761"/>
-          </a:solidFill>
-          <a:ln/>
-        </p:spPr>
-      </p:sp>
-      <p:sp>
-        <p:nvSpPr>
-          <p:cNvPr id="21" name="Text 19"/>
-          <p:cNvSpPr/>
-          <p:nvPr/>
-        </p:nvSpPr>
-        <p:spPr>
-          <a:xfrm>
-            <a:off x="457200" y="4754880"/>
-            <a:ext cx="6400800" cy="388620"/>
+            <a:endParaRPr lang="en-US" sz="1100" dirty="0"/>
+          </a:p>
+        </p:txBody>
+      </p:sp>
+      <p:sp>
+        <p:nvSpPr>
+          <p:cNvPr id="24" name="Text 22"/>
+          <p:cNvSpPr/>
+          <p:nvPr/>
+        </p:nvSpPr>
+        <p:spPr>
+          <a:xfrm>
+            <a:off x="457200" y="4663440"/>
+            <a:ext cx="6400800" cy="365760"/>
           </a:xfrm>
           <a:prstGeom prst="rect">
             <a:avLst/>
@@ -3052,8 +3428,11 @@
             <a:r>
               <a:rPr lang="en-US" sz="900" dirty="0">
                 <a:solidFill>
-                  <a:srgbClr val="CADCFC"/>
-                </a:solidFill>
+                  <a:srgbClr val="718096"/>
+                </a:solidFill>
+                <a:latin typeface="Calibri" pitchFamily="34" charset="0"/>
+                <a:ea typeface="Calibri" pitchFamily="34" charset="-122"/>
+                <a:cs typeface="Calibri" pitchFamily="34" charset="-120"/>
               </a:rPr>
               <a:t>ProfAI – UYG338 Software Project Management</a:t>
             </a:r>
@@ -3063,14 +3442,14 @@
       </p:sp>
       <p:sp>
         <p:nvSpPr>
-          <p:cNvPr id="22" name="Text 20"/>
-          <p:cNvSpPr/>
-          <p:nvPr/>
-        </p:nvSpPr>
-        <p:spPr>
-          <a:xfrm>
-            <a:off x="7772400" y="4754880"/>
-            <a:ext cx="914400" cy="388620"/>
+          <p:cNvPr id="25" name="Text 23"/>
+          <p:cNvSpPr/>
+          <p:nvPr/>
+        </p:nvSpPr>
+        <p:spPr>
+          <a:xfrm>
+            <a:off x="7772400" y="4663440"/>
+            <a:ext cx="914400" cy="365760"/>
           </a:xfrm>
           <a:prstGeom prst="rect">
             <a:avLst/>
@@ -3088,10 +3467,13 @@
             <a:r>
               <a:rPr lang="en-US" sz="900" dirty="0">
                 <a:solidFill>
-                  <a:srgbClr val="CADCFC"/>
-                </a:solidFill>
-              </a:rPr>
-              <a:t>3/8</a:t>
+                  <a:srgbClr val="718096"/>
+                </a:solidFill>
+                <a:latin typeface="Calibri" pitchFamily="34" charset="0"/>
+                <a:ea typeface="Calibri" pitchFamily="34" charset="-122"/>
+                <a:cs typeface="Calibri" pitchFamily="34" charset="-120"/>
+              </a:rPr>
+              <a:t>3/9</a:t>
             </a:r>
             <a:endParaRPr lang="en-US" sz="900" dirty="0"/>
           </a:p>
@@ -3111,7 +3493,7 @@
     <p:bg>
       <p:bgPr>
         <a:solidFill>
-          <a:srgbClr val="F0F3FA"/>
+          <a:srgbClr val="F0F4F8"/>
         </a:solidFill>
       </p:bgPr>
     </p:bg>
@@ -3138,13 +3520,13 @@
         <p:spPr>
           <a:xfrm>
             <a:off x="0" y="0"/>
-            <a:ext cx="9144000" cy="822960"/>
+            <a:ext cx="9144000" cy="54864"/>
           </a:xfrm>
           <a:prstGeom prst="rect">
             <a:avLst/>
           </a:prstGeom>
           <a:solidFill>
-            <a:srgbClr val="1E2761"/>
+            <a:srgbClr val="00B4D8"/>
           </a:solidFill>
           <a:ln/>
         </p:spPr>
@@ -3157,26 +3539,26 @@
         </p:nvSpPr>
         <p:spPr>
           <a:xfrm>
-            <a:off x="548640" y="0"/>
-            <a:ext cx="8229600" cy="822960"/>
-          </a:xfrm>
-          <a:prstGeom prst="rect">
-            <a:avLst/>
-          </a:prstGeom>
-          <a:noFill/>
-          <a:ln/>
-        </p:spPr>
-        <p:txBody>
-          <a:bodyPr wrap="square" rtlCol="0" anchor="ctr"/>
+            <a:off x="548640" y="228600"/>
+            <a:ext cx="8229600" cy="548640"/>
+          </a:xfrm>
+          <a:prstGeom prst="rect">
+            <a:avLst/>
+          </a:prstGeom>
+          <a:noFill/>
+          <a:ln/>
+        </p:spPr>
+        <p:txBody>
+          <a:bodyPr wrap="square" lIns="0" tIns="0" rIns="0" bIns="0" rtlCol="0" anchor="ctr"/>
           <a:lstStyle/>
           <a:p>
             <a:pPr indent="0" marL="0">
               <a:buNone/>
             </a:pPr>
             <a:r>
-              <a:rPr lang="en-US" sz="2200" b="1" dirty="0">
-                <a:solidFill>
-                  <a:srgbClr val="FFFFFF"/>
+              <a:rPr lang="en-US" sz="2800" b="1" dirty="0">
+                <a:solidFill>
+                  <a:srgbClr val="1B2A4A"/>
                 </a:solidFill>
                 <a:latin typeface="Calibri" pitchFamily="34" charset="0"/>
                 <a:ea typeface="Calibri" pitchFamily="34" charset="-122"/>
@@ -3184,7 +3566,7 @@
               </a:rPr>
               <a:t>HW2: Product Documentation</a:t>
             </a:r>
-            <a:endParaRPr lang="en-US" sz="2200" dirty="0"/>
+            <a:endParaRPr lang="en-US" sz="2800" dirty="0"/>
           </a:p>
         </p:txBody>
       </p:sp>
@@ -3196,17 +3578,17 @@
         </p:nvSpPr>
         <p:spPr>
           <a:xfrm>
-            <a:off x="548640" y="1005840"/>
-            <a:ext cx="8229600" cy="365760"/>
-          </a:xfrm>
-          <a:prstGeom prst="rect">
-            <a:avLst/>
-          </a:prstGeom>
-          <a:noFill/>
-          <a:ln/>
-        </p:spPr>
-        <p:txBody>
-          <a:bodyPr wrap="square" lIns="0" tIns="0" rIns="0" bIns="0" rtlCol="0" anchor="ctr"/>
+            <a:off x="548640" y="822960"/>
+            <a:ext cx="8046720" cy="365760"/>
+          </a:xfrm>
+          <a:prstGeom prst="rect">
+            <a:avLst/>
+          </a:prstGeom>
+          <a:noFill/>
+          <a:ln/>
+        </p:spPr>
+        <p:txBody>
+          <a:bodyPr wrap="square" rtlCol="0" anchor="ctr"/>
           <a:lstStyle/>
           <a:p>
             <a:pPr indent="0" marL="0">
@@ -3215,7 +3597,7 @@
             <a:r>
               <a:rPr lang="en-US" sz="1300" dirty="0">
                 <a:solidFill>
-                  <a:srgbClr val="495670"/>
+                  <a:srgbClr val="2D3748"/>
                 </a:solidFill>
                 <a:latin typeface="Calibri" pitchFamily="34" charset="0"/>
                 <a:ea typeface="Calibri" pitchFamily="34" charset="-122"/>
@@ -3235,23 +3617,18 @@
         </p:nvSpPr>
         <p:spPr>
           <a:xfrm>
-            <a:off x="457200" y="1554480"/>
-            <a:ext cx="4023360" cy="3026664"/>
-          </a:xfrm>
-          <a:prstGeom prst="rect">
-            <a:avLst/>
+            <a:off x="548640" y="1371600"/>
+            <a:ext cx="3931920" cy="384048"/>
+          </a:xfrm>
+          <a:prstGeom prst="roundRect">
+            <a:avLst>
+              <a:gd name="adj" fmla="val 14286"/>
+            </a:avLst>
           </a:prstGeom>
           <a:solidFill>
             <a:srgbClr val="FFFFFF"/>
           </a:solidFill>
           <a:ln/>
-          <a:effectLst>
-            <a:outerShdw sx="100000" sy="100000" kx="0" ky="0" algn="bl" rotWithShape="0" blurRad="101600" dist="38100" dir="8100000">
-              <a:srgbClr val="000000">
-                <a:alpha val="12000"/>
-              </a:srgbClr>
-            </a:outerShdw>
-          </a:effectLst>
         </p:spPr>
       </p:sp>
       <p:sp>
@@ -3262,336 +3639,297 @@
         </p:nvSpPr>
         <p:spPr>
           <a:xfrm>
-            <a:off x="640080" y="1691640"/>
-            <a:ext cx="3657600" cy="347472"/>
-          </a:xfrm>
-          <a:prstGeom prst="rect">
-            <a:avLst/>
-          </a:prstGeom>
-          <a:noFill/>
-          <a:ln/>
-        </p:spPr>
-        <p:txBody>
-          <a:bodyPr wrap="square" lIns="0" tIns="0" rIns="0" bIns="0" rtlCol="0" anchor="ctr"/>
+            <a:off x="640080" y="1371600"/>
+            <a:ext cx="320040" cy="384048"/>
+          </a:xfrm>
+          <a:prstGeom prst="rect">
+            <a:avLst/>
+          </a:prstGeom>
+          <a:noFill/>
+          <a:ln/>
+        </p:spPr>
+        <p:txBody>
+          <a:bodyPr wrap="square" rtlCol="0" anchor="ctr"/>
+          <a:lstStyle/>
+          <a:p>
+            <a:pPr algn="ctr" indent="0" marL="0">
+              <a:buNone/>
+            </a:pPr>
+            <a:r>
+              <a:rPr lang="en-US" sz="1100" b="1" dirty="0">
+                <a:solidFill>
+                  <a:srgbClr val="0066CC"/>
+                </a:solidFill>
+                <a:latin typeface="Calibri" pitchFamily="34" charset="0"/>
+                <a:ea typeface="Calibri" pitchFamily="34" charset="-122"/>
+                <a:cs typeface="Calibri" pitchFamily="34" charset="-120"/>
+              </a:rPr>
+              <a:t>1.</a:t>
+            </a:r>
+            <a:endParaRPr lang="en-US" sz="1100" dirty="0"/>
+          </a:p>
+        </p:txBody>
+      </p:sp>
+      <p:sp>
+        <p:nvSpPr>
+          <p:cNvPr id="7" name="Text 5"/>
+          <p:cNvSpPr/>
+          <p:nvPr/>
+        </p:nvSpPr>
+        <p:spPr>
+          <a:xfrm>
+            <a:off x="960120" y="1371600"/>
+            <a:ext cx="3383280" cy="384048"/>
+          </a:xfrm>
+          <a:prstGeom prst="rect">
+            <a:avLst/>
+          </a:prstGeom>
+          <a:noFill/>
+          <a:ln/>
+        </p:spPr>
+        <p:txBody>
+          <a:bodyPr wrap="square" rtlCol="0" anchor="ctr"/>
           <a:lstStyle/>
           <a:p>
             <a:pPr indent="0" marL="0">
               <a:buNone/>
             </a:pPr>
             <a:r>
-              <a:rPr lang="en-US" sz="1200" dirty="0">
-                <a:solidFill>
-                  <a:srgbClr val="495670"/>
-                </a:solidFill>
-                <a:latin typeface="Calibri" pitchFamily="34" charset="0"/>
-                <a:ea typeface="Calibri" pitchFamily="34" charset="-122"/>
-                <a:cs typeface="Calibri" pitchFamily="34" charset="-120"/>
-              </a:rPr>
-              <a:t>1. Executive Summary</a:t>
-            </a:r>
-            <a:endParaRPr lang="en-US" sz="1200" dirty="0"/>
-          </a:p>
-        </p:txBody>
-      </p:sp>
-      <p:sp>
-        <p:nvSpPr>
-          <p:cNvPr id="7" name="Text 5"/>
-          <p:cNvSpPr/>
-          <p:nvPr/>
-        </p:nvSpPr>
-        <p:spPr>
-          <a:xfrm>
-            <a:off x="640080" y="2084832"/>
-            <a:ext cx="3657600" cy="347472"/>
-          </a:xfrm>
-          <a:prstGeom prst="rect">
-            <a:avLst/>
-          </a:prstGeom>
-          <a:noFill/>
-          <a:ln/>
-        </p:spPr>
-        <p:txBody>
-          <a:bodyPr wrap="square" lIns="0" tIns="0" rIns="0" bIns="0" rtlCol="0" anchor="ctr"/>
-          <a:lstStyle/>
-          <a:p>
-            <a:pPr indent="0" marL="0">
-              <a:buNone/>
-            </a:pPr>
-            <a:r>
-              <a:rPr lang="en-US" sz="1200" dirty="0">
-                <a:solidFill>
-                  <a:srgbClr val="495670"/>
-                </a:solidFill>
-                <a:latin typeface="Calibri" pitchFamily="34" charset="0"/>
-                <a:ea typeface="Calibri" pitchFamily="34" charset="-122"/>
-                <a:cs typeface="Calibri" pitchFamily="34" charset="-120"/>
-              </a:rPr>
-              <a:t>2. Product Vision</a:t>
-            </a:r>
-            <a:endParaRPr lang="en-US" sz="1200" dirty="0"/>
-          </a:p>
-        </p:txBody>
-      </p:sp>
-      <p:sp>
-        <p:nvSpPr>
-          <p:cNvPr id="8" name="Text 6"/>
-          <p:cNvSpPr/>
-          <p:nvPr/>
-        </p:nvSpPr>
-        <p:spPr>
-          <a:xfrm>
-            <a:off x="640080" y="2478024"/>
-            <a:ext cx="3657600" cy="347472"/>
-          </a:xfrm>
-          <a:prstGeom prst="rect">
-            <a:avLst/>
-          </a:prstGeom>
-          <a:noFill/>
-          <a:ln/>
-        </p:spPr>
-        <p:txBody>
-          <a:bodyPr wrap="square" lIns="0" tIns="0" rIns="0" bIns="0" rtlCol="0" anchor="ctr"/>
-          <a:lstStyle/>
-          <a:p>
-            <a:pPr indent="0" marL="0">
-              <a:buNone/>
-            </a:pPr>
-            <a:r>
-              <a:rPr lang="en-US" sz="1200" dirty="0">
-                <a:solidFill>
-                  <a:srgbClr val="495670"/>
-                </a:solidFill>
-                <a:latin typeface="Calibri" pitchFamily="34" charset="0"/>
-                <a:ea typeface="Calibri" pitchFamily="34" charset="-122"/>
-                <a:cs typeface="Calibri" pitchFamily="34" charset="-120"/>
-              </a:rPr>
-              <a:t>3. Core Features</a:t>
-            </a:r>
-            <a:endParaRPr lang="en-US" sz="1200" dirty="0"/>
-          </a:p>
-        </p:txBody>
-      </p:sp>
-      <p:sp>
-        <p:nvSpPr>
-          <p:cNvPr id="9" name="Text 7"/>
-          <p:cNvSpPr/>
-          <p:nvPr/>
-        </p:nvSpPr>
-        <p:spPr>
-          <a:xfrm>
-            <a:off x="640080" y="2871216"/>
-            <a:ext cx="3657600" cy="347472"/>
-          </a:xfrm>
-          <a:prstGeom prst="rect">
-            <a:avLst/>
-          </a:prstGeom>
-          <a:noFill/>
-          <a:ln/>
-        </p:spPr>
-        <p:txBody>
-          <a:bodyPr wrap="square" lIns="0" tIns="0" rIns="0" bIns="0" rtlCol="0" anchor="ctr"/>
-          <a:lstStyle/>
-          <a:p>
-            <a:pPr indent="0" marL="0">
-              <a:buNone/>
-            </a:pPr>
-            <a:r>
-              <a:rPr lang="en-US" sz="1200" dirty="0">
-                <a:solidFill>
-                  <a:srgbClr val="495670"/>
-                </a:solidFill>
-                <a:latin typeface="Calibri" pitchFamily="34" charset="0"/>
-                <a:ea typeface="Calibri" pitchFamily="34" charset="-122"/>
-                <a:cs typeface="Calibri" pitchFamily="34" charset="-120"/>
-              </a:rPr>
-              <a:t>4. Technical Architecture</a:t>
-            </a:r>
-            <a:endParaRPr lang="en-US" sz="1200" dirty="0"/>
-          </a:p>
-        </p:txBody>
-      </p:sp>
-      <p:sp>
-        <p:nvSpPr>
-          <p:cNvPr id="10" name="Text 8"/>
-          <p:cNvSpPr/>
-          <p:nvPr/>
-        </p:nvSpPr>
-        <p:spPr>
-          <a:xfrm>
-            <a:off x="640080" y="3264408"/>
-            <a:ext cx="3657600" cy="347472"/>
-          </a:xfrm>
-          <a:prstGeom prst="rect">
-            <a:avLst/>
-          </a:prstGeom>
-          <a:noFill/>
-          <a:ln/>
-        </p:spPr>
-        <p:txBody>
-          <a:bodyPr wrap="square" lIns="0" tIns="0" rIns="0" bIns="0" rtlCol="0" anchor="ctr"/>
-          <a:lstStyle/>
-          <a:p>
-            <a:pPr indent="0" marL="0">
-              <a:buNone/>
-            </a:pPr>
-            <a:r>
-              <a:rPr lang="en-US" sz="1200" dirty="0">
-                <a:solidFill>
-                  <a:srgbClr val="495670"/>
-                </a:solidFill>
-                <a:latin typeface="Calibri" pitchFamily="34" charset="0"/>
-                <a:ea typeface="Calibri" pitchFamily="34" charset="-122"/>
-                <a:cs typeface="Calibri" pitchFamily="34" charset="-120"/>
-              </a:rPr>
-              <a:t>5. Technology Stack</a:t>
-            </a:r>
-            <a:endParaRPr lang="en-US" sz="1200" dirty="0"/>
-          </a:p>
-        </p:txBody>
-      </p:sp>
-      <p:sp>
-        <p:nvSpPr>
-          <p:cNvPr id="11" name="Text 9"/>
-          <p:cNvSpPr/>
-          <p:nvPr/>
-        </p:nvSpPr>
-        <p:spPr>
-          <a:xfrm>
-            <a:off x="640080" y="3657600"/>
-            <a:ext cx="3657600" cy="347472"/>
-          </a:xfrm>
-          <a:prstGeom prst="rect">
-            <a:avLst/>
-          </a:prstGeom>
-          <a:noFill/>
-          <a:ln/>
-        </p:spPr>
-        <p:txBody>
-          <a:bodyPr wrap="square" lIns="0" tIns="0" rIns="0" bIns="0" rtlCol="0" anchor="ctr"/>
-          <a:lstStyle/>
-          <a:p>
-            <a:pPr indent="0" marL="0">
-              <a:buNone/>
-            </a:pPr>
-            <a:r>
-              <a:rPr lang="en-US" sz="1200" dirty="0">
-                <a:solidFill>
-                  <a:srgbClr val="495670"/>
-                </a:solidFill>
-                <a:latin typeface="Calibri" pitchFamily="34" charset="0"/>
-                <a:ea typeface="Calibri" pitchFamily="34" charset="-122"/>
-                <a:cs typeface="Calibri" pitchFamily="34" charset="-120"/>
-              </a:rPr>
-              <a:t>6. Security Architecture</a:t>
-            </a:r>
-            <a:endParaRPr lang="en-US" sz="1200" dirty="0"/>
-          </a:p>
-        </p:txBody>
-      </p:sp>
-      <p:sp>
-        <p:nvSpPr>
-          <p:cNvPr id="12" name="Text 10"/>
-          <p:cNvSpPr/>
-          <p:nvPr/>
-        </p:nvSpPr>
-        <p:spPr>
-          <a:xfrm>
-            <a:off x="640080" y="4050792"/>
-            <a:ext cx="3657600" cy="347472"/>
-          </a:xfrm>
-          <a:prstGeom prst="rect">
-            <a:avLst/>
-          </a:prstGeom>
-          <a:noFill/>
-          <a:ln/>
-        </p:spPr>
-        <p:txBody>
-          <a:bodyPr wrap="square" lIns="0" tIns="0" rIns="0" bIns="0" rtlCol="0" anchor="ctr"/>
-          <a:lstStyle/>
-          <a:p>
-            <a:pPr indent="0" marL="0">
-              <a:buNone/>
-            </a:pPr>
-            <a:r>
-              <a:rPr lang="en-US" sz="1200" dirty="0">
-                <a:solidFill>
-                  <a:srgbClr val="495670"/>
-                </a:solidFill>
-                <a:latin typeface="Calibri" pitchFamily="34" charset="0"/>
-                <a:ea typeface="Calibri" pitchFamily="34" charset="-122"/>
-                <a:cs typeface="Calibri" pitchFamily="34" charset="-120"/>
-              </a:rPr>
-              <a:t>7. Role Management</a:t>
-            </a:r>
-            <a:endParaRPr lang="en-US" sz="1200" dirty="0"/>
-          </a:p>
-        </p:txBody>
-      </p:sp>
-      <p:sp>
-        <p:nvSpPr>
-          <p:cNvPr id="13" name="Shape 11"/>
-          <p:cNvSpPr/>
-          <p:nvPr/>
-        </p:nvSpPr>
-        <p:spPr>
-          <a:xfrm>
-            <a:off x="4754880" y="1554480"/>
-            <a:ext cx="4023360" cy="3026664"/>
-          </a:xfrm>
-          <a:prstGeom prst="rect">
-            <a:avLst/>
+              <a:rPr lang="en-US" sz="1100" dirty="0">
+                <a:solidFill>
+                  <a:srgbClr val="2D3748"/>
+                </a:solidFill>
+                <a:latin typeface="Calibri" pitchFamily="34" charset="0"/>
+                <a:ea typeface="Calibri" pitchFamily="34" charset="-122"/>
+                <a:cs typeface="Calibri" pitchFamily="34" charset="-120"/>
+              </a:rPr>
+              <a:t>Executive Summary</a:t>
+            </a:r>
+            <a:endParaRPr lang="en-US" sz="1100" dirty="0"/>
+          </a:p>
+        </p:txBody>
+      </p:sp>
+      <p:sp>
+        <p:nvSpPr>
+          <p:cNvPr id="8" name="Shape 6"/>
+          <p:cNvSpPr/>
+          <p:nvPr/>
+        </p:nvSpPr>
+        <p:spPr>
+          <a:xfrm>
+            <a:off x="548640" y="1847088"/>
+            <a:ext cx="3931920" cy="384048"/>
+          </a:xfrm>
+          <a:prstGeom prst="roundRect">
+            <a:avLst>
+              <a:gd name="adj" fmla="val 14286"/>
+            </a:avLst>
           </a:prstGeom>
           <a:solidFill>
             <a:srgbClr val="FFFFFF"/>
           </a:solidFill>
           <a:ln/>
-          <a:effectLst>
-            <a:outerShdw sx="100000" sy="100000" kx="0" ky="0" algn="bl" rotWithShape="0" blurRad="101600" dist="38100" dir="8100000">
-              <a:srgbClr val="000000">
-                <a:alpha val="12000"/>
-              </a:srgbClr>
-            </a:outerShdw>
-          </a:effectLst>
-        </p:spPr>
-      </p:sp>
-      <p:sp>
-        <p:nvSpPr>
-          <p:cNvPr id="14" name="Text 12"/>
-          <p:cNvSpPr/>
-          <p:nvPr/>
-        </p:nvSpPr>
-        <p:spPr>
-          <a:xfrm>
-            <a:off x="4937760" y="1691640"/>
-            <a:ext cx="3657600" cy="347472"/>
-          </a:xfrm>
-          <a:prstGeom prst="rect">
-            <a:avLst/>
-          </a:prstGeom>
-          <a:noFill/>
-          <a:ln/>
-        </p:spPr>
-        <p:txBody>
-          <a:bodyPr wrap="square" lIns="0" tIns="0" rIns="0" bIns="0" rtlCol="0" anchor="ctr"/>
+        </p:spPr>
+      </p:sp>
+      <p:sp>
+        <p:nvSpPr>
+          <p:cNvPr id="9" name="Text 7"/>
+          <p:cNvSpPr/>
+          <p:nvPr/>
+        </p:nvSpPr>
+        <p:spPr>
+          <a:xfrm>
+            <a:off x="640080" y="1847088"/>
+            <a:ext cx="320040" cy="384048"/>
+          </a:xfrm>
+          <a:prstGeom prst="rect">
+            <a:avLst/>
+          </a:prstGeom>
+          <a:noFill/>
+          <a:ln/>
+        </p:spPr>
+        <p:txBody>
+          <a:bodyPr wrap="square" rtlCol="0" anchor="ctr"/>
+          <a:lstStyle/>
+          <a:p>
+            <a:pPr algn="ctr" indent="0" marL="0">
+              <a:buNone/>
+            </a:pPr>
+            <a:r>
+              <a:rPr lang="en-US" sz="1100" b="1" dirty="0">
+                <a:solidFill>
+                  <a:srgbClr val="0066CC"/>
+                </a:solidFill>
+                <a:latin typeface="Calibri" pitchFamily="34" charset="0"/>
+                <a:ea typeface="Calibri" pitchFamily="34" charset="-122"/>
+                <a:cs typeface="Calibri" pitchFamily="34" charset="-120"/>
+              </a:rPr>
+              <a:t>2.</a:t>
+            </a:r>
+            <a:endParaRPr lang="en-US" sz="1100" dirty="0"/>
+          </a:p>
+        </p:txBody>
+      </p:sp>
+      <p:sp>
+        <p:nvSpPr>
+          <p:cNvPr id="10" name="Text 8"/>
+          <p:cNvSpPr/>
+          <p:nvPr/>
+        </p:nvSpPr>
+        <p:spPr>
+          <a:xfrm>
+            <a:off x="960120" y="1847088"/>
+            <a:ext cx="3383280" cy="384048"/>
+          </a:xfrm>
+          <a:prstGeom prst="rect">
+            <a:avLst/>
+          </a:prstGeom>
+          <a:noFill/>
+          <a:ln/>
+        </p:spPr>
+        <p:txBody>
+          <a:bodyPr wrap="square" rtlCol="0" anchor="ctr"/>
           <a:lstStyle/>
           <a:p>
             <a:pPr indent="0" marL="0">
               <a:buNone/>
             </a:pPr>
             <a:r>
-              <a:rPr lang="en-US" sz="1200" dirty="0">
-                <a:solidFill>
-                  <a:srgbClr val="495670"/>
-                </a:solidFill>
-                <a:latin typeface="Calibri" pitchFamily="34" charset="0"/>
-                <a:ea typeface="Calibri" pitchFamily="34" charset="-122"/>
-                <a:cs typeface="Calibri" pitchFamily="34" charset="-120"/>
-              </a:rPr>
-              <a:t>8. Clearance System</a:t>
-            </a:r>
-            <a:endParaRPr lang="en-US" sz="1200" dirty="0"/>
-          </a:p>
-        </p:txBody>
+              <a:rPr lang="en-US" sz="1100" dirty="0">
+                <a:solidFill>
+                  <a:srgbClr val="2D3748"/>
+                </a:solidFill>
+                <a:latin typeface="Calibri" pitchFamily="34" charset="0"/>
+                <a:ea typeface="Calibri" pitchFamily="34" charset="-122"/>
+                <a:cs typeface="Calibri" pitchFamily="34" charset="-120"/>
+              </a:rPr>
+              <a:t>Product Vision</a:t>
+            </a:r>
+            <a:endParaRPr lang="en-US" sz="1100" dirty="0"/>
+          </a:p>
+        </p:txBody>
+      </p:sp>
+      <p:sp>
+        <p:nvSpPr>
+          <p:cNvPr id="11" name="Shape 9"/>
+          <p:cNvSpPr/>
+          <p:nvPr/>
+        </p:nvSpPr>
+        <p:spPr>
+          <a:xfrm>
+            <a:off x="548640" y="2322576"/>
+            <a:ext cx="3931920" cy="384048"/>
+          </a:xfrm>
+          <a:prstGeom prst="roundRect">
+            <a:avLst>
+              <a:gd name="adj" fmla="val 14286"/>
+            </a:avLst>
+          </a:prstGeom>
+          <a:solidFill>
+            <a:srgbClr val="FFFFFF"/>
+          </a:solidFill>
+          <a:ln/>
+        </p:spPr>
+      </p:sp>
+      <p:sp>
+        <p:nvSpPr>
+          <p:cNvPr id="12" name="Text 10"/>
+          <p:cNvSpPr/>
+          <p:nvPr/>
+        </p:nvSpPr>
+        <p:spPr>
+          <a:xfrm>
+            <a:off x="640080" y="2322576"/>
+            <a:ext cx="320040" cy="384048"/>
+          </a:xfrm>
+          <a:prstGeom prst="rect">
+            <a:avLst/>
+          </a:prstGeom>
+          <a:noFill/>
+          <a:ln/>
+        </p:spPr>
+        <p:txBody>
+          <a:bodyPr wrap="square" rtlCol="0" anchor="ctr"/>
+          <a:lstStyle/>
+          <a:p>
+            <a:pPr algn="ctr" indent="0" marL="0">
+              <a:buNone/>
+            </a:pPr>
+            <a:r>
+              <a:rPr lang="en-US" sz="1100" b="1" dirty="0">
+                <a:solidFill>
+                  <a:srgbClr val="0066CC"/>
+                </a:solidFill>
+                <a:latin typeface="Calibri" pitchFamily="34" charset="0"/>
+                <a:ea typeface="Calibri" pitchFamily="34" charset="-122"/>
+                <a:cs typeface="Calibri" pitchFamily="34" charset="-120"/>
+              </a:rPr>
+              <a:t>3.</a:t>
+            </a:r>
+            <a:endParaRPr lang="en-US" sz="1100" dirty="0"/>
+          </a:p>
+        </p:txBody>
+      </p:sp>
+      <p:sp>
+        <p:nvSpPr>
+          <p:cNvPr id="13" name="Text 11"/>
+          <p:cNvSpPr/>
+          <p:nvPr/>
+        </p:nvSpPr>
+        <p:spPr>
+          <a:xfrm>
+            <a:off x="960120" y="2322576"/>
+            <a:ext cx="3383280" cy="384048"/>
+          </a:xfrm>
+          <a:prstGeom prst="rect">
+            <a:avLst/>
+          </a:prstGeom>
+          <a:noFill/>
+          <a:ln/>
+        </p:spPr>
+        <p:txBody>
+          <a:bodyPr wrap="square" rtlCol="0" anchor="ctr"/>
+          <a:lstStyle/>
+          <a:p>
+            <a:pPr indent="0" marL="0">
+              <a:buNone/>
+            </a:pPr>
+            <a:r>
+              <a:rPr lang="en-US" sz="1100" dirty="0">
+                <a:solidFill>
+                  <a:srgbClr val="2D3748"/>
+                </a:solidFill>
+                <a:latin typeface="Calibri" pitchFamily="34" charset="0"/>
+                <a:ea typeface="Calibri" pitchFamily="34" charset="-122"/>
+                <a:cs typeface="Calibri" pitchFamily="34" charset="-120"/>
+              </a:rPr>
+              <a:t>Core Features</a:t>
+            </a:r>
+            <a:endParaRPr lang="en-US" sz="1100" dirty="0"/>
+          </a:p>
+        </p:txBody>
+      </p:sp>
+      <p:sp>
+        <p:nvSpPr>
+          <p:cNvPr id="14" name="Shape 12"/>
+          <p:cNvSpPr/>
+          <p:nvPr/>
+        </p:nvSpPr>
+        <p:spPr>
+          <a:xfrm>
+            <a:off x="548640" y="2798064"/>
+            <a:ext cx="3931920" cy="384048"/>
+          </a:xfrm>
+          <a:prstGeom prst="roundRect">
+            <a:avLst>
+              <a:gd name="adj" fmla="val 14286"/>
+            </a:avLst>
+          </a:prstGeom>
+          <a:solidFill>
+            <a:srgbClr val="FFFFFF"/>
+          </a:solidFill>
+          <a:ln/>
+        </p:spPr>
       </p:sp>
       <p:sp>
         <p:nvSpPr>
@@ -3601,262 +3939,647 @@
         </p:nvSpPr>
         <p:spPr>
           <a:xfrm>
-            <a:off x="4937760" y="2084832"/>
-            <a:ext cx="3657600" cy="347472"/>
-          </a:xfrm>
-          <a:prstGeom prst="rect">
-            <a:avLst/>
-          </a:prstGeom>
-          <a:noFill/>
-          <a:ln/>
-        </p:spPr>
-        <p:txBody>
-          <a:bodyPr wrap="square" lIns="0" tIns="0" rIns="0" bIns="0" rtlCol="0" anchor="ctr"/>
+            <a:off x="640080" y="2798064"/>
+            <a:ext cx="320040" cy="384048"/>
+          </a:xfrm>
+          <a:prstGeom prst="rect">
+            <a:avLst/>
+          </a:prstGeom>
+          <a:noFill/>
+          <a:ln/>
+        </p:spPr>
+        <p:txBody>
+          <a:bodyPr wrap="square" rtlCol="0" anchor="ctr"/>
+          <a:lstStyle/>
+          <a:p>
+            <a:pPr algn="ctr" indent="0" marL="0">
+              <a:buNone/>
+            </a:pPr>
+            <a:r>
+              <a:rPr lang="en-US" sz="1100" b="1" dirty="0">
+                <a:solidFill>
+                  <a:srgbClr val="0066CC"/>
+                </a:solidFill>
+                <a:latin typeface="Calibri" pitchFamily="34" charset="0"/>
+                <a:ea typeface="Calibri" pitchFamily="34" charset="-122"/>
+                <a:cs typeface="Calibri" pitchFamily="34" charset="-120"/>
+              </a:rPr>
+              <a:t>4.</a:t>
+            </a:r>
+            <a:endParaRPr lang="en-US" sz="1100" dirty="0"/>
+          </a:p>
+        </p:txBody>
+      </p:sp>
+      <p:sp>
+        <p:nvSpPr>
+          <p:cNvPr id="16" name="Text 14"/>
+          <p:cNvSpPr/>
+          <p:nvPr/>
+        </p:nvSpPr>
+        <p:spPr>
+          <a:xfrm>
+            <a:off x="960120" y="2798064"/>
+            <a:ext cx="3383280" cy="384048"/>
+          </a:xfrm>
+          <a:prstGeom prst="rect">
+            <a:avLst/>
+          </a:prstGeom>
+          <a:noFill/>
+          <a:ln/>
+        </p:spPr>
+        <p:txBody>
+          <a:bodyPr wrap="square" rtlCol="0" anchor="ctr"/>
           <a:lstStyle/>
           <a:p>
             <a:pPr indent="0" marL="0">
               <a:buNone/>
             </a:pPr>
             <a:r>
-              <a:rPr lang="en-US" sz="1200" dirty="0">
-                <a:solidFill>
-                  <a:srgbClr val="495670"/>
-                </a:solidFill>
-                <a:latin typeface="Calibri" pitchFamily="34" charset="0"/>
-                <a:ea typeface="Calibri" pitchFamily="34" charset="-122"/>
-                <a:cs typeface="Calibri" pitchFamily="34" charset="-120"/>
-              </a:rPr>
-              <a:t>9. User Experience</a:t>
-            </a:r>
-            <a:endParaRPr lang="en-US" sz="1200" dirty="0"/>
-          </a:p>
-        </p:txBody>
-      </p:sp>
-      <p:sp>
-        <p:nvSpPr>
-          <p:cNvPr id="16" name="Text 14"/>
-          <p:cNvSpPr/>
-          <p:nvPr/>
-        </p:nvSpPr>
-        <p:spPr>
-          <a:xfrm>
-            <a:off x="4937760" y="2478024"/>
-            <a:ext cx="3657600" cy="347472"/>
-          </a:xfrm>
-          <a:prstGeom prst="rect">
-            <a:avLst/>
-          </a:prstGeom>
-          <a:noFill/>
-          <a:ln/>
-        </p:spPr>
-        <p:txBody>
-          <a:bodyPr wrap="square" lIns="0" tIns="0" rIns="0" bIns="0" rtlCol="0" anchor="ctr"/>
+              <a:rPr lang="en-US" sz="1100" dirty="0">
+                <a:solidFill>
+                  <a:srgbClr val="2D3748"/>
+                </a:solidFill>
+                <a:latin typeface="Calibri" pitchFamily="34" charset="0"/>
+                <a:ea typeface="Calibri" pitchFamily="34" charset="-122"/>
+                <a:cs typeface="Calibri" pitchFamily="34" charset="-120"/>
+              </a:rPr>
+              <a:t>Technical Architecture</a:t>
+            </a:r>
+            <a:endParaRPr lang="en-US" sz="1100" dirty="0"/>
+          </a:p>
+        </p:txBody>
+      </p:sp>
+      <p:sp>
+        <p:nvSpPr>
+          <p:cNvPr id="17" name="Shape 15"/>
+          <p:cNvSpPr/>
+          <p:nvPr/>
+        </p:nvSpPr>
+        <p:spPr>
+          <a:xfrm>
+            <a:off x="548640" y="3273552"/>
+            <a:ext cx="3931920" cy="384048"/>
+          </a:xfrm>
+          <a:prstGeom prst="roundRect">
+            <a:avLst>
+              <a:gd name="adj" fmla="val 14286"/>
+            </a:avLst>
+          </a:prstGeom>
+          <a:solidFill>
+            <a:srgbClr val="FFFFFF"/>
+          </a:solidFill>
+          <a:ln/>
+        </p:spPr>
+      </p:sp>
+      <p:sp>
+        <p:nvSpPr>
+          <p:cNvPr id="18" name="Text 16"/>
+          <p:cNvSpPr/>
+          <p:nvPr/>
+        </p:nvSpPr>
+        <p:spPr>
+          <a:xfrm>
+            <a:off x="640080" y="3273552"/>
+            <a:ext cx="320040" cy="384048"/>
+          </a:xfrm>
+          <a:prstGeom prst="rect">
+            <a:avLst/>
+          </a:prstGeom>
+          <a:noFill/>
+          <a:ln/>
+        </p:spPr>
+        <p:txBody>
+          <a:bodyPr wrap="square" rtlCol="0" anchor="ctr"/>
+          <a:lstStyle/>
+          <a:p>
+            <a:pPr algn="ctr" indent="0" marL="0">
+              <a:buNone/>
+            </a:pPr>
+            <a:r>
+              <a:rPr lang="en-US" sz="1100" b="1" dirty="0">
+                <a:solidFill>
+                  <a:srgbClr val="0066CC"/>
+                </a:solidFill>
+                <a:latin typeface="Calibri" pitchFamily="34" charset="0"/>
+                <a:ea typeface="Calibri" pitchFamily="34" charset="-122"/>
+                <a:cs typeface="Calibri" pitchFamily="34" charset="-120"/>
+              </a:rPr>
+              <a:t>5.</a:t>
+            </a:r>
+            <a:endParaRPr lang="en-US" sz="1100" dirty="0"/>
+          </a:p>
+        </p:txBody>
+      </p:sp>
+      <p:sp>
+        <p:nvSpPr>
+          <p:cNvPr id="19" name="Text 17"/>
+          <p:cNvSpPr/>
+          <p:nvPr/>
+        </p:nvSpPr>
+        <p:spPr>
+          <a:xfrm>
+            <a:off x="960120" y="3273552"/>
+            <a:ext cx="3383280" cy="384048"/>
+          </a:xfrm>
+          <a:prstGeom prst="rect">
+            <a:avLst/>
+          </a:prstGeom>
+          <a:noFill/>
+          <a:ln/>
+        </p:spPr>
+        <p:txBody>
+          <a:bodyPr wrap="square" rtlCol="0" anchor="ctr"/>
           <a:lstStyle/>
           <a:p>
             <a:pPr indent="0" marL="0">
               <a:buNone/>
             </a:pPr>
             <a:r>
-              <a:rPr lang="en-US" sz="1200" dirty="0">
-                <a:solidFill>
-                  <a:srgbClr val="495670"/>
-                </a:solidFill>
-                <a:latin typeface="Calibri" pitchFamily="34" charset="0"/>
-                <a:ea typeface="Calibri" pitchFamily="34" charset="-122"/>
-                <a:cs typeface="Calibri" pitchFamily="34" charset="-120"/>
-              </a:rPr>
-              <a:t>10. Deployment</a:t>
-            </a:r>
-            <a:endParaRPr lang="en-US" sz="1200" dirty="0"/>
-          </a:p>
-        </p:txBody>
-      </p:sp>
-      <p:sp>
-        <p:nvSpPr>
-          <p:cNvPr id="17" name="Text 15"/>
-          <p:cNvSpPr/>
-          <p:nvPr/>
-        </p:nvSpPr>
-        <p:spPr>
-          <a:xfrm>
-            <a:off x="4937760" y="2871216"/>
-            <a:ext cx="3657600" cy="347472"/>
-          </a:xfrm>
-          <a:prstGeom prst="rect">
-            <a:avLst/>
-          </a:prstGeom>
-          <a:noFill/>
-          <a:ln/>
-        </p:spPr>
-        <p:txBody>
-          <a:bodyPr wrap="square" lIns="0" tIns="0" rIns="0" bIns="0" rtlCol="0" anchor="ctr"/>
+              <a:rPr lang="en-US" sz="1100" dirty="0">
+                <a:solidFill>
+                  <a:srgbClr val="2D3748"/>
+                </a:solidFill>
+                <a:latin typeface="Calibri" pitchFamily="34" charset="0"/>
+                <a:ea typeface="Calibri" pitchFamily="34" charset="-122"/>
+                <a:cs typeface="Calibri" pitchFamily="34" charset="-120"/>
+              </a:rPr>
+              <a:t>Technology Stack</a:t>
+            </a:r>
+            <a:endParaRPr lang="en-US" sz="1100" dirty="0"/>
+          </a:p>
+        </p:txBody>
+      </p:sp>
+      <p:sp>
+        <p:nvSpPr>
+          <p:cNvPr id="20" name="Shape 18"/>
+          <p:cNvSpPr/>
+          <p:nvPr/>
+        </p:nvSpPr>
+        <p:spPr>
+          <a:xfrm>
+            <a:off x="548640" y="3749040"/>
+            <a:ext cx="3931920" cy="384048"/>
+          </a:xfrm>
+          <a:prstGeom prst="roundRect">
+            <a:avLst>
+              <a:gd name="adj" fmla="val 14286"/>
+            </a:avLst>
+          </a:prstGeom>
+          <a:solidFill>
+            <a:srgbClr val="FFFFFF"/>
+          </a:solidFill>
+          <a:ln/>
+        </p:spPr>
+      </p:sp>
+      <p:sp>
+        <p:nvSpPr>
+          <p:cNvPr id="21" name="Text 19"/>
+          <p:cNvSpPr/>
+          <p:nvPr/>
+        </p:nvSpPr>
+        <p:spPr>
+          <a:xfrm>
+            <a:off x="640080" y="3749040"/>
+            <a:ext cx="320040" cy="384048"/>
+          </a:xfrm>
+          <a:prstGeom prst="rect">
+            <a:avLst/>
+          </a:prstGeom>
+          <a:noFill/>
+          <a:ln/>
+        </p:spPr>
+        <p:txBody>
+          <a:bodyPr wrap="square" rtlCol="0" anchor="ctr"/>
+          <a:lstStyle/>
+          <a:p>
+            <a:pPr algn="ctr" indent="0" marL="0">
+              <a:buNone/>
+            </a:pPr>
+            <a:r>
+              <a:rPr lang="en-US" sz="1100" b="1" dirty="0">
+                <a:solidFill>
+                  <a:srgbClr val="0066CC"/>
+                </a:solidFill>
+                <a:latin typeface="Calibri" pitchFamily="34" charset="0"/>
+                <a:ea typeface="Calibri" pitchFamily="34" charset="-122"/>
+                <a:cs typeface="Calibri" pitchFamily="34" charset="-120"/>
+              </a:rPr>
+              <a:t>6.</a:t>
+            </a:r>
+            <a:endParaRPr lang="en-US" sz="1100" dirty="0"/>
+          </a:p>
+        </p:txBody>
+      </p:sp>
+      <p:sp>
+        <p:nvSpPr>
+          <p:cNvPr id="22" name="Text 20"/>
+          <p:cNvSpPr/>
+          <p:nvPr/>
+        </p:nvSpPr>
+        <p:spPr>
+          <a:xfrm>
+            <a:off x="960120" y="3749040"/>
+            <a:ext cx="3383280" cy="384048"/>
+          </a:xfrm>
+          <a:prstGeom prst="rect">
+            <a:avLst/>
+          </a:prstGeom>
+          <a:noFill/>
+          <a:ln/>
+        </p:spPr>
+        <p:txBody>
+          <a:bodyPr wrap="square" rtlCol="0" anchor="ctr"/>
           <a:lstStyle/>
           <a:p>
             <a:pPr indent="0" marL="0">
               <a:buNone/>
             </a:pPr>
             <a:r>
-              <a:rPr lang="en-US" sz="1200" dirty="0">
-                <a:solidFill>
-                  <a:srgbClr val="495670"/>
-                </a:solidFill>
-                <a:latin typeface="Calibri" pitchFamily="34" charset="0"/>
-                <a:ea typeface="Calibri" pitchFamily="34" charset="-122"/>
-                <a:cs typeface="Calibri" pitchFamily="34" charset="-120"/>
-              </a:rPr>
-              <a:t>11. Integration &amp; Scalability</a:t>
-            </a:r>
-            <a:endParaRPr lang="en-US" sz="1200" dirty="0"/>
-          </a:p>
-        </p:txBody>
-      </p:sp>
-      <p:sp>
-        <p:nvSpPr>
-          <p:cNvPr id="18" name="Text 16"/>
-          <p:cNvSpPr/>
-          <p:nvPr/>
-        </p:nvSpPr>
-        <p:spPr>
-          <a:xfrm>
-            <a:off x="4937760" y="3264408"/>
-            <a:ext cx="3657600" cy="347472"/>
-          </a:xfrm>
-          <a:prstGeom prst="rect">
-            <a:avLst/>
-          </a:prstGeom>
-          <a:noFill/>
-          <a:ln/>
-        </p:spPr>
-        <p:txBody>
-          <a:bodyPr wrap="square" lIns="0" tIns="0" rIns="0" bIns="0" rtlCol="0" anchor="ctr"/>
+              <a:rPr lang="en-US" sz="1100" dirty="0">
+                <a:solidFill>
+                  <a:srgbClr val="2D3748"/>
+                </a:solidFill>
+                <a:latin typeface="Calibri" pitchFamily="34" charset="0"/>
+                <a:ea typeface="Calibri" pitchFamily="34" charset="-122"/>
+                <a:cs typeface="Calibri" pitchFamily="34" charset="-120"/>
+              </a:rPr>
+              <a:t>Security Architecture</a:t>
+            </a:r>
+            <a:endParaRPr lang="en-US" sz="1100" dirty="0"/>
+          </a:p>
+        </p:txBody>
+      </p:sp>
+      <p:sp>
+        <p:nvSpPr>
+          <p:cNvPr id="23" name="Shape 21"/>
+          <p:cNvSpPr/>
+          <p:nvPr/>
+        </p:nvSpPr>
+        <p:spPr>
+          <a:xfrm>
+            <a:off x="548640" y="4224528"/>
+            <a:ext cx="3931920" cy="384048"/>
+          </a:xfrm>
+          <a:prstGeom prst="roundRect">
+            <a:avLst>
+              <a:gd name="adj" fmla="val 14286"/>
+            </a:avLst>
+          </a:prstGeom>
+          <a:solidFill>
+            <a:srgbClr val="FFFFFF"/>
+          </a:solidFill>
+          <a:ln/>
+        </p:spPr>
+      </p:sp>
+      <p:sp>
+        <p:nvSpPr>
+          <p:cNvPr id="24" name="Text 22"/>
+          <p:cNvSpPr/>
+          <p:nvPr/>
+        </p:nvSpPr>
+        <p:spPr>
+          <a:xfrm>
+            <a:off x="640080" y="4224528"/>
+            <a:ext cx="320040" cy="384048"/>
+          </a:xfrm>
+          <a:prstGeom prst="rect">
+            <a:avLst/>
+          </a:prstGeom>
+          <a:noFill/>
+          <a:ln/>
+        </p:spPr>
+        <p:txBody>
+          <a:bodyPr wrap="square" rtlCol="0" anchor="ctr"/>
+          <a:lstStyle/>
+          <a:p>
+            <a:pPr algn="ctr" indent="0" marL="0">
+              <a:buNone/>
+            </a:pPr>
+            <a:r>
+              <a:rPr lang="en-US" sz="1100" b="1" dirty="0">
+                <a:solidFill>
+                  <a:srgbClr val="0066CC"/>
+                </a:solidFill>
+                <a:latin typeface="Calibri" pitchFamily="34" charset="0"/>
+                <a:ea typeface="Calibri" pitchFamily="34" charset="-122"/>
+                <a:cs typeface="Calibri" pitchFamily="34" charset="-120"/>
+              </a:rPr>
+              <a:t>7.</a:t>
+            </a:r>
+            <a:endParaRPr lang="en-US" sz="1100" dirty="0"/>
+          </a:p>
+        </p:txBody>
+      </p:sp>
+      <p:sp>
+        <p:nvSpPr>
+          <p:cNvPr id="25" name="Text 23"/>
+          <p:cNvSpPr/>
+          <p:nvPr/>
+        </p:nvSpPr>
+        <p:spPr>
+          <a:xfrm>
+            <a:off x="960120" y="4224528"/>
+            <a:ext cx="3383280" cy="384048"/>
+          </a:xfrm>
+          <a:prstGeom prst="rect">
+            <a:avLst/>
+          </a:prstGeom>
+          <a:noFill/>
+          <a:ln/>
+        </p:spPr>
+        <p:txBody>
+          <a:bodyPr wrap="square" rtlCol="0" anchor="ctr"/>
           <a:lstStyle/>
           <a:p>
             <a:pPr indent="0" marL="0">
               <a:buNone/>
             </a:pPr>
             <a:r>
-              <a:rPr lang="en-US" sz="1200" dirty="0">
-                <a:solidFill>
-                  <a:srgbClr val="495670"/>
-                </a:solidFill>
-                <a:latin typeface="Calibri" pitchFamily="34" charset="0"/>
-                <a:ea typeface="Calibri" pitchFamily="34" charset="-122"/>
-                <a:cs typeface="Calibri" pitchFamily="34" charset="-120"/>
-              </a:rPr>
-              <a:t>12. Competitive Analysis</a:t>
-            </a:r>
-            <a:endParaRPr lang="en-US" sz="1200" dirty="0"/>
-          </a:p>
-        </p:txBody>
-      </p:sp>
-      <p:sp>
-        <p:nvSpPr>
-          <p:cNvPr id="19" name="Text 17"/>
-          <p:cNvSpPr/>
-          <p:nvPr/>
-        </p:nvSpPr>
-        <p:spPr>
-          <a:xfrm>
-            <a:off x="4937760" y="3657600"/>
-            <a:ext cx="3657600" cy="347472"/>
-          </a:xfrm>
-          <a:prstGeom prst="rect">
-            <a:avLst/>
-          </a:prstGeom>
-          <a:noFill/>
-          <a:ln/>
-        </p:spPr>
-        <p:txBody>
-          <a:bodyPr wrap="square" lIns="0" tIns="0" rIns="0" bIns="0" rtlCol="0" anchor="ctr"/>
+              <a:rPr lang="en-US" sz="1100" dirty="0">
+                <a:solidFill>
+                  <a:srgbClr val="2D3748"/>
+                </a:solidFill>
+                <a:latin typeface="Calibri" pitchFamily="34" charset="0"/>
+                <a:ea typeface="Calibri" pitchFamily="34" charset="-122"/>
+                <a:cs typeface="Calibri" pitchFamily="34" charset="-120"/>
+              </a:rPr>
+              <a:t>Role Management</a:t>
+            </a:r>
+            <a:endParaRPr lang="en-US" sz="1100" dirty="0"/>
+          </a:p>
+        </p:txBody>
+      </p:sp>
+      <p:sp>
+        <p:nvSpPr>
+          <p:cNvPr id="26" name="Shape 24"/>
+          <p:cNvSpPr/>
+          <p:nvPr/>
+        </p:nvSpPr>
+        <p:spPr>
+          <a:xfrm>
+            <a:off x="4754880" y="1371600"/>
+            <a:ext cx="3931920" cy="384048"/>
+          </a:xfrm>
+          <a:prstGeom prst="roundRect">
+            <a:avLst>
+              <a:gd name="adj" fmla="val 14286"/>
+            </a:avLst>
+          </a:prstGeom>
+          <a:solidFill>
+            <a:srgbClr val="FFFFFF"/>
+          </a:solidFill>
+          <a:ln/>
+        </p:spPr>
+      </p:sp>
+      <p:sp>
+        <p:nvSpPr>
+          <p:cNvPr id="27" name="Text 25"/>
+          <p:cNvSpPr/>
+          <p:nvPr/>
+        </p:nvSpPr>
+        <p:spPr>
+          <a:xfrm>
+            <a:off x="4846320" y="1371600"/>
+            <a:ext cx="320040" cy="384048"/>
+          </a:xfrm>
+          <a:prstGeom prst="rect">
+            <a:avLst/>
+          </a:prstGeom>
+          <a:noFill/>
+          <a:ln/>
+        </p:spPr>
+        <p:txBody>
+          <a:bodyPr wrap="square" rtlCol="0" anchor="ctr"/>
+          <a:lstStyle/>
+          <a:p>
+            <a:pPr algn="ctr" indent="0" marL="0">
+              <a:buNone/>
+            </a:pPr>
+            <a:r>
+              <a:rPr lang="en-US" sz="1100" b="1" dirty="0">
+                <a:solidFill>
+                  <a:srgbClr val="0066CC"/>
+                </a:solidFill>
+                <a:latin typeface="Calibri" pitchFamily="34" charset="0"/>
+                <a:ea typeface="Calibri" pitchFamily="34" charset="-122"/>
+                <a:cs typeface="Calibri" pitchFamily="34" charset="-120"/>
+              </a:rPr>
+              <a:t>8.</a:t>
+            </a:r>
+            <a:endParaRPr lang="en-US" sz="1100" dirty="0"/>
+          </a:p>
+        </p:txBody>
+      </p:sp>
+      <p:sp>
+        <p:nvSpPr>
+          <p:cNvPr id="28" name="Text 26"/>
+          <p:cNvSpPr/>
+          <p:nvPr/>
+        </p:nvSpPr>
+        <p:spPr>
+          <a:xfrm>
+            <a:off x="5166360" y="1371600"/>
+            <a:ext cx="3383280" cy="384048"/>
+          </a:xfrm>
+          <a:prstGeom prst="rect">
+            <a:avLst/>
+          </a:prstGeom>
+          <a:noFill/>
+          <a:ln/>
+        </p:spPr>
+        <p:txBody>
+          <a:bodyPr wrap="square" rtlCol="0" anchor="ctr"/>
           <a:lstStyle/>
           <a:p>
             <a:pPr indent="0" marL="0">
               <a:buNone/>
             </a:pPr>
             <a:r>
-              <a:rPr lang="en-US" sz="1200" dirty="0">
-                <a:solidFill>
-                  <a:srgbClr val="495670"/>
-                </a:solidFill>
-                <a:latin typeface="Calibri" pitchFamily="34" charset="0"/>
-                <a:ea typeface="Calibri" pitchFamily="34" charset="-122"/>
-                <a:cs typeface="Calibri" pitchFamily="34" charset="-120"/>
-              </a:rPr>
-              <a:t>13. Licensing Model</a:t>
-            </a:r>
-            <a:endParaRPr lang="en-US" sz="1200" dirty="0"/>
-          </a:p>
-        </p:txBody>
-      </p:sp>
-      <p:sp>
-        <p:nvSpPr>
-          <p:cNvPr id="20" name="Text 18"/>
-          <p:cNvSpPr/>
-          <p:nvPr/>
-        </p:nvSpPr>
-        <p:spPr>
-          <a:xfrm>
-            <a:off x="4937760" y="4050792"/>
-            <a:ext cx="3657600" cy="347472"/>
-          </a:xfrm>
-          <a:prstGeom prst="rect">
-            <a:avLst/>
-          </a:prstGeom>
-          <a:noFill/>
-          <a:ln/>
-        </p:spPr>
-        <p:txBody>
-          <a:bodyPr wrap="square" lIns="0" tIns="0" rIns="0" bIns="0" rtlCol="0" anchor="ctr"/>
+              <a:rPr lang="en-US" sz="1100" dirty="0">
+                <a:solidFill>
+                  <a:srgbClr val="2D3748"/>
+                </a:solidFill>
+                <a:latin typeface="Calibri" pitchFamily="34" charset="0"/>
+                <a:ea typeface="Calibri" pitchFamily="34" charset="-122"/>
+                <a:cs typeface="Calibri" pitchFamily="34" charset="-120"/>
+              </a:rPr>
+              <a:t>Clearance System</a:t>
+            </a:r>
+            <a:endParaRPr lang="en-US" sz="1100" dirty="0"/>
+          </a:p>
+        </p:txBody>
+      </p:sp>
+      <p:sp>
+        <p:nvSpPr>
+          <p:cNvPr id="29" name="Shape 27"/>
+          <p:cNvSpPr/>
+          <p:nvPr/>
+        </p:nvSpPr>
+        <p:spPr>
+          <a:xfrm>
+            <a:off x="4754880" y="1847088"/>
+            <a:ext cx="3931920" cy="384048"/>
+          </a:xfrm>
+          <a:prstGeom prst="roundRect">
+            <a:avLst>
+              <a:gd name="adj" fmla="val 14286"/>
+            </a:avLst>
+          </a:prstGeom>
+          <a:solidFill>
+            <a:srgbClr val="FFFFFF"/>
+          </a:solidFill>
+          <a:ln/>
+        </p:spPr>
+      </p:sp>
+      <p:sp>
+        <p:nvSpPr>
+          <p:cNvPr id="30" name="Text 28"/>
+          <p:cNvSpPr/>
+          <p:nvPr/>
+        </p:nvSpPr>
+        <p:spPr>
+          <a:xfrm>
+            <a:off x="4846320" y="1847088"/>
+            <a:ext cx="320040" cy="384048"/>
+          </a:xfrm>
+          <a:prstGeom prst="rect">
+            <a:avLst/>
+          </a:prstGeom>
+          <a:noFill/>
+          <a:ln/>
+        </p:spPr>
+        <p:txBody>
+          <a:bodyPr wrap="square" rtlCol="0" anchor="ctr"/>
+          <a:lstStyle/>
+          <a:p>
+            <a:pPr algn="ctr" indent="0" marL="0">
+              <a:buNone/>
+            </a:pPr>
+            <a:r>
+              <a:rPr lang="en-US" sz="1100" b="1" dirty="0">
+                <a:solidFill>
+                  <a:srgbClr val="0066CC"/>
+                </a:solidFill>
+                <a:latin typeface="Calibri" pitchFamily="34" charset="0"/>
+                <a:ea typeface="Calibri" pitchFamily="34" charset="-122"/>
+                <a:cs typeface="Calibri" pitchFamily="34" charset="-120"/>
+              </a:rPr>
+              <a:t>9.</a:t>
+            </a:r>
+            <a:endParaRPr lang="en-US" sz="1100" dirty="0"/>
+          </a:p>
+        </p:txBody>
+      </p:sp>
+      <p:sp>
+        <p:nvSpPr>
+          <p:cNvPr id="31" name="Text 29"/>
+          <p:cNvSpPr/>
+          <p:nvPr/>
+        </p:nvSpPr>
+        <p:spPr>
+          <a:xfrm>
+            <a:off x="5166360" y="1847088"/>
+            <a:ext cx="3383280" cy="384048"/>
+          </a:xfrm>
+          <a:prstGeom prst="rect">
+            <a:avLst/>
+          </a:prstGeom>
+          <a:noFill/>
+          <a:ln/>
+        </p:spPr>
+        <p:txBody>
+          <a:bodyPr wrap="square" rtlCol="0" anchor="ctr"/>
           <a:lstStyle/>
           <a:p>
             <a:pPr indent="0" marL="0">
               <a:buNone/>
             </a:pPr>
             <a:r>
-              <a:rPr lang="en-US" sz="1200" dirty="0">
-                <a:solidFill>
-                  <a:srgbClr val="495670"/>
-                </a:solidFill>
-                <a:latin typeface="Calibri" pitchFamily="34" charset="0"/>
-                <a:ea typeface="Calibri" pitchFamily="34" charset="-122"/>
-                <a:cs typeface="Calibri" pitchFamily="34" charset="-120"/>
-              </a:rPr>
-              <a:t>14. Technical Requirements</a:t>
-            </a:r>
-            <a:endParaRPr lang="en-US" sz="1200" dirty="0"/>
-          </a:p>
-        </p:txBody>
-      </p:sp>
-      <p:sp>
-        <p:nvSpPr>
-          <p:cNvPr id="21" name="Shape 19"/>
-          <p:cNvSpPr/>
-          <p:nvPr/>
-        </p:nvSpPr>
-        <p:spPr>
-          <a:xfrm>
-            <a:off x="0" y="4754880"/>
-            <a:ext cx="9144000" cy="388620"/>
-          </a:xfrm>
-          <a:prstGeom prst="rect">
-            <a:avLst/>
+              <a:rPr lang="en-US" sz="1100" dirty="0">
+                <a:solidFill>
+                  <a:srgbClr val="2D3748"/>
+                </a:solidFill>
+                <a:latin typeface="Calibri" pitchFamily="34" charset="0"/>
+                <a:ea typeface="Calibri" pitchFamily="34" charset="-122"/>
+                <a:cs typeface="Calibri" pitchFamily="34" charset="-120"/>
+              </a:rPr>
+              <a:t>User Experience</a:t>
+            </a:r>
+            <a:endParaRPr lang="en-US" sz="1100" dirty="0"/>
+          </a:p>
+        </p:txBody>
+      </p:sp>
+      <p:sp>
+        <p:nvSpPr>
+          <p:cNvPr id="32" name="Shape 30"/>
+          <p:cNvSpPr/>
+          <p:nvPr/>
+        </p:nvSpPr>
+        <p:spPr>
+          <a:xfrm>
+            <a:off x="4754880" y="2322576"/>
+            <a:ext cx="3931920" cy="384048"/>
+          </a:xfrm>
+          <a:prstGeom prst="roundRect">
+            <a:avLst>
+              <a:gd name="adj" fmla="val 14286"/>
+            </a:avLst>
           </a:prstGeom>
           <a:solidFill>
-            <a:srgbClr val="1E2761"/>
+            <a:srgbClr val="FFFFFF"/>
           </a:solidFill>
           <a:ln/>
         </p:spPr>
       </p:sp>
       <p:sp>
         <p:nvSpPr>
-          <p:cNvPr id="22" name="Text 20"/>
-          <p:cNvSpPr/>
-          <p:nvPr/>
-        </p:nvSpPr>
-        <p:spPr>
-          <a:xfrm>
-            <a:off x="457200" y="4754880"/>
-            <a:ext cx="6400800" cy="388620"/>
+          <p:cNvPr id="33" name="Text 31"/>
+          <p:cNvSpPr/>
+          <p:nvPr/>
+        </p:nvSpPr>
+        <p:spPr>
+          <a:xfrm>
+            <a:off x="4846320" y="2322576"/>
+            <a:ext cx="320040" cy="384048"/>
+          </a:xfrm>
+          <a:prstGeom prst="rect">
+            <a:avLst/>
+          </a:prstGeom>
+          <a:noFill/>
+          <a:ln/>
+        </p:spPr>
+        <p:txBody>
+          <a:bodyPr wrap="square" rtlCol="0" anchor="ctr"/>
+          <a:lstStyle/>
+          <a:p>
+            <a:pPr algn="ctr" indent="0" marL="0">
+              <a:buNone/>
+            </a:pPr>
+            <a:r>
+              <a:rPr lang="en-US" sz="1100" b="1" dirty="0">
+                <a:solidFill>
+                  <a:srgbClr val="0066CC"/>
+                </a:solidFill>
+                <a:latin typeface="Calibri" pitchFamily="34" charset="0"/>
+                <a:ea typeface="Calibri" pitchFamily="34" charset="-122"/>
+                <a:cs typeface="Calibri" pitchFamily="34" charset="-120"/>
+              </a:rPr>
+              <a:t>10.</a:t>
+            </a:r>
+            <a:endParaRPr lang="en-US" sz="1100" dirty="0"/>
+          </a:p>
+        </p:txBody>
+      </p:sp>
+      <p:sp>
+        <p:nvSpPr>
+          <p:cNvPr id="34" name="Text 32"/>
+          <p:cNvSpPr/>
+          <p:nvPr/>
+        </p:nvSpPr>
+        <p:spPr>
+          <a:xfrm>
+            <a:off x="5166360" y="2322576"/>
+            <a:ext cx="3383280" cy="384048"/>
           </a:xfrm>
           <a:prstGeom prst="rect">
             <a:avLst/>
@@ -3872,10 +4595,452 @@
               <a:buNone/>
             </a:pPr>
             <a:r>
+              <a:rPr lang="en-US" sz="1100" dirty="0">
+                <a:solidFill>
+                  <a:srgbClr val="2D3748"/>
+                </a:solidFill>
+                <a:latin typeface="Calibri" pitchFamily="34" charset="0"/>
+                <a:ea typeface="Calibri" pitchFamily="34" charset="-122"/>
+                <a:cs typeface="Calibri" pitchFamily="34" charset="-120"/>
+              </a:rPr>
+              <a:t>Deployment</a:t>
+            </a:r>
+            <a:endParaRPr lang="en-US" sz="1100" dirty="0"/>
+          </a:p>
+        </p:txBody>
+      </p:sp>
+      <p:sp>
+        <p:nvSpPr>
+          <p:cNvPr id="35" name="Shape 33"/>
+          <p:cNvSpPr/>
+          <p:nvPr/>
+        </p:nvSpPr>
+        <p:spPr>
+          <a:xfrm>
+            <a:off x="4754880" y="2798064"/>
+            <a:ext cx="3931920" cy="384048"/>
+          </a:xfrm>
+          <a:prstGeom prst="roundRect">
+            <a:avLst>
+              <a:gd name="adj" fmla="val 14286"/>
+            </a:avLst>
+          </a:prstGeom>
+          <a:solidFill>
+            <a:srgbClr val="FFFFFF"/>
+          </a:solidFill>
+          <a:ln/>
+        </p:spPr>
+      </p:sp>
+      <p:sp>
+        <p:nvSpPr>
+          <p:cNvPr id="36" name="Text 34"/>
+          <p:cNvSpPr/>
+          <p:nvPr/>
+        </p:nvSpPr>
+        <p:spPr>
+          <a:xfrm>
+            <a:off x="4846320" y="2798064"/>
+            <a:ext cx="320040" cy="384048"/>
+          </a:xfrm>
+          <a:prstGeom prst="rect">
+            <a:avLst/>
+          </a:prstGeom>
+          <a:noFill/>
+          <a:ln/>
+        </p:spPr>
+        <p:txBody>
+          <a:bodyPr wrap="square" rtlCol="0" anchor="ctr"/>
+          <a:lstStyle/>
+          <a:p>
+            <a:pPr algn="ctr" indent="0" marL="0">
+              <a:buNone/>
+            </a:pPr>
+            <a:r>
+              <a:rPr lang="en-US" sz="1100" b="1" dirty="0">
+                <a:solidFill>
+                  <a:srgbClr val="0066CC"/>
+                </a:solidFill>
+                <a:latin typeface="Calibri" pitchFamily="34" charset="0"/>
+                <a:ea typeface="Calibri" pitchFamily="34" charset="-122"/>
+                <a:cs typeface="Calibri" pitchFamily="34" charset="-120"/>
+              </a:rPr>
+              <a:t>11.</a:t>
+            </a:r>
+            <a:endParaRPr lang="en-US" sz="1100" dirty="0"/>
+          </a:p>
+        </p:txBody>
+      </p:sp>
+      <p:sp>
+        <p:nvSpPr>
+          <p:cNvPr id="37" name="Text 35"/>
+          <p:cNvSpPr/>
+          <p:nvPr/>
+        </p:nvSpPr>
+        <p:spPr>
+          <a:xfrm>
+            <a:off x="5166360" y="2798064"/>
+            <a:ext cx="3383280" cy="384048"/>
+          </a:xfrm>
+          <a:prstGeom prst="rect">
+            <a:avLst/>
+          </a:prstGeom>
+          <a:noFill/>
+          <a:ln/>
+        </p:spPr>
+        <p:txBody>
+          <a:bodyPr wrap="square" rtlCol="0" anchor="ctr"/>
+          <a:lstStyle/>
+          <a:p>
+            <a:pPr indent="0" marL="0">
+              <a:buNone/>
+            </a:pPr>
+            <a:r>
+              <a:rPr lang="en-US" sz="1100" dirty="0">
+                <a:solidFill>
+                  <a:srgbClr val="2D3748"/>
+                </a:solidFill>
+                <a:latin typeface="Calibri" pitchFamily="34" charset="0"/>
+                <a:ea typeface="Calibri" pitchFamily="34" charset="-122"/>
+                <a:cs typeface="Calibri" pitchFamily="34" charset="-120"/>
+              </a:rPr>
+              <a:t>Integration &amp; Scalability</a:t>
+            </a:r>
+            <a:endParaRPr lang="en-US" sz="1100" dirty="0"/>
+          </a:p>
+        </p:txBody>
+      </p:sp>
+      <p:sp>
+        <p:nvSpPr>
+          <p:cNvPr id="38" name="Shape 36"/>
+          <p:cNvSpPr/>
+          <p:nvPr/>
+        </p:nvSpPr>
+        <p:spPr>
+          <a:xfrm>
+            <a:off x="4754880" y="3273552"/>
+            <a:ext cx="3931920" cy="384048"/>
+          </a:xfrm>
+          <a:prstGeom prst="roundRect">
+            <a:avLst>
+              <a:gd name="adj" fmla="val 14286"/>
+            </a:avLst>
+          </a:prstGeom>
+          <a:solidFill>
+            <a:srgbClr val="FFFFFF"/>
+          </a:solidFill>
+          <a:ln/>
+        </p:spPr>
+      </p:sp>
+      <p:sp>
+        <p:nvSpPr>
+          <p:cNvPr id="39" name="Text 37"/>
+          <p:cNvSpPr/>
+          <p:nvPr/>
+        </p:nvSpPr>
+        <p:spPr>
+          <a:xfrm>
+            <a:off x="4846320" y="3273552"/>
+            <a:ext cx="320040" cy="384048"/>
+          </a:xfrm>
+          <a:prstGeom prst="rect">
+            <a:avLst/>
+          </a:prstGeom>
+          <a:noFill/>
+          <a:ln/>
+        </p:spPr>
+        <p:txBody>
+          <a:bodyPr wrap="square" rtlCol="0" anchor="ctr"/>
+          <a:lstStyle/>
+          <a:p>
+            <a:pPr algn="ctr" indent="0" marL="0">
+              <a:buNone/>
+            </a:pPr>
+            <a:r>
+              <a:rPr lang="en-US" sz="1100" b="1" dirty="0">
+                <a:solidFill>
+                  <a:srgbClr val="0066CC"/>
+                </a:solidFill>
+                <a:latin typeface="Calibri" pitchFamily="34" charset="0"/>
+                <a:ea typeface="Calibri" pitchFamily="34" charset="-122"/>
+                <a:cs typeface="Calibri" pitchFamily="34" charset="-120"/>
+              </a:rPr>
+              <a:t>12.</a:t>
+            </a:r>
+            <a:endParaRPr lang="en-US" sz="1100" dirty="0"/>
+          </a:p>
+        </p:txBody>
+      </p:sp>
+      <p:sp>
+        <p:nvSpPr>
+          <p:cNvPr id="40" name="Text 38"/>
+          <p:cNvSpPr/>
+          <p:nvPr/>
+        </p:nvSpPr>
+        <p:spPr>
+          <a:xfrm>
+            <a:off x="5166360" y="3273552"/>
+            <a:ext cx="3383280" cy="384048"/>
+          </a:xfrm>
+          <a:prstGeom prst="rect">
+            <a:avLst/>
+          </a:prstGeom>
+          <a:noFill/>
+          <a:ln/>
+        </p:spPr>
+        <p:txBody>
+          <a:bodyPr wrap="square" rtlCol="0" anchor="ctr"/>
+          <a:lstStyle/>
+          <a:p>
+            <a:pPr indent="0" marL="0">
+              <a:buNone/>
+            </a:pPr>
+            <a:r>
+              <a:rPr lang="en-US" sz="1100" dirty="0">
+                <a:solidFill>
+                  <a:srgbClr val="2D3748"/>
+                </a:solidFill>
+                <a:latin typeface="Calibri" pitchFamily="34" charset="0"/>
+                <a:ea typeface="Calibri" pitchFamily="34" charset="-122"/>
+                <a:cs typeface="Calibri" pitchFamily="34" charset="-120"/>
+              </a:rPr>
+              <a:t>Competitive Analysis</a:t>
+            </a:r>
+            <a:endParaRPr lang="en-US" sz="1100" dirty="0"/>
+          </a:p>
+        </p:txBody>
+      </p:sp>
+      <p:sp>
+        <p:nvSpPr>
+          <p:cNvPr id="41" name="Shape 39"/>
+          <p:cNvSpPr/>
+          <p:nvPr/>
+        </p:nvSpPr>
+        <p:spPr>
+          <a:xfrm>
+            <a:off x="4754880" y="3749040"/>
+            <a:ext cx="3931920" cy="384048"/>
+          </a:xfrm>
+          <a:prstGeom prst="roundRect">
+            <a:avLst>
+              <a:gd name="adj" fmla="val 14286"/>
+            </a:avLst>
+          </a:prstGeom>
+          <a:solidFill>
+            <a:srgbClr val="FFFFFF"/>
+          </a:solidFill>
+          <a:ln/>
+        </p:spPr>
+      </p:sp>
+      <p:sp>
+        <p:nvSpPr>
+          <p:cNvPr id="42" name="Text 40"/>
+          <p:cNvSpPr/>
+          <p:nvPr/>
+        </p:nvSpPr>
+        <p:spPr>
+          <a:xfrm>
+            <a:off x="4846320" y="3749040"/>
+            <a:ext cx="320040" cy="384048"/>
+          </a:xfrm>
+          <a:prstGeom prst="rect">
+            <a:avLst/>
+          </a:prstGeom>
+          <a:noFill/>
+          <a:ln/>
+        </p:spPr>
+        <p:txBody>
+          <a:bodyPr wrap="square" rtlCol="0" anchor="ctr"/>
+          <a:lstStyle/>
+          <a:p>
+            <a:pPr algn="ctr" indent="0" marL="0">
+              <a:buNone/>
+            </a:pPr>
+            <a:r>
+              <a:rPr lang="en-US" sz="1100" b="1" dirty="0">
+                <a:solidFill>
+                  <a:srgbClr val="0066CC"/>
+                </a:solidFill>
+                <a:latin typeface="Calibri" pitchFamily="34" charset="0"/>
+                <a:ea typeface="Calibri" pitchFamily="34" charset="-122"/>
+                <a:cs typeface="Calibri" pitchFamily="34" charset="-120"/>
+              </a:rPr>
+              <a:t>13.</a:t>
+            </a:r>
+            <a:endParaRPr lang="en-US" sz="1100" dirty="0"/>
+          </a:p>
+        </p:txBody>
+      </p:sp>
+      <p:sp>
+        <p:nvSpPr>
+          <p:cNvPr id="43" name="Text 41"/>
+          <p:cNvSpPr/>
+          <p:nvPr/>
+        </p:nvSpPr>
+        <p:spPr>
+          <a:xfrm>
+            <a:off x="5166360" y="3749040"/>
+            <a:ext cx="3383280" cy="384048"/>
+          </a:xfrm>
+          <a:prstGeom prst="rect">
+            <a:avLst/>
+          </a:prstGeom>
+          <a:noFill/>
+          <a:ln/>
+        </p:spPr>
+        <p:txBody>
+          <a:bodyPr wrap="square" rtlCol="0" anchor="ctr"/>
+          <a:lstStyle/>
+          <a:p>
+            <a:pPr indent="0" marL="0">
+              <a:buNone/>
+            </a:pPr>
+            <a:r>
+              <a:rPr lang="en-US" sz="1100" dirty="0">
+                <a:solidFill>
+                  <a:srgbClr val="2D3748"/>
+                </a:solidFill>
+                <a:latin typeface="Calibri" pitchFamily="34" charset="0"/>
+                <a:ea typeface="Calibri" pitchFamily="34" charset="-122"/>
+                <a:cs typeface="Calibri" pitchFamily="34" charset="-120"/>
+              </a:rPr>
+              <a:t>Licensing Model</a:t>
+            </a:r>
+            <a:endParaRPr lang="en-US" sz="1100" dirty="0"/>
+          </a:p>
+        </p:txBody>
+      </p:sp>
+      <p:sp>
+        <p:nvSpPr>
+          <p:cNvPr id="44" name="Shape 42"/>
+          <p:cNvSpPr/>
+          <p:nvPr/>
+        </p:nvSpPr>
+        <p:spPr>
+          <a:xfrm>
+            <a:off x="4754880" y="4224528"/>
+            <a:ext cx="3931920" cy="384048"/>
+          </a:xfrm>
+          <a:prstGeom prst="roundRect">
+            <a:avLst>
+              <a:gd name="adj" fmla="val 14286"/>
+            </a:avLst>
+          </a:prstGeom>
+          <a:solidFill>
+            <a:srgbClr val="FFFFFF"/>
+          </a:solidFill>
+          <a:ln/>
+        </p:spPr>
+      </p:sp>
+      <p:sp>
+        <p:nvSpPr>
+          <p:cNvPr id="45" name="Text 43"/>
+          <p:cNvSpPr/>
+          <p:nvPr/>
+        </p:nvSpPr>
+        <p:spPr>
+          <a:xfrm>
+            <a:off x="4846320" y="4224528"/>
+            <a:ext cx="320040" cy="384048"/>
+          </a:xfrm>
+          <a:prstGeom prst="rect">
+            <a:avLst/>
+          </a:prstGeom>
+          <a:noFill/>
+          <a:ln/>
+        </p:spPr>
+        <p:txBody>
+          <a:bodyPr wrap="square" rtlCol="0" anchor="ctr"/>
+          <a:lstStyle/>
+          <a:p>
+            <a:pPr algn="ctr" indent="0" marL="0">
+              <a:buNone/>
+            </a:pPr>
+            <a:r>
+              <a:rPr lang="en-US" sz="1100" b="1" dirty="0">
+                <a:solidFill>
+                  <a:srgbClr val="0066CC"/>
+                </a:solidFill>
+                <a:latin typeface="Calibri" pitchFamily="34" charset="0"/>
+                <a:ea typeface="Calibri" pitchFamily="34" charset="-122"/>
+                <a:cs typeface="Calibri" pitchFamily="34" charset="-120"/>
+              </a:rPr>
+              <a:t>14.</a:t>
+            </a:r>
+            <a:endParaRPr lang="en-US" sz="1100" dirty="0"/>
+          </a:p>
+        </p:txBody>
+      </p:sp>
+      <p:sp>
+        <p:nvSpPr>
+          <p:cNvPr id="46" name="Text 44"/>
+          <p:cNvSpPr/>
+          <p:nvPr/>
+        </p:nvSpPr>
+        <p:spPr>
+          <a:xfrm>
+            <a:off x="5166360" y="4224528"/>
+            <a:ext cx="3383280" cy="384048"/>
+          </a:xfrm>
+          <a:prstGeom prst="rect">
+            <a:avLst/>
+          </a:prstGeom>
+          <a:noFill/>
+          <a:ln/>
+        </p:spPr>
+        <p:txBody>
+          <a:bodyPr wrap="square" rtlCol="0" anchor="ctr"/>
+          <a:lstStyle/>
+          <a:p>
+            <a:pPr indent="0" marL="0">
+              <a:buNone/>
+            </a:pPr>
+            <a:r>
+              <a:rPr lang="en-US" sz="1100" dirty="0">
+                <a:solidFill>
+                  <a:srgbClr val="2D3748"/>
+                </a:solidFill>
+                <a:latin typeface="Calibri" pitchFamily="34" charset="0"/>
+                <a:ea typeface="Calibri" pitchFamily="34" charset="-122"/>
+                <a:cs typeface="Calibri" pitchFamily="34" charset="-120"/>
+              </a:rPr>
+              <a:t>Technical Requirements</a:t>
+            </a:r>
+            <a:endParaRPr lang="en-US" sz="1100" dirty="0"/>
+          </a:p>
+        </p:txBody>
+      </p:sp>
+      <p:sp>
+        <p:nvSpPr>
+          <p:cNvPr id="47" name="Text 45"/>
+          <p:cNvSpPr/>
+          <p:nvPr/>
+        </p:nvSpPr>
+        <p:spPr>
+          <a:xfrm>
+            <a:off x="457200" y="4663440"/>
+            <a:ext cx="6400800" cy="365760"/>
+          </a:xfrm>
+          <a:prstGeom prst="rect">
+            <a:avLst/>
+          </a:prstGeom>
+          <a:noFill/>
+          <a:ln/>
+        </p:spPr>
+        <p:txBody>
+          <a:bodyPr wrap="square" rtlCol="0" anchor="ctr"/>
+          <a:lstStyle/>
+          <a:p>
+            <a:pPr indent="0" marL="0">
+              <a:buNone/>
+            </a:pPr>
+            <a:r>
               <a:rPr lang="en-US" sz="900" dirty="0">
                 <a:solidFill>
-                  <a:srgbClr val="CADCFC"/>
-                </a:solidFill>
+                  <a:srgbClr val="718096"/>
+                </a:solidFill>
+                <a:latin typeface="Calibri" pitchFamily="34" charset="0"/>
+                <a:ea typeface="Calibri" pitchFamily="34" charset="-122"/>
+                <a:cs typeface="Calibri" pitchFamily="34" charset="-120"/>
               </a:rPr>
               <a:t>ProfAI – UYG338 Software Project Management</a:t>
             </a:r>
@@ -3885,14 +5050,14 @@
       </p:sp>
       <p:sp>
         <p:nvSpPr>
-          <p:cNvPr id="23" name="Text 21"/>
-          <p:cNvSpPr/>
-          <p:nvPr/>
-        </p:nvSpPr>
-        <p:spPr>
-          <a:xfrm>
-            <a:off x="7772400" y="4754880"/>
-            <a:ext cx="914400" cy="388620"/>
+          <p:cNvPr id="48" name="Text 46"/>
+          <p:cNvSpPr/>
+          <p:nvPr/>
+        </p:nvSpPr>
+        <p:spPr>
+          <a:xfrm>
+            <a:off x="7772400" y="4663440"/>
+            <a:ext cx="914400" cy="365760"/>
           </a:xfrm>
           <a:prstGeom prst="rect">
             <a:avLst/>
@@ -3910,10 +5075,13 @@
             <a:r>
               <a:rPr lang="en-US" sz="900" dirty="0">
                 <a:solidFill>
-                  <a:srgbClr val="CADCFC"/>
-                </a:solidFill>
-              </a:rPr>
-              <a:t>4/8</a:t>
+                  <a:srgbClr val="718096"/>
+                </a:solidFill>
+                <a:latin typeface="Calibri" pitchFamily="34" charset="0"/>
+                <a:ea typeface="Calibri" pitchFamily="34" charset="-122"/>
+                <a:cs typeface="Calibri" pitchFamily="34" charset="-120"/>
+              </a:rPr>
+              <a:t>4/9</a:t>
             </a:r>
             <a:endParaRPr lang="en-US" sz="900" dirty="0"/>
           </a:p>
@@ -3933,7 +5101,7 @@
     <p:bg>
       <p:bgPr>
         <a:solidFill>
-          <a:srgbClr val="F0F3FA"/>
+          <a:srgbClr val="F0F4F8"/>
         </a:solidFill>
       </p:bgPr>
     </p:bg>
@@ -3960,13 +5128,13 @@
         <p:spPr>
           <a:xfrm>
             <a:off x="0" y="0"/>
-            <a:ext cx="9144000" cy="822960"/>
+            <a:ext cx="9144000" cy="54864"/>
           </a:xfrm>
           <a:prstGeom prst="rect">
             <a:avLst/>
           </a:prstGeom>
           <a:solidFill>
-            <a:srgbClr val="1E2761"/>
+            <a:srgbClr val="00B4D8"/>
           </a:solidFill>
           <a:ln/>
         </p:spPr>
@@ -3979,26 +5147,26 @@
         </p:nvSpPr>
         <p:spPr>
           <a:xfrm>
-            <a:off x="548640" y="0"/>
-            <a:ext cx="8229600" cy="822960"/>
-          </a:xfrm>
-          <a:prstGeom prst="rect">
-            <a:avLst/>
-          </a:prstGeom>
-          <a:noFill/>
-          <a:ln/>
-        </p:spPr>
-        <p:txBody>
-          <a:bodyPr wrap="square" rtlCol="0" anchor="ctr"/>
+            <a:off x="548640" y="228600"/>
+            <a:ext cx="8229600" cy="548640"/>
+          </a:xfrm>
+          <a:prstGeom prst="rect">
+            <a:avLst/>
+          </a:prstGeom>
+          <a:noFill/>
+          <a:ln/>
+        </p:spPr>
+        <p:txBody>
+          <a:bodyPr wrap="square" lIns="0" tIns="0" rIns="0" bIns="0" rtlCol="0" anchor="ctr"/>
           <a:lstStyle/>
           <a:p>
             <a:pPr indent="0" marL="0">
               <a:buNone/>
             </a:pPr>
             <a:r>
-              <a:rPr lang="en-US" sz="2200" b="1" dirty="0">
-                <a:solidFill>
-                  <a:srgbClr val="FFFFFF"/>
+              <a:rPr lang="en-US" sz="2800" b="1" dirty="0">
+                <a:solidFill>
+                  <a:srgbClr val="1B2A4A"/>
                 </a:solidFill>
                 <a:latin typeface="Calibri" pitchFamily="34" charset="0"/>
                 <a:ea typeface="Calibri" pitchFamily="34" charset="-122"/>
@@ -4006,7 +5174,7 @@
               </a:rPr>
               <a:t>HW3: Risk Analysis &amp; Testing Plan</a:t>
             </a:r>
-            <a:endParaRPr lang="en-US" sz="2200" dirty="0"/>
+            <a:endParaRPr lang="en-US" sz="2800" dirty="0"/>
           </a:p>
         </p:txBody>
       </p:sp>
@@ -4018,20 +5186,22 @@
         </p:nvSpPr>
         <p:spPr>
           <a:xfrm>
-            <a:off x="457200" y="1051560"/>
-            <a:ext cx="3931920" cy="3383280"/>
-          </a:xfrm>
-          <a:prstGeom prst="rect">
-            <a:avLst/>
+            <a:off x="548640" y="1005840"/>
+            <a:ext cx="3840480" cy="3474720"/>
+          </a:xfrm>
+          <a:prstGeom prst="roundRect">
+            <a:avLst>
+              <a:gd name="adj" fmla="val 3158"/>
+            </a:avLst>
           </a:prstGeom>
           <a:solidFill>
             <a:srgbClr val="FFFFFF"/>
           </a:solidFill>
           <a:ln/>
           <a:effectLst>
-            <a:outerShdw sx="100000" sy="100000" kx="0" ky="0" algn="bl" rotWithShape="0" blurRad="101600" dist="38100" dir="8100000">
+            <a:outerShdw sx="100000" sy="100000" kx="0" ky="0" algn="bl" rotWithShape="0" blurRad="76200" dist="25400" dir="8100000">
               <a:srgbClr val="000000">
-                <a:alpha val="12000"/>
+                <a:alpha val="8000"/>
               </a:srgbClr>
             </a:outerShdw>
           </a:effectLst>
@@ -4045,14 +5215,14 @@
         </p:nvSpPr>
         <p:spPr>
           <a:xfrm>
-            <a:off x="457200" y="1051560"/>
-            <a:ext cx="3931920" cy="54864"/>
-          </a:xfrm>
-          <a:prstGeom prst="rect">
+            <a:off x="548640" y="1005840"/>
+            <a:ext cx="3840480" cy="457200"/>
+          </a:xfrm>
+          <a:prstGeom prst="roundRect">
             <a:avLst/>
           </a:prstGeom>
           <a:solidFill>
-            <a:srgbClr val="F59E0B"/>
+            <a:srgbClr val="0066CC"/>
           </a:solidFill>
           <a:ln/>
         </p:spPr>
@@ -4065,84 +5235,132 @@
         </p:nvSpPr>
         <p:spPr>
           <a:xfrm>
-            <a:off x="640080" y="1188720"/>
-            <a:ext cx="3566160" cy="365760"/>
-          </a:xfrm>
-          <a:prstGeom prst="rect">
-            <a:avLst/>
-          </a:prstGeom>
-          <a:noFill/>
-          <a:ln/>
-        </p:spPr>
-        <p:txBody>
-          <a:bodyPr wrap="square" lIns="0" tIns="0" rIns="0" bIns="0" rtlCol="0" anchor="ctr"/>
+            <a:off x="548640" y="1005840"/>
+            <a:ext cx="3840480" cy="457200"/>
+          </a:xfrm>
+          <a:prstGeom prst="rect">
+            <a:avLst/>
+          </a:prstGeom>
+          <a:noFill/>
+          <a:ln/>
+        </p:spPr>
+        <p:txBody>
+          <a:bodyPr wrap="square" rtlCol="0" anchor="ctr"/>
+          <a:lstStyle/>
+          <a:p>
+            <a:pPr algn="ctr" indent="0" marL="0">
+              <a:buNone/>
+            </a:pPr>
+            <a:r>
+              <a:rPr lang="en-US" sz="1400" b="1" dirty="0">
+                <a:solidFill>
+                  <a:srgbClr val="FFFFFF"/>
+                </a:solidFill>
+                <a:latin typeface="Calibri" pitchFamily="34" charset="0"/>
+                <a:ea typeface="Calibri" pitchFamily="34" charset="-122"/>
+                <a:cs typeface="Calibri" pitchFamily="34" charset="-120"/>
+              </a:rPr>
+              <a:t>Risk Analysis</a:t>
+            </a:r>
+            <a:endParaRPr lang="en-US" sz="1400" dirty="0"/>
+          </a:p>
+        </p:txBody>
+      </p:sp>
+      <p:sp>
+        <p:nvSpPr>
+          <p:cNvPr id="7" name="Text 5"/>
+          <p:cNvSpPr/>
+          <p:nvPr/>
+        </p:nvSpPr>
+        <p:spPr>
+          <a:xfrm>
+            <a:off x="822960" y="1600200"/>
+            <a:ext cx="3291840" cy="365760"/>
+          </a:xfrm>
+          <a:prstGeom prst="rect">
+            <a:avLst/>
+          </a:prstGeom>
+          <a:noFill/>
+          <a:ln/>
+        </p:spPr>
+        <p:txBody>
+          <a:bodyPr wrap="square" rtlCol="0" anchor="ctr"/>
           <a:lstStyle/>
           <a:p>
             <a:pPr indent="0" marL="0">
               <a:buNone/>
             </a:pPr>
             <a:r>
-              <a:rPr lang="en-US" sz="1500" b="1" dirty="0">
-                <a:solidFill>
-                  <a:srgbClr val="1E2761"/>
-                </a:solidFill>
-                <a:latin typeface="Calibri" pitchFamily="34" charset="0"/>
-                <a:ea typeface="Calibri" pitchFamily="34" charset="-122"/>
-                <a:cs typeface="Calibri" pitchFamily="34" charset="-120"/>
-              </a:rPr>
-              <a:t>Risk Analysis</a:t>
-            </a:r>
-            <a:endParaRPr lang="en-US" sz="1500" dirty="0"/>
-          </a:p>
-        </p:txBody>
-      </p:sp>
-      <p:sp>
-        <p:nvSpPr>
-          <p:cNvPr id="7" name="Text 5"/>
-          <p:cNvSpPr/>
-          <p:nvPr/>
-        </p:nvSpPr>
-        <p:spPr>
-          <a:xfrm>
-            <a:off x="640080" y="1645920"/>
-            <a:ext cx="3566160" cy="2560320"/>
-          </a:xfrm>
-          <a:prstGeom prst="rect">
-            <a:avLst/>
-          </a:prstGeom>
-          <a:noFill/>
-          <a:ln/>
-        </p:spPr>
-        <p:txBody>
-          <a:bodyPr wrap="square" rtlCol="0" anchor="ctr"/>
-          <a:lstStyle/>
-          <a:p>
-            <a:pPr marL="342900" indent="-342900">
-              <a:buSzPct val="100000"/>
-              <a:buChar char="•"/>
-            </a:pPr>
-            <a:r>
-              <a:rPr lang="en-US" sz="1200" dirty="0">
-                <a:solidFill>
-                  <a:srgbClr val="495670"/>
-                </a:solidFill>
-                <a:latin typeface="Calibri" pitchFamily="34" charset="0"/>
-                <a:ea typeface="Calibri" pitchFamily="34" charset="-122"/>
-                <a:cs typeface="Calibri" pitchFamily="34" charset="-120"/>
-              </a:rPr>
-              <a:t>Risk identification and assessment</a:t>
-            </a:r>
-            <a:endParaRPr lang="en-US" sz="1200" dirty="0"/>
-          </a:p>
-          <a:p>
-            <a:pPr marL="342900" indent="-342900">
-              <a:buSzPct val="100000"/>
-              <a:buChar char="•"/>
-            </a:pPr>
-            <a:r>
-              <a:rPr lang="en-US" sz="1200" dirty="0">
-                <a:solidFill>
-                  <a:srgbClr val="495670"/>
+              <a:rPr lang="en-US" sz="1100" b="1" dirty="0">
+                <a:solidFill>
+                  <a:srgbClr val="38A169"/>
+                </a:solidFill>
+                <a:latin typeface="Calibri" pitchFamily="34" charset="0"/>
+                <a:ea typeface="Calibri" pitchFamily="34" charset="-122"/>
+                <a:cs typeface="Calibri" pitchFamily="34" charset="-120"/>
+              </a:rPr>
+              <a:t>✓ </a:t>
+            </a:r>
+            <a:pPr indent="0" marL="0">
+              <a:buNone/>
+            </a:pPr>
+            <a:r>
+              <a:rPr lang="en-US" sz="1100" dirty="0">
+                <a:solidFill>
+                  <a:srgbClr val="2D3748"/>
+                </a:solidFill>
+                <a:latin typeface="Calibri" pitchFamily="34" charset="0"/>
+                <a:ea typeface="Calibri" pitchFamily="34" charset="-122"/>
+                <a:cs typeface="Calibri" pitchFamily="34" charset="-120"/>
+              </a:rPr>
+              <a:t>Risk identification &amp; assessment</a:t>
+            </a:r>
+            <a:endParaRPr lang="en-US" sz="1100" dirty="0"/>
+          </a:p>
+        </p:txBody>
+      </p:sp>
+      <p:sp>
+        <p:nvSpPr>
+          <p:cNvPr id="8" name="Text 6"/>
+          <p:cNvSpPr/>
+          <p:nvPr/>
+        </p:nvSpPr>
+        <p:spPr>
+          <a:xfrm>
+            <a:off x="822960" y="2057400"/>
+            <a:ext cx="3291840" cy="365760"/>
+          </a:xfrm>
+          <a:prstGeom prst="rect">
+            <a:avLst/>
+          </a:prstGeom>
+          <a:noFill/>
+          <a:ln/>
+        </p:spPr>
+        <p:txBody>
+          <a:bodyPr wrap="square" rtlCol="0" anchor="ctr"/>
+          <a:lstStyle/>
+          <a:p>
+            <a:pPr indent="0" marL="0">
+              <a:buNone/>
+            </a:pPr>
+            <a:r>
+              <a:rPr lang="en-US" sz="1100" b="1" dirty="0">
+                <a:solidFill>
+                  <a:srgbClr val="38A169"/>
+                </a:solidFill>
+                <a:latin typeface="Calibri" pitchFamily="34" charset="0"/>
+                <a:ea typeface="Calibri" pitchFamily="34" charset="-122"/>
+                <a:cs typeface="Calibri" pitchFamily="34" charset="-120"/>
+              </a:rPr>
+              <a:t>✓ </a:t>
+            </a:r>
+            <a:pPr indent="0" marL="0">
+              <a:buNone/>
+            </a:pPr>
+            <a:r>
+              <a:rPr lang="en-US" sz="1100" dirty="0">
+                <a:solidFill>
+                  <a:srgbClr val="2D3748"/>
                 </a:solidFill>
                 <a:latin typeface="Calibri" pitchFamily="34" charset="0"/>
                 <a:ea typeface="Calibri" pitchFamily="34" charset="-122"/>
@@ -4150,53 +5368,158 @@
               </a:rPr>
               <a:t>5x5 Risk Matrix (Probability x Impact)</a:t>
             </a:r>
-            <a:endParaRPr lang="en-US" sz="1200" dirty="0"/>
-          </a:p>
-          <a:p>
-            <a:pPr marL="342900" indent="-342900">
-              <a:buSzPct val="100000"/>
-              <a:buChar char="•"/>
-            </a:pPr>
-            <a:r>
-              <a:rPr lang="en-US" sz="1200" dirty="0">
-                <a:solidFill>
-                  <a:srgbClr val="495670"/>
-                </a:solidFill>
-                <a:latin typeface="Calibri" pitchFamily="34" charset="0"/>
-                <a:ea typeface="Calibri" pitchFamily="34" charset="-122"/>
-                <a:cs typeface="Calibri" pitchFamily="34" charset="-120"/>
-              </a:rPr>
-              <a:t>Mitigation and preventive actions</a:t>
-            </a:r>
-            <a:endParaRPr lang="en-US" sz="1200" dirty="0"/>
-          </a:p>
-          <a:p>
-            <a:pPr marL="342900" indent="-342900">
-              <a:buSzPct val="100000"/>
-              <a:buChar char="•"/>
-            </a:pPr>
-            <a:r>
-              <a:rPr lang="en-US" sz="1200" dirty="0">
-                <a:solidFill>
-                  <a:srgbClr val="495670"/>
-                </a:solidFill>
-                <a:latin typeface="Calibri" pitchFamily="34" charset="0"/>
-                <a:ea typeface="Calibri" pitchFamily="34" charset="-122"/>
-                <a:cs typeface="Calibri" pitchFamily="34" charset="-120"/>
-              </a:rPr>
-              <a:t>Code security and data privacy</a:t>
-            </a:r>
-            <a:endParaRPr lang="en-US" sz="1200" dirty="0"/>
-          </a:p>
-          <a:p>
-            <a:pPr marL="342900" indent="-342900">
-              <a:buSzPct val="100000"/>
-              <a:buChar char="•"/>
-            </a:pPr>
-            <a:r>
-              <a:rPr lang="en-US" sz="1200" dirty="0">
-                <a:solidFill>
-                  <a:srgbClr val="495670"/>
+            <a:endParaRPr lang="en-US" sz="1100" dirty="0"/>
+          </a:p>
+        </p:txBody>
+      </p:sp>
+      <p:sp>
+        <p:nvSpPr>
+          <p:cNvPr id="9" name="Text 7"/>
+          <p:cNvSpPr/>
+          <p:nvPr/>
+        </p:nvSpPr>
+        <p:spPr>
+          <a:xfrm>
+            <a:off x="822960" y="2514600"/>
+            <a:ext cx="3291840" cy="365760"/>
+          </a:xfrm>
+          <a:prstGeom prst="rect">
+            <a:avLst/>
+          </a:prstGeom>
+          <a:noFill/>
+          <a:ln/>
+        </p:spPr>
+        <p:txBody>
+          <a:bodyPr wrap="square" rtlCol="0" anchor="ctr"/>
+          <a:lstStyle/>
+          <a:p>
+            <a:pPr indent="0" marL="0">
+              <a:buNone/>
+            </a:pPr>
+            <a:r>
+              <a:rPr lang="en-US" sz="1100" b="1" dirty="0">
+                <a:solidFill>
+                  <a:srgbClr val="38A169"/>
+                </a:solidFill>
+                <a:latin typeface="Calibri" pitchFamily="34" charset="0"/>
+                <a:ea typeface="Calibri" pitchFamily="34" charset="-122"/>
+                <a:cs typeface="Calibri" pitchFamily="34" charset="-120"/>
+              </a:rPr>
+              <a:t>✓ </a:t>
+            </a:r>
+            <a:pPr indent="0" marL="0">
+              <a:buNone/>
+            </a:pPr>
+            <a:r>
+              <a:rPr lang="en-US" sz="1100" dirty="0">
+                <a:solidFill>
+                  <a:srgbClr val="2D3748"/>
+                </a:solidFill>
+                <a:latin typeface="Calibri" pitchFamily="34" charset="0"/>
+                <a:ea typeface="Calibri" pitchFamily="34" charset="-122"/>
+                <a:cs typeface="Calibri" pitchFamily="34" charset="-120"/>
+              </a:rPr>
+              <a:t>Preventive actions</a:t>
+            </a:r>
+            <a:endParaRPr lang="en-US" sz="1100" dirty="0"/>
+          </a:p>
+        </p:txBody>
+      </p:sp>
+      <p:sp>
+        <p:nvSpPr>
+          <p:cNvPr id="10" name="Text 8"/>
+          <p:cNvSpPr/>
+          <p:nvPr/>
+        </p:nvSpPr>
+        <p:spPr>
+          <a:xfrm>
+            <a:off x="822960" y="2971800"/>
+            <a:ext cx="3291840" cy="365760"/>
+          </a:xfrm>
+          <a:prstGeom prst="rect">
+            <a:avLst/>
+          </a:prstGeom>
+          <a:noFill/>
+          <a:ln/>
+        </p:spPr>
+        <p:txBody>
+          <a:bodyPr wrap="square" rtlCol="0" anchor="ctr"/>
+          <a:lstStyle/>
+          <a:p>
+            <a:pPr indent="0" marL="0">
+              <a:buNone/>
+            </a:pPr>
+            <a:r>
+              <a:rPr lang="en-US" sz="1100" b="1" dirty="0">
+                <a:solidFill>
+                  <a:srgbClr val="38A169"/>
+                </a:solidFill>
+                <a:latin typeface="Calibri" pitchFamily="34" charset="0"/>
+                <a:ea typeface="Calibri" pitchFamily="34" charset="-122"/>
+                <a:cs typeface="Calibri" pitchFamily="34" charset="-120"/>
+              </a:rPr>
+              <a:t>✓ </a:t>
+            </a:r>
+            <a:pPr indent="0" marL="0">
+              <a:buNone/>
+            </a:pPr>
+            <a:r>
+              <a:rPr lang="en-US" sz="1100" dirty="0">
+                <a:solidFill>
+                  <a:srgbClr val="2D3748"/>
+                </a:solidFill>
+                <a:latin typeface="Calibri" pitchFamily="34" charset="0"/>
+                <a:ea typeface="Calibri" pitchFamily="34" charset="-122"/>
+                <a:cs typeface="Calibri" pitchFamily="34" charset="-120"/>
+              </a:rPr>
+              <a:t>Code security &amp; data privacy</a:t>
+            </a:r>
+            <a:endParaRPr lang="en-US" sz="1100" dirty="0"/>
+          </a:p>
+        </p:txBody>
+      </p:sp>
+      <p:sp>
+        <p:nvSpPr>
+          <p:cNvPr id="11" name="Text 9"/>
+          <p:cNvSpPr/>
+          <p:nvPr/>
+        </p:nvSpPr>
+        <p:spPr>
+          <a:xfrm>
+            <a:off x="822960" y="3429000"/>
+            <a:ext cx="3291840" cy="365760"/>
+          </a:xfrm>
+          <a:prstGeom prst="rect">
+            <a:avLst/>
+          </a:prstGeom>
+          <a:noFill/>
+          <a:ln/>
+        </p:spPr>
+        <p:txBody>
+          <a:bodyPr wrap="square" rtlCol="0" anchor="ctr"/>
+          <a:lstStyle/>
+          <a:p>
+            <a:pPr indent="0" marL="0">
+              <a:buNone/>
+            </a:pPr>
+            <a:r>
+              <a:rPr lang="en-US" sz="1100" b="1" dirty="0">
+                <a:solidFill>
+                  <a:srgbClr val="38A169"/>
+                </a:solidFill>
+                <a:latin typeface="Calibri" pitchFamily="34" charset="0"/>
+                <a:ea typeface="Calibri" pitchFamily="34" charset="-122"/>
+                <a:cs typeface="Calibri" pitchFamily="34" charset="-120"/>
+              </a:rPr>
+              <a:t>✓ </a:t>
+            </a:r>
+            <a:pPr indent="0" marL="0">
+              <a:buNone/>
+            </a:pPr>
+            <a:r>
+              <a:rPr lang="en-US" sz="1100" dirty="0">
+                <a:solidFill>
+                  <a:srgbClr val="2D3748"/>
                 </a:solidFill>
                 <a:latin typeface="Calibri" pitchFamily="34" charset="0"/>
                 <a:ea typeface="Calibri" pitchFamily="34" charset="-122"/>
@@ -4204,32 +5527,34 @@
               </a:rPr>
               <a:t>Implementation roadmap</a:t>
             </a:r>
-            <a:endParaRPr lang="en-US" sz="1200" dirty="0"/>
-          </a:p>
-        </p:txBody>
-      </p:sp>
-      <p:sp>
-        <p:nvSpPr>
-          <p:cNvPr id="8" name="Shape 6"/>
-          <p:cNvSpPr/>
-          <p:nvPr/>
-        </p:nvSpPr>
-        <p:spPr>
-          <a:xfrm>
-            <a:off x="4754880" y="1051560"/>
-            <a:ext cx="3931920" cy="3383280"/>
-          </a:xfrm>
-          <a:prstGeom prst="rect">
-            <a:avLst/>
+            <a:endParaRPr lang="en-US" sz="1100" dirty="0"/>
+          </a:p>
+        </p:txBody>
+      </p:sp>
+      <p:sp>
+        <p:nvSpPr>
+          <p:cNvPr id="12" name="Shape 10"/>
+          <p:cNvSpPr/>
+          <p:nvPr/>
+        </p:nvSpPr>
+        <p:spPr>
+          <a:xfrm>
+            <a:off x="4754880" y="1005840"/>
+            <a:ext cx="3840480" cy="3474720"/>
+          </a:xfrm>
+          <a:prstGeom prst="roundRect">
+            <a:avLst>
+              <a:gd name="adj" fmla="val 3158"/>
+            </a:avLst>
           </a:prstGeom>
           <a:solidFill>
             <a:srgbClr val="FFFFFF"/>
           </a:solidFill>
           <a:ln/>
           <a:effectLst>
-            <a:outerShdw sx="100000" sy="100000" kx="0" ky="0" algn="bl" rotWithShape="0" blurRad="101600" dist="38100" dir="8100000">
+            <a:outerShdw sx="100000" sy="100000" kx="0" ky="0" algn="bl" rotWithShape="0" blurRad="76200" dist="25400" dir="8100000">
               <a:srgbClr val="000000">
-                <a:alpha val="12000"/>
+                <a:alpha val="8000"/>
               </a:srgbClr>
             </a:outerShdw>
           </a:effectLst>
@@ -4237,92 +5562,105 @@
       </p:sp>
       <p:sp>
         <p:nvSpPr>
-          <p:cNvPr id="9" name="Shape 7"/>
-          <p:cNvSpPr/>
-          <p:nvPr/>
-        </p:nvSpPr>
-        <p:spPr>
-          <a:xfrm>
-            <a:off x="4754880" y="1051560"/>
-            <a:ext cx="3931920" cy="54864"/>
-          </a:xfrm>
-          <a:prstGeom prst="rect">
+          <p:cNvPr id="13" name="Shape 11"/>
+          <p:cNvSpPr/>
+          <p:nvPr/>
+        </p:nvSpPr>
+        <p:spPr>
+          <a:xfrm>
+            <a:off x="4754880" y="1005840"/>
+            <a:ext cx="3840480" cy="457200"/>
+          </a:xfrm>
+          <a:prstGeom prst="roundRect">
             <a:avLst/>
           </a:prstGeom>
           <a:solidFill>
-            <a:srgbClr val="10B981"/>
+            <a:srgbClr val="00B4D8"/>
           </a:solidFill>
           <a:ln/>
         </p:spPr>
       </p:sp>
       <p:sp>
         <p:nvSpPr>
-          <p:cNvPr id="10" name="Text 8"/>
-          <p:cNvSpPr/>
-          <p:nvPr/>
-        </p:nvSpPr>
-        <p:spPr>
-          <a:xfrm>
-            <a:off x="4937760" y="1188720"/>
-            <a:ext cx="3566160" cy="365760"/>
-          </a:xfrm>
-          <a:prstGeom prst="rect">
-            <a:avLst/>
-          </a:prstGeom>
-          <a:noFill/>
-          <a:ln/>
-        </p:spPr>
-        <p:txBody>
-          <a:bodyPr wrap="square" lIns="0" tIns="0" rIns="0" bIns="0" rtlCol="0" anchor="ctr"/>
+          <p:cNvPr id="14" name="Text 12"/>
+          <p:cNvSpPr/>
+          <p:nvPr/>
+        </p:nvSpPr>
+        <p:spPr>
+          <a:xfrm>
+            <a:off x="4754880" y="1005840"/>
+            <a:ext cx="3840480" cy="457200"/>
+          </a:xfrm>
+          <a:prstGeom prst="rect">
+            <a:avLst/>
+          </a:prstGeom>
+          <a:noFill/>
+          <a:ln/>
+        </p:spPr>
+        <p:txBody>
+          <a:bodyPr wrap="square" rtlCol="0" anchor="ctr"/>
+          <a:lstStyle/>
+          <a:p>
+            <a:pPr algn="ctr" indent="0" marL="0">
+              <a:buNone/>
+            </a:pPr>
+            <a:r>
+              <a:rPr lang="en-US" sz="1400" b="1" dirty="0">
+                <a:solidFill>
+                  <a:srgbClr val="FFFFFF"/>
+                </a:solidFill>
+                <a:latin typeface="Calibri" pitchFamily="34" charset="0"/>
+                <a:ea typeface="Calibri" pitchFamily="34" charset="-122"/>
+                <a:cs typeface="Calibri" pitchFamily="34" charset="-120"/>
+              </a:rPr>
+              <a:t>Testing Plan &amp; Success Criteria</a:t>
+            </a:r>
+            <a:endParaRPr lang="en-US" sz="1400" dirty="0"/>
+          </a:p>
+        </p:txBody>
+      </p:sp>
+      <p:sp>
+        <p:nvSpPr>
+          <p:cNvPr id="15" name="Text 13"/>
+          <p:cNvSpPr/>
+          <p:nvPr/>
+        </p:nvSpPr>
+        <p:spPr>
+          <a:xfrm>
+            <a:off x="5029200" y="1600200"/>
+            <a:ext cx="3291840" cy="365760"/>
+          </a:xfrm>
+          <a:prstGeom prst="rect">
+            <a:avLst/>
+          </a:prstGeom>
+          <a:noFill/>
+          <a:ln/>
+        </p:spPr>
+        <p:txBody>
+          <a:bodyPr wrap="square" rtlCol="0" anchor="ctr"/>
           <a:lstStyle/>
           <a:p>
             <a:pPr indent="0" marL="0">
               <a:buNone/>
             </a:pPr>
             <a:r>
-              <a:rPr lang="en-US" sz="1500" b="1" dirty="0">
-                <a:solidFill>
-                  <a:srgbClr val="1E2761"/>
-                </a:solidFill>
-                <a:latin typeface="Calibri" pitchFamily="34" charset="0"/>
-                <a:ea typeface="Calibri" pitchFamily="34" charset="-122"/>
-                <a:cs typeface="Calibri" pitchFamily="34" charset="-120"/>
-              </a:rPr>
-              <a:t>Testing &amp; Success Criteria</a:t>
-            </a:r>
-            <a:endParaRPr lang="en-US" sz="1500" dirty="0"/>
-          </a:p>
-        </p:txBody>
-      </p:sp>
-      <p:sp>
-        <p:nvSpPr>
-          <p:cNvPr id="11" name="Text 9"/>
-          <p:cNvSpPr/>
-          <p:nvPr/>
-        </p:nvSpPr>
-        <p:spPr>
-          <a:xfrm>
-            <a:off x="4937760" y="1645920"/>
-            <a:ext cx="3566160" cy="2560320"/>
-          </a:xfrm>
-          <a:prstGeom prst="rect">
-            <a:avLst/>
-          </a:prstGeom>
-          <a:noFill/>
-          <a:ln/>
-        </p:spPr>
-        <p:txBody>
-          <a:bodyPr wrap="square" rtlCol="0" anchor="ctr"/>
-          <a:lstStyle/>
-          <a:p>
-            <a:pPr marL="342900" indent="-342900">
-              <a:buSzPct val="100000"/>
-              <a:buChar char="•"/>
-            </a:pPr>
-            <a:r>
-              <a:rPr lang="en-US" sz="1200" dirty="0">
-                <a:solidFill>
-                  <a:srgbClr val="495670"/>
+              <a:rPr lang="en-US" sz="1100" b="1" dirty="0">
+                <a:solidFill>
+                  <a:srgbClr val="00B4D8"/>
+                </a:solidFill>
+                <a:latin typeface="Calibri" pitchFamily="34" charset="0"/>
+                <a:ea typeface="Calibri" pitchFamily="34" charset="-122"/>
+                <a:cs typeface="Calibri" pitchFamily="34" charset="-120"/>
+              </a:rPr>
+              <a:t>✓ </a:t>
+            </a:r>
+            <a:pPr indent="0" marL="0">
+              <a:buNone/>
+            </a:pPr>
+            <a:r>
+              <a:rPr lang="en-US" sz="1100" dirty="0">
+                <a:solidFill>
+                  <a:srgbClr val="2D3748"/>
                 </a:solidFill>
                 <a:latin typeface="Calibri" pitchFamily="34" charset="0"/>
                 <a:ea typeface="Calibri" pitchFamily="34" charset="-122"/>
@@ -4330,17 +5668,52 @@
               </a:rPr>
               <a:t>Unit, Integration, E2E Testing</a:t>
             </a:r>
-            <a:endParaRPr lang="en-US" sz="1200" dirty="0"/>
-          </a:p>
-          <a:p>
-            <a:pPr marL="342900" indent="-342900">
-              <a:buSzPct val="100000"/>
-              <a:buChar char="•"/>
-            </a:pPr>
-            <a:r>
-              <a:rPr lang="en-US" sz="1200" dirty="0">
-                <a:solidFill>
-                  <a:srgbClr val="495670"/>
+            <a:endParaRPr lang="en-US" sz="1100" dirty="0"/>
+          </a:p>
+        </p:txBody>
+      </p:sp>
+      <p:sp>
+        <p:nvSpPr>
+          <p:cNvPr id="16" name="Text 14"/>
+          <p:cNvSpPr/>
+          <p:nvPr/>
+        </p:nvSpPr>
+        <p:spPr>
+          <a:xfrm>
+            <a:off x="5029200" y="2057400"/>
+            <a:ext cx="3291840" cy="365760"/>
+          </a:xfrm>
+          <a:prstGeom prst="rect">
+            <a:avLst/>
+          </a:prstGeom>
+          <a:noFill/>
+          <a:ln/>
+        </p:spPr>
+        <p:txBody>
+          <a:bodyPr wrap="square" rtlCol="0" anchor="ctr"/>
+          <a:lstStyle/>
+          <a:p>
+            <a:pPr indent="0" marL="0">
+              <a:buNone/>
+            </a:pPr>
+            <a:r>
+              <a:rPr lang="en-US" sz="1100" b="1" dirty="0">
+                <a:solidFill>
+                  <a:srgbClr val="00B4D8"/>
+                </a:solidFill>
+                <a:latin typeface="Calibri" pitchFamily="34" charset="0"/>
+                <a:ea typeface="Calibri" pitchFamily="34" charset="-122"/>
+                <a:cs typeface="Calibri" pitchFamily="34" charset="-120"/>
+              </a:rPr>
+              <a:t>✓ </a:t>
+            </a:r>
+            <a:pPr indent="0" marL="0">
+              <a:buNone/>
+            </a:pPr>
+            <a:r>
+              <a:rPr lang="en-US" sz="1100" dirty="0">
+                <a:solidFill>
+                  <a:srgbClr val="2D3748"/>
                 </a:solidFill>
                 <a:latin typeface="Calibri" pitchFamily="34" charset="0"/>
                 <a:ea typeface="Calibri" pitchFamily="34" charset="-122"/>
@@ -4348,17 +5721,52 @@
               </a:rPr>
               <a:t>API endpoint validation</a:t>
             </a:r>
-            <a:endParaRPr lang="en-US" sz="1200" dirty="0"/>
-          </a:p>
-          <a:p>
-            <a:pPr marL="342900" indent="-342900">
-              <a:buSzPct val="100000"/>
-              <a:buChar char="•"/>
-            </a:pPr>
-            <a:r>
-              <a:rPr lang="en-US" sz="1200" dirty="0">
-                <a:solidFill>
-                  <a:srgbClr val="495670"/>
+            <a:endParaRPr lang="en-US" sz="1100" dirty="0"/>
+          </a:p>
+        </p:txBody>
+      </p:sp>
+      <p:sp>
+        <p:nvSpPr>
+          <p:cNvPr id="17" name="Text 15"/>
+          <p:cNvSpPr/>
+          <p:nvPr/>
+        </p:nvSpPr>
+        <p:spPr>
+          <a:xfrm>
+            <a:off x="5029200" y="2514600"/>
+            <a:ext cx="3291840" cy="365760"/>
+          </a:xfrm>
+          <a:prstGeom prst="rect">
+            <a:avLst/>
+          </a:prstGeom>
+          <a:noFill/>
+          <a:ln/>
+        </p:spPr>
+        <p:txBody>
+          <a:bodyPr wrap="square" rtlCol="0" anchor="ctr"/>
+          <a:lstStyle/>
+          <a:p>
+            <a:pPr indent="0" marL="0">
+              <a:buNone/>
+            </a:pPr>
+            <a:r>
+              <a:rPr lang="en-US" sz="1100" b="1" dirty="0">
+                <a:solidFill>
+                  <a:srgbClr val="00B4D8"/>
+                </a:solidFill>
+                <a:latin typeface="Calibri" pitchFamily="34" charset="0"/>
+                <a:ea typeface="Calibri" pitchFamily="34" charset="-122"/>
+                <a:cs typeface="Calibri" pitchFamily="34" charset="-120"/>
+              </a:rPr>
+              <a:t>✓ </a:t>
+            </a:r>
+            <a:pPr indent="0" marL="0">
+              <a:buNone/>
+            </a:pPr>
+            <a:r>
+              <a:rPr lang="en-US" sz="1100" dirty="0">
+                <a:solidFill>
+                  <a:srgbClr val="2D3748"/>
                 </a:solidFill>
                 <a:latin typeface="Calibri" pitchFamily="34" charset="0"/>
                 <a:ea typeface="Calibri" pitchFamily="34" charset="-122"/>
@@ -4366,35 +5774,105 @@
               </a:rPr>
               <a:t>Page load &lt; 2 seconds</a:t>
             </a:r>
-            <a:endParaRPr lang="en-US" sz="1200" dirty="0"/>
-          </a:p>
-          <a:p>
-            <a:pPr marL="342900" indent="-342900">
-              <a:buSzPct val="100000"/>
-              <a:buChar char="•"/>
-            </a:pPr>
-            <a:r>
-              <a:rPr lang="en-US" sz="1200" dirty="0">
-                <a:solidFill>
-                  <a:srgbClr val="495670"/>
-                </a:solidFill>
-                <a:latin typeface="Calibri" pitchFamily="34" charset="0"/>
-                <a:ea typeface="Calibri" pitchFamily="34" charset="-122"/>
-                <a:cs typeface="Calibri" pitchFamily="34" charset="-120"/>
-              </a:rPr>
-              <a:t>All CRUD operations functional</a:t>
-            </a:r>
-            <a:endParaRPr lang="en-US" sz="1200" dirty="0"/>
-          </a:p>
-          <a:p>
-            <a:pPr marL="342900" indent="-342900">
-              <a:buSzPct val="100000"/>
-              <a:buChar char="•"/>
-            </a:pPr>
-            <a:r>
-              <a:rPr lang="en-US" sz="1200" dirty="0">
-                <a:solidFill>
-                  <a:srgbClr val="495670"/>
+            <a:endParaRPr lang="en-US" sz="1100" dirty="0"/>
+          </a:p>
+        </p:txBody>
+      </p:sp>
+      <p:sp>
+        <p:nvSpPr>
+          <p:cNvPr id="18" name="Text 16"/>
+          <p:cNvSpPr/>
+          <p:nvPr/>
+        </p:nvSpPr>
+        <p:spPr>
+          <a:xfrm>
+            <a:off x="5029200" y="2971800"/>
+            <a:ext cx="3291840" cy="365760"/>
+          </a:xfrm>
+          <a:prstGeom prst="rect">
+            <a:avLst/>
+          </a:prstGeom>
+          <a:noFill/>
+          <a:ln/>
+        </p:spPr>
+        <p:txBody>
+          <a:bodyPr wrap="square" rtlCol="0" anchor="ctr"/>
+          <a:lstStyle/>
+          <a:p>
+            <a:pPr indent="0" marL="0">
+              <a:buNone/>
+            </a:pPr>
+            <a:r>
+              <a:rPr lang="en-US" sz="1100" b="1" dirty="0">
+                <a:solidFill>
+                  <a:srgbClr val="00B4D8"/>
+                </a:solidFill>
+                <a:latin typeface="Calibri" pitchFamily="34" charset="0"/>
+                <a:ea typeface="Calibri" pitchFamily="34" charset="-122"/>
+                <a:cs typeface="Calibri" pitchFamily="34" charset="-120"/>
+              </a:rPr>
+              <a:t>✓ </a:t>
+            </a:r>
+            <a:pPr indent="0" marL="0">
+              <a:buNone/>
+            </a:pPr>
+            <a:r>
+              <a:rPr lang="en-US" sz="1100" dirty="0">
+                <a:solidFill>
+                  <a:srgbClr val="2D3748"/>
+                </a:solidFill>
+                <a:latin typeface="Calibri" pitchFamily="34" charset="0"/>
+                <a:ea typeface="Calibri" pitchFamily="34" charset="-122"/>
+                <a:cs typeface="Calibri" pitchFamily="34" charset="-120"/>
+              </a:rPr>
+              <a:t>All CRUD operations work</a:t>
+            </a:r>
+            <a:endParaRPr lang="en-US" sz="1100" dirty="0"/>
+          </a:p>
+        </p:txBody>
+      </p:sp>
+      <p:sp>
+        <p:nvSpPr>
+          <p:cNvPr id="19" name="Text 17"/>
+          <p:cNvSpPr/>
+          <p:nvPr/>
+        </p:nvSpPr>
+        <p:spPr>
+          <a:xfrm>
+            <a:off x="5029200" y="3429000"/>
+            <a:ext cx="3291840" cy="365760"/>
+          </a:xfrm>
+          <a:prstGeom prst="rect">
+            <a:avLst/>
+          </a:prstGeom>
+          <a:noFill/>
+          <a:ln/>
+        </p:spPr>
+        <p:txBody>
+          <a:bodyPr wrap="square" rtlCol="0" anchor="ctr"/>
+          <a:lstStyle/>
+          <a:p>
+            <a:pPr indent="0" marL="0">
+              <a:buNone/>
+            </a:pPr>
+            <a:r>
+              <a:rPr lang="en-US" sz="1100" b="1" dirty="0">
+                <a:solidFill>
+                  <a:srgbClr val="00B4D8"/>
+                </a:solidFill>
+                <a:latin typeface="Calibri" pitchFamily="34" charset="0"/>
+                <a:ea typeface="Calibri" pitchFamily="34" charset="-122"/>
+                <a:cs typeface="Calibri" pitchFamily="34" charset="-120"/>
+              </a:rPr>
+              <a:t>✓ </a:t>
+            </a:r>
+            <a:pPr indent="0" marL="0">
+              <a:buNone/>
+            </a:pPr>
+            <a:r>
+              <a:rPr lang="en-US" sz="1100" dirty="0">
+                <a:solidFill>
+                  <a:srgbClr val="2D3748"/>
                 </a:solidFill>
                 <a:latin typeface="Calibri" pitchFamily="34" charset="0"/>
                 <a:ea typeface="Calibri" pitchFamily="34" charset="-122"/>
@@ -4402,40 +5880,20 @@
               </a:rPr>
               <a:t>File upload successful</a:t>
             </a:r>
-            <a:endParaRPr lang="en-US" sz="1200" dirty="0"/>
-          </a:p>
-        </p:txBody>
-      </p:sp>
-      <p:sp>
-        <p:nvSpPr>
-          <p:cNvPr id="12" name="Shape 10"/>
-          <p:cNvSpPr/>
-          <p:nvPr/>
-        </p:nvSpPr>
-        <p:spPr>
-          <a:xfrm>
-            <a:off x="0" y="4754880"/>
-            <a:ext cx="9144000" cy="388620"/>
-          </a:xfrm>
-          <a:prstGeom prst="rect">
-            <a:avLst/>
-          </a:prstGeom>
-          <a:solidFill>
-            <a:srgbClr val="1E2761"/>
-          </a:solidFill>
-          <a:ln/>
-        </p:spPr>
-      </p:sp>
-      <p:sp>
-        <p:nvSpPr>
-          <p:cNvPr id="13" name="Text 11"/>
-          <p:cNvSpPr/>
-          <p:nvPr/>
-        </p:nvSpPr>
-        <p:spPr>
-          <a:xfrm>
-            <a:off x="457200" y="4754880"/>
-            <a:ext cx="6400800" cy="388620"/>
+            <a:endParaRPr lang="en-US" sz="1100" dirty="0"/>
+          </a:p>
+        </p:txBody>
+      </p:sp>
+      <p:sp>
+        <p:nvSpPr>
+          <p:cNvPr id="20" name="Text 18"/>
+          <p:cNvSpPr/>
+          <p:nvPr/>
+        </p:nvSpPr>
+        <p:spPr>
+          <a:xfrm>
+            <a:off x="457200" y="4663440"/>
+            <a:ext cx="6400800" cy="365760"/>
           </a:xfrm>
           <a:prstGeom prst="rect">
             <a:avLst/>
@@ -4453,8 +5911,11 @@
             <a:r>
               <a:rPr lang="en-US" sz="900" dirty="0">
                 <a:solidFill>
-                  <a:srgbClr val="CADCFC"/>
-                </a:solidFill>
+                  <a:srgbClr val="718096"/>
+                </a:solidFill>
+                <a:latin typeface="Calibri" pitchFamily="34" charset="0"/>
+                <a:ea typeface="Calibri" pitchFamily="34" charset="-122"/>
+                <a:cs typeface="Calibri" pitchFamily="34" charset="-120"/>
               </a:rPr>
               <a:t>ProfAI – UYG338 Software Project Management</a:t>
             </a:r>
@@ -4464,14 +5925,14 @@
       </p:sp>
       <p:sp>
         <p:nvSpPr>
-          <p:cNvPr id="14" name="Text 12"/>
-          <p:cNvSpPr/>
-          <p:nvPr/>
-        </p:nvSpPr>
-        <p:spPr>
-          <a:xfrm>
-            <a:off x="7772400" y="4754880"/>
-            <a:ext cx="914400" cy="388620"/>
+          <p:cNvPr id="21" name="Text 19"/>
+          <p:cNvSpPr/>
+          <p:nvPr/>
+        </p:nvSpPr>
+        <p:spPr>
+          <a:xfrm>
+            <a:off x="7772400" y="4663440"/>
+            <a:ext cx="914400" cy="365760"/>
           </a:xfrm>
           <a:prstGeom prst="rect">
             <a:avLst/>
@@ -4489,10 +5950,13 @@
             <a:r>
               <a:rPr lang="en-US" sz="900" dirty="0">
                 <a:solidFill>
-                  <a:srgbClr val="CADCFC"/>
-                </a:solidFill>
-              </a:rPr>
-              <a:t>5/8</a:t>
+                  <a:srgbClr val="718096"/>
+                </a:solidFill>
+                <a:latin typeface="Calibri" pitchFamily="34" charset="0"/>
+                <a:ea typeface="Calibri" pitchFamily="34" charset="-122"/>
+                <a:cs typeface="Calibri" pitchFamily="34" charset="-120"/>
+              </a:rPr>
+              <a:t>5/9</a:t>
             </a:r>
             <a:endParaRPr lang="en-US" sz="900" dirty="0"/>
           </a:p>
@@ -4512,7 +5976,7 @@
     <p:bg>
       <p:bgPr>
         <a:solidFill>
-          <a:srgbClr val="F0F3FA"/>
+          <a:srgbClr val="F0F4F8"/>
         </a:solidFill>
       </p:bgPr>
     </p:bg>
@@ -4539,13 +6003,13 @@
         <p:spPr>
           <a:xfrm>
             <a:off x="0" y="0"/>
-            <a:ext cx="9144000" cy="822960"/>
+            <a:ext cx="9144000" cy="54864"/>
           </a:xfrm>
           <a:prstGeom prst="rect">
             <a:avLst/>
           </a:prstGeom>
           <a:solidFill>
-            <a:srgbClr val="1E2761"/>
+            <a:srgbClr val="00B4D8"/>
           </a:solidFill>
           <a:ln/>
         </p:spPr>
@@ -4558,26 +6022,26 @@
         </p:nvSpPr>
         <p:spPr>
           <a:xfrm>
-            <a:off x="548640" y="0"/>
-            <a:ext cx="8229600" cy="822960"/>
-          </a:xfrm>
-          <a:prstGeom prst="rect">
-            <a:avLst/>
-          </a:prstGeom>
-          <a:noFill/>
-          <a:ln/>
-        </p:spPr>
-        <p:txBody>
-          <a:bodyPr wrap="square" rtlCol="0" anchor="ctr"/>
+            <a:off x="548640" y="228600"/>
+            <a:ext cx="8229600" cy="548640"/>
+          </a:xfrm>
+          <a:prstGeom prst="rect">
+            <a:avLst/>
+          </a:prstGeom>
+          <a:noFill/>
+          <a:ln/>
+        </p:spPr>
+        <p:txBody>
+          <a:bodyPr wrap="square" lIns="0" tIns="0" rIns="0" bIns="0" rtlCol="0" anchor="ctr"/>
           <a:lstStyle/>
           <a:p>
             <a:pPr indent="0" marL="0">
               <a:buNone/>
             </a:pPr>
             <a:r>
-              <a:rPr lang="en-US" sz="2200" b="1" dirty="0">
-                <a:solidFill>
-                  <a:srgbClr val="FFFFFF"/>
+              <a:rPr lang="en-US" sz="2800" b="1" dirty="0">
+                <a:solidFill>
+                  <a:srgbClr val="1B2A4A"/>
                 </a:solidFill>
                 <a:latin typeface="Calibri" pitchFamily="34" charset="0"/>
                 <a:ea typeface="Calibri" pitchFamily="34" charset="-122"/>
@@ -4585,7 +6049,7 @@
               </a:rPr>
               <a:t>HW4: MVP &amp; Working System</a:t>
             </a:r>
-            <a:endParaRPr lang="en-US" sz="2200" dirty="0"/>
+            <a:endParaRPr lang="en-US" sz="2800" dirty="0"/>
           </a:p>
         </p:txBody>
       </p:sp>
@@ -4597,20 +6061,22 @@
         </p:nvSpPr>
         <p:spPr>
           <a:xfrm>
-            <a:off x="457200" y="1051560"/>
-            <a:ext cx="1920240" cy="1371600"/>
-          </a:xfrm>
-          <a:prstGeom prst="rect">
-            <a:avLst/>
+            <a:off x="548640" y="1005840"/>
+            <a:ext cx="1920240" cy="1280160"/>
+          </a:xfrm>
+          <a:prstGeom prst="roundRect">
+            <a:avLst>
+              <a:gd name="adj" fmla="val 7143"/>
+            </a:avLst>
           </a:prstGeom>
           <a:solidFill>
             <a:srgbClr val="FFFFFF"/>
           </a:solidFill>
           <a:ln/>
           <a:effectLst>
-            <a:outerShdw sx="100000" sy="100000" kx="0" ky="0" algn="bl" rotWithShape="0" blurRad="101600" dist="38100" dir="8100000">
+            <a:outerShdw sx="100000" sy="100000" kx="0" ky="0" algn="bl" rotWithShape="0" blurRad="76200" dist="25400" dir="8100000">
               <a:srgbClr val="000000">
-                <a:alpha val="12000"/>
+                <a:alpha val="8000"/>
               </a:srgbClr>
             </a:outerShdw>
           </a:effectLst>
@@ -4624,8 +6090,8 @@
         </p:nvSpPr>
         <p:spPr>
           <a:xfrm>
-            <a:off x="457200" y="1051560"/>
-            <a:ext cx="1920240" cy="777240"/>
+            <a:off x="548640" y="1051560"/>
+            <a:ext cx="1920240" cy="640080"/>
           </a:xfrm>
           <a:prstGeom prst="rect">
             <a:avLst/>
@@ -4641,9 +6107,9 @@
               <a:buNone/>
             </a:pPr>
             <a:r>
-              <a:rPr lang="en-US" sz="3800" b="1" dirty="0">
-                <a:solidFill>
-                  <a:srgbClr val="4A6CF7"/>
+              <a:rPr lang="en-US" sz="3600" b="1" dirty="0">
+                <a:solidFill>
+                  <a:srgbClr val="0066CC"/>
                 </a:solidFill>
                 <a:latin typeface="Calibri" pitchFamily="34" charset="0"/>
                 <a:ea typeface="Calibri" pitchFamily="34" charset="-122"/>
@@ -4651,7 +6117,7 @@
               </a:rPr>
               <a:t>3</a:t>
             </a:r>
-            <a:endParaRPr lang="en-US" sz="3800" dirty="0"/>
+            <a:endParaRPr lang="en-US" sz="3600" dirty="0"/>
           </a:p>
         </p:txBody>
       </p:sp>
@@ -4663,17 +6129,17 @@
         </p:nvSpPr>
         <p:spPr>
           <a:xfrm>
-            <a:off x="457200" y="1783080"/>
-            <a:ext cx="1920240" cy="548640"/>
-          </a:xfrm>
-          <a:prstGeom prst="rect">
-            <a:avLst/>
-          </a:prstGeom>
-          <a:noFill/>
-          <a:ln/>
-        </p:spPr>
-        <p:txBody>
-          <a:bodyPr wrap="square" rtlCol="0" anchor="ctr"/>
+            <a:off x="548640" y="1691640"/>
+            <a:ext cx="1920240" cy="502920"/>
+          </a:xfrm>
+          <a:prstGeom prst="rect">
+            <a:avLst/>
+          </a:prstGeom>
+          <a:noFill/>
+          <a:ln/>
+        </p:spPr>
+        <p:txBody>
+          <a:bodyPr wrap="square" rtlCol="0" anchor="t"/>
           <a:lstStyle/>
           <a:p>
             <a:pPr algn="ctr" indent="0" marL="0">
@@ -4682,7 +6148,7 @@
             <a:r>
               <a:rPr lang="en-US" sz="1100" dirty="0">
                 <a:solidFill>
-                  <a:srgbClr val="495670"/>
+                  <a:srgbClr val="718096"/>
                 </a:solidFill>
                 <a:latin typeface="Calibri" pitchFamily="34" charset="0"/>
                 <a:ea typeface="Calibri" pitchFamily="34" charset="-122"/>
@@ -4699,7 +6165,7 @@
             <a:r>
               <a:rPr lang="en-US" sz="1100" dirty="0">
                 <a:solidFill>
-                  <a:srgbClr val="495670"/>
+                  <a:srgbClr val="718096"/>
                 </a:solidFill>
                 <a:latin typeface="Calibri" pitchFamily="34" charset="0"/>
                 <a:ea typeface="Calibri" pitchFamily="34" charset="-122"/>
@@ -4719,20 +6185,22 @@
         </p:nvSpPr>
         <p:spPr>
           <a:xfrm>
-            <a:off x="2606040" y="1051560"/>
-            <a:ext cx="1920240" cy="1371600"/>
-          </a:xfrm>
-          <a:prstGeom prst="rect">
-            <a:avLst/>
+            <a:off x="2697480" y="1005840"/>
+            <a:ext cx="1920240" cy="1280160"/>
+          </a:xfrm>
+          <a:prstGeom prst="roundRect">
+            <a:avLst>
+              <a:gd name="adj" fmla="val 7143"/>
+            </a:avLst>
           </a:prstGeom>
           <a:solidFill>
             <a:srgbClr val="FFFFFF"/>
           </a:solidFill>
           <a:ln/>
           <a:effectLst>
-            <a:outerShdw sx="100000" sy="100000" kx="0" ky="0" algn="bl" rotWithShape="0" blurRad="101600" dist="38100" dir="8100000">
+            <a:outerShdw sx="100000" sy="100000" kx="0" ky="0" algn="bl" rotWithShape="0" blurRad="76200" dist="25400" dir="8100000">
               <a:srgbClr val="000000">
-                <a:alpha val="12000"/>
+                <a:alpha val="8000"/>
               </a:srgbClr>
             </a:outerShdw>
           </a:effectLst>
@@ -4746,8 +6214,8 @@
         </p:nvSpPr>
         <p:spPr>
           <a:xfrm>
-            <a:off x="2606040" y="1051560"/>
-            <a:ext cx="1920240" cy="777240"/>
+            <a:off x="2697480" y="1051560"/>
+            <a:ext cx="1920240" cy="640080"/>
           </a:xfrm>
           <a:prstGeom prst="rect">
             <a:avLst/>
@@ -4763,9 +6231,9 @@
               <a:buNone/>
             </a:pPr>
             <a:r>
-              <a:rPr lang="en-US" sz="3800" b="1" dirty="0">
-                <a:solidFill>
-                  <a:srgbClr val="10B981"/>
+              <a:rPr lang="en-US" sz="3600" b="1" dirty="0">
+                <a:solidFill>
+                  <a:srgbClr val="0066CC"/>
                 </a:solidFill>
                 <a:latin typeface="Calibri" pitchFamily="34" charset="0"/>
                 <a:ea typeface="Calibri" pitchFamily="34" charset="-122"/>
@@ -4773,7 +6241,7 @@
               </a:rPr>
               <a:t>7</a:t>
             </a:r>
-            <a:endParaRPr lang="en-US" sz="3800" dirty="0"/>
+            <a:endParaRPr lang="en-US" sz="3600" dirty="0"/>
           </a:p>
         </p:txBody>
       </p:sp>
@@ -4785,17 +6253,17 @@
         </p:nvSpPr>
         <p:spPr>
           <a:xfrm>
-            <a:off x="2606040" y="1783080"/>
-            <a:ext cx="1920240" cy="548640"/>
-          </a:xfrm>
-          <a:prstGeom prst="rect">
-            <a:avLst/>
-          </a:prstGeom>
-          <a:noFill/>
-          <a:ln/>
-        </p:spPr>
-        <p:txBody>
-          <a:bodyPr wrap="square" rtlCol="0" anchor="ctr"/>
+            <a:off x="2697480" y="1691640"/>
+            <a:ext cx="1920240" cy="502920"/>
+          </a:xfrm>
+          <a:prstGeom prst="rect">
+            <a:avLst/>
+          </a:prstGeom>
+          <a:noFill/>
+          <a:ln/>
+        </p:spPr>
+        <p:txBody>
+          <a:bodyPr wrap="square" rtlCol="0" anchor="t"/>
           <a:lstStyle/>
           <a:p>
             <a:pPr algn="ctr" indent="0" marL="0">
@@ -4804,7 +6272,7 @@
             <a:r>
               <a:rPr lang="en-US" sz="1100" dirty="0">
                 <a:solidFill>
-                  <a:srgbClr val="495670"/>
+                  <a:srgbClr val="718096"/>
                 </a:solidFill>
                 <a:latin typeface="Calibri" pitchFamily="34" charset="0"/>
                 <a:ea typeface="Calibri" pitchFamily="34" charset="-122"/>
@@ -4821,7 +6289,7 @@
             <a:r>
               <a:rPr lang="en-US" sz="1100" dirty="0">
                 <a:solidFill>
-                  <a:srgbClr val="495670"/>
+                  <a:srgbClr val="718096"/>
                 </a:solidFill>
                 <a:latin typeface="Calibri" pitchFamily="34" charset="0"/>
                 <a:ea typeface="Calibri" pitchFamily="34" charset="-122"/>
@@ -4841,20 +6309,22 @@
         </p:nvSpPr>
         <p:spPr>
           <a:xfrm>
-            <a:off x="4754880" y="1051560"/>
-            <a:ext cx="1920240" cy="1371600"/>
-          </a:xfrm>
-          <a:prstGeom prst="rect">
-            <a:avLst/>
+            <a:off x="4846320" y="1005840"/>
+            <a:ext cx="1920240" cy="1280160"/>
+          </a:xfrm>
+          <a:prstGeom prst="roundRect">
+            <a:avLst>
+              <a:gd name="adj" fmla="val 7143"/>
+            </a:avLst>
           </a:prstGeom>
           <a:solidFill>
             <a:srgbClr val="FFFFFF"/>
           </a:solidFill>
           <a:ln/>
           <a:effectLst>
-            <a:outerShdw sx="100000" sy="100000" kx="0" ky="0" algn="bl" rotWithShape="0" blurRad="101600" dist="38100" dir="8100000">
+            <a:outerShdw sx="100000" sy="100000" kx="0" ky="0" algn="bl" rotWithShape="0" blurRad="76200" dist="25400" dir="8100000">
               <a:srgbClr val="000000">
-                <a:alpha val="12000"/>
+                <a:alpha val="8000"/>
               </a:srgbClr>
             </a:outerShdw>
           </a:effectLst>
@@ -4868,8 +6338,8 @@
         </p:nvSpPr>
         <p:spPr>
           <a:xfrm>
-            <a:off x="4754880" y="1051560"/>
-            <a:ext cx="1920240" cy="777240"/>
+            <a:off x="4846320" y="1051560"/>
+            <a:ext cx="1920240" cy="640080"/>
           </a:xfrm>
           <a:prstGeom prst="rect">
             <a:avLst/>
@@ -4885,9 +6355,9 @@
               <a:buNone/>
             </a:pPr>
             <a:r>
-              <a:rPr lang="en-US" sz="3800" b="1" dirty="0">
-                <a:solidFill>
-                  <a:srgbClr val="F59E0B"/>
+              <a:rPr lang="en-US" sz="3600" b="1" dirty="0">
+                <a:solidFill>
+                  <a:srgbClr val="0066CC"/>
                 </a:solidFill>
                 <a:latin typeface="Calibri" pitchFamily="34" charset="0"/>
                 <a:ea typeface="Calibri" pitchFamily="34" charset="-122"/>
@@ -4895,7 +6365,7 @@
               </a:rPr>
               <a:t>30</a:t>
             </a:r>
-            <a:endParaRPr lang="en-US" sz="3800" dirty="0"/>
+            <a:endParaRPr lang="en-US" sz="3600" dirty="0"/>
           </a:p>
         </p:txBody>
       </p:sp>
@@ -4907,17 +6377,17 @@
         </p:nvSpPr>
         <p:spPr>
           <a:xfrm>
-            <a:off x="4754880" y="1783080"/>
-            <a:ext cx="1920240" cy="548640"/>
-          </a:xfrm>
-          <a:prstGeom prst="rect">
-            <a:avLst/>
-          </a:prstGeom>
-          <a:noFill/>
-          <a:ln/>
-        </p:spPr>
-        <p:txBody>
-          <a:bodyPr wrap="square" rtlCol="0" anchor="ctr"/>
+            <a:off x="4846320" y="1691640"/>
+            <a:ext cx="1920240" cy="502920"/>
+          </a:xfrm>
+          <a:prstGeom prst="rect">
+            <a:avLst/>
+          </a:prstGeom>
+          <a:noFill/>
+          <a:ln/>
+        </p:spPr>
+        <p:txBody>
+          <a:bodyPr wrap="square" rtlCol="0" anchor="t"/>
           <a:lstStyle/>
           <a:p>
             <a:pPr algn="ctr" indent="0" marL="0">
@@ -4926,7 +6396,7 @@
             <a:r>
               <a:rPr lang="en-US" sz="1100" dirty="0">
                 <a:solidFill>
-                  <a:srgbClr val="495670"/>
+                  <a:srgbClr val="718096"/>
                 </a:solidFill>
                 <a:latin typeface="Calibri" pitchFamily="34" charset="0"/>
                 <a:ea typeface="Calibri" pitchFamily="34" charset="-122"/>
@@ -4943,7 +6413,7 @@
             <a:r>
               <a:rPr lang="en-US" sz="1100" dirty="0">
                 <a:solidFill>
-                  <a:srgbClr val="495670"/>
+                  <a:srgbClr val="718096"/>
                 </a:solidFill>
                 <a:latin typeface="Calibri" pitchFamily="34" charset="0"/>
                 <a:ea typeface="Calibri" pitchFamily="34" charset="-122"/>
@@ -4963,20 +6433,22 @@
         </p:nvSpPr>
         <p:spPr>
           <a:xfrm>
-            <a:off x="6903720" y="1051560"/>
-            <a:ext cx="1920240" cy="1371600"/>
-          </a:xfrm>
-          <a:prstGeom prst="rect">
-            <a:avLst/>
+            <a:off x="6995160" y="1005840"/>
+            <a:ext cx="1920240" cy="1280160"/>
+          </a:xfrm>
+          <a:prstGeom prst="roundRect">
+            <a:avLst>
+              <a:gd name="adj" fmla="val 7143"/>
+            </a:avLst>
           </a:prstGeom>
           <a:solidFill>
             <a:srgbClr val="FFFFFF"/>
           </a:solidFill>
           <a:ln/>
           <a:effectLst>
-            <a:outerShdw sx="100000" sy="100000" kx="0" ky="0" algn="bl" rotWithShape="0" blurRad="101600" dist="38100" dir="8100000">
+            <a:outerShdw sx="100000" sy="100000" kx="0" ky="0" algn="bl" rotWithShape="0" blurRad="76200" dist="25400" dir="8100000">
               <a:srgbClr val="000000">
-                <a:alpha val="12000"/>
+                <a:alpha val="8000"/>
               </a:srgbClr>
             </a:outerShdw>
           </a:effectLst>
@@ -4990,8 +6462,8 @@
         </p:nvSpPr>
         <p:spPr>
           <a:xfrm>
-            <a:off x="6903720" y="1051560"/>
-            <a:ext cx="1920240" cy="777240"/>
+            <a:off x="6995160" y="1051560"/>
+            <a:ext cx="1920240" cy="640080"/>
           </a:xfrm>
           <a:prstGeom prst="rect">
             <a:avLst/>
@@ -5007,9 +6479,9 @@
               <a:buNone/>
             </a:pPr>
             <a:r>
-              <a:rPr lang="en-US" sz="3800" b="1" dirty="0">
-                <a:solidFill>
-                  <a:srgbClr val="6C63FF"/>
+              <a:rPr lang="en-US" sz="3600" b="1" dirty="0">
+                <a:solidFill>
+                  <a:srgbClr val="0066CC"/>
                 </a:solidFill>
                 <a:latin typeface="Calibri" pitchFamily="34" charset="0"/>
                 <a:ea typeface="Calibri" pitchFamily="34" charset="-122"/>
@@ -5017,7 +6489,7 @@
               </a:rPr>
               <a:t>4</a:t>
             </a:r>
-            <a:endParaRPr lang="en-US" sz="3800" dirty="0"/>
+            <a:endParaRPr lang="en-US" sz="3600" dirty="0"/>
           </a:p>
         </p:txBody>
       </p:sp>
@@ -5029,17 +6501,17 @@
         </p:nvSpPr>
         <p:spPr>
           <a:xfrm>
-            <a:off x="6903720" y="1783080"/>
-            <a:ext cx="1920240" cy="548640"/>
-          </a:xfrm>
-          <a:prstGeom prst="rect">
-            <a:avLst/>
-          </a:prstGeom>
-          <a:noFill/>
-          <a:ln/>
-        </p:spPr>
-        <p:txBody>
-          <a:bodyPr wrap="square" rtlCol="0" anchor="ctr"/>
+            <a:off x="6995160" y="1691640"/>
+            <a:ext cx="1920240" cy="502920"/>
+          </a:xfrm>
+          <a:prstGeom prst="rect">
+            <a:avLst/>
+          </a:prstGeom>
+          <a:noFill/>
+          <a:ln/>
+        </p:spPr>
+        <p:txBody>
+          <a:bodyPr wrap="square" rtlCol="0" anchor="t"/>
           <a:lstStyle/>
           <a:p>
             <a:pPr algn="ctr" indent="0" marL="0">
@@ -5048,7 +6520,7 @@
             <a:r>
               <a:rPr lang="en-US" sz="1100" dirty="0">
                 <a:solidFill>
-                  <a:srgbClr val="495670"/>
+                  <a:srgbClr val="718096"/>
                 </a:solidFill>
                 <a:latin typeface="Calibri" pitchFamily="34" charset="0"/>
                 <a:ea typeface="Calibri" pitchFamily="34" charset="-122"/>
@@ -5068,20 +6540,22 @@
         </p:nvSpPr>
         <p:spPr>
           <a:xfrm>
-            <a:off x="457200" y="2743200"/>
-            <a:ext cx="8229600" cy="1645920"/>
-          </a:xfrm>
-          <a:prstGeom prst="rect">
-            <a:avLst/>
+            <a:off x="548640" y="2560320"/>
+            <a:ext cx="8046720" cy="1920240"/>
+          </a:xfrm>
+          <a:prstGeom prst="roundRect">
+            <a:avLst>
+              <a:gd name="adj" fmla="val 5714"/>
+            </a:avLst>
           </a:prstGeom>
           <a:solidFill>
             <a:srgbClr val="FFFFFF"/>
           </a:solidFill>
           <a:ln/>
           <a:effectLst>
-            <a:outerShdw sx="100000" sy="100000" kx="0" ky="0" algn="bl" rotWithShape="0" blurRad="101600" dist="38100" dir="8100000">
+            <a:outerShdw sx="100000" sy="100000" kx="0" ky="0" algn="bl" rotWithShape="0" blurRad="76200" dist="25400" dir="8100000">
               <a:srgbClr val="000000">
-                <a:alpha val="12000"/>
+                <a:alpha val="8000"/>
               </a:srgbClr>
             </a:outerShdw>
           </a:effectLst>
@@ -5089,23 +6563,42 @@
       </p:sp>
       <p:sp>
         <p:nvSpPr>
-          <p:cNvPr id="17" name="Shape 15"/>
-          <p:cNvSpPr/>
-          <p:nvPr/>
-        </p:nvSpPr>
-        <p:spPr>
-          <a:xfrm>
-            <a:off x="457200" y="2743200"/>
-            <a:ext cx="73152" cy="1645920"/>
-          </a:xfrm>
-          <a:prstGeom prst="rect">
-            <a:avLst/>
-          </a:prstGeom>
-          <a:solidFill>
-            <a:srgbClr val="4A6CF7"/>
-          </a:solidFill>
-          <a:ln/>
-        </p:spPr>
+          <p:cNvPr id="17" name="Text 15"/>
+          <p:cNvSpPr/>
+          <p:nvPr/>
+        </p:nvSpPr>
+        <p:spPr>
+          <a:xfrm>
+            <a:off x="822960" y="2651760"/>
+            <a:ext cx="7315200" cy="365760"/>
+          </a:xfrm>
+          <a:prstGeom prst="rect">
+            <a:avLst/>
+          </a:prstGeom>
+          <a:noFill/>
+          <a:ln/>
+        </p:spPr>
+        <p:txBody>
+          <a:bodyPr wrap="square" rtlCol="0" anchor="ctr"/>
+          <a:lstStyle/>
+          <a:p>
+            <a:pPr indent="0" marL="0">
+              <a:buNone/>
+            </a:pPr>
+            <a:r>
+              <a:rPr lang="en-US" sz="1500" b="1" dirty="0">
+                <a:solidFill>
+                  <a:srgbClr val="1B2A4A"/>
+                </a:solidFill>
+                <a:latin typeface="Calibri" pitchFamily="34" charset="0"/>
+                <a:ea typeface="Calibri" pitchFamily="34" charset="-122"/>
+                <a:cs typeface="Calibri" pitchFamily="34" charset="-120"/>
+              </a:rPr>
+              <a:t>Deliverables</a:t>
+            </a:r>
+            <a:endParaRPr lang="en-US" sz="1500" dirty="0"/>
+          </a:p>
+        </p:txBody>
       </p:sp>
       <p:sp>
         <p:nvSpPr>
@@ -5115,47 +6608,8 @@
         </p:nvSpPr>
         <p:spPr>
           <a:xfrm>
-            <a:off x="731520" y="2788920"/>
-            <a:ext cx="7772400" cy="320040"/>
-          </a:xfrm>
-          <a:prstGeom prst="rect">
-            <a:avLst/>
-          </a:prstGeom>
-          <a:noFill/>
-          <a:ln/>
-        </p:spPr>
-        <p:txBody>
-          <a:bodyPr wrap="square" lIns="0" tIns="0" rIns="0" bIns="0" rtlCol="0" anchor="ctr"/>
-          <a:lstStyle/>
-          <a:p>
-            <a:pPr indent="0" marL="0">
-              <a:buNone/>
-            </a:pPr>
-            <a:r>
-              <a:rPr lang="en-US" sz="1400" b="1" dirty="0">
-                <a:solidFill>
-                  <a:srgbClr val="1E2761"/>
-                </a:solidFill>
-                <a:latin typeface="Calibri" pitchFamily="34" charset="0"/>
-                <a:ea typeface="Calibri" pitchFamily="34" charset="-122"/>
-                <a:cs typeface="Calibri" pitchFamily="34" charset="-120"/>
-              </a:rPr>
-              <a:t>Deliverables</a:t>
-            </a:r>
-            <a:endParaRPr lang="en-US" sz="1400" dirty="0"/>
-          </a:p>
-        </p:txBody>
-      </p:sp>
-      <p:sp>
-        <p:nvSpPr>
-          <p:cNvPr id="19" name="Text 17"/>
-          <p:cNvSpPr/>
-          <p:nvPr/>
-        </p:nvSpPr>
-        <p:spPr>
-          <a:xfrm>
-            <a:off x="731520" y="3108960"/>
-            <a:ext cx="7772400" cy="1188720"/>
+            <a:off x="822960" y="3017520"/>
+            <a:ext cx="7315200" cy="1280160"/>
           </a:xfrm>
           <a:prstGeom prst="rect">
             <a:avLst/>
@@ -5168,31 +6622,37 @@
           <a:lstStyle/>
           <a:p>
             <a:pPr marL="342900" indent="-342900">
+              <a:lnSpc>
+                <a:spcPct val="150000"/>
+              </a:lnSpc>
               <a:buSzPct val="100000"/>
               <a:buChar char="•"/>
             </a:pPr>
             <a:r>
               <a:rPr lang="en-US" sz="1200" dirty="0">
                 <a:solidFill>
-                  <a:srgbClr val="495670"/>
-                </a:solidFill>
-                <a:latin typeface="Calibri" pitchFamily="34" charset="0"/>
-                <a:ea typeface="Calibri" pitchFamily="34" charset="-122"/>
-                <a:cs typeface="Calibri" pitchFamily="34" charset="-120"/>
-              </a:rPr>
-              <a:t>Working full-stack web application (running with Docker)</a:t>
+                  <a:srgbClr val="2D3748"/>
+                </a:solidFill>
+                <a:latin typeface="Calibri" pitchFamily="34" charset="0"/>
+                <a:ea typeface="Calibri" pitchFamily="34" charset="-122"/>
+                <a:cs typeface="Calibri" pitchFamily="34" charset="-120"/>
+              </a:rPr>
+              <a:t>Working full-stack web application (Docker)</a:t>
             </a:r>
             <a:endParaRPr lang="en-US" sz="1200" dirty="0"/>
           </a:p>
           <a:p>
             <a:pPr marL="342900" indent="-342900">
+              <a:lnSpc>
+                <a:spcPct val="150000"/>
+              </a:lnSpc>
               <a:buSzPct val="100000"/>
               <a:buChar char="•"/>
             </a:pPr>
             <a:r>
               <a:rPr lang="en-US" sz="1200" dirty="0">
                 <a:solidFill>
-                  <a:srgbClr val="495670"/>
+                  <a:srgbClr val="2D3748"/>
                 </a:solidFill>
                 <a:latin typeface="Calibri" pitchFamily="34" charset="0"/>
                 <a:ea typeface="Calibri" pitchFamily="34" charset="-122"/>
@@ -5204,13 +6664,16 @@
           </a:p>
           <a:p>
             <a:pPr marL="342900" indent="-342900">
+              <a:lnSpc>
+                <a:spcPct val="150000"/>
+              </a:lnSpc>
               <a:buSzPct val="100000"/>
               <a:buChar char="•"/>
             </a:pPr>
             <a:r>
               <a:rPr lang="en-US" sz="1200" dirty="0">
                 <a:solidFill>
-                  <a:srgbClr val="495670"/>
+                  <a:srgbClr val="2D3748"/>
                 </a:solidFill>
                 <a:latin typeface="Calibri" pitchFamily="34" charset="0"/>
                 <a:ea typeface="Calibri" pitchFamily="34" charset="-122"/>
@@ -5222,13 +6685,16 @@
           </a:p>
           <a:p>
             <a:pPr marL="342900" indent="-342900">
+              <a:lnSpc>
+                <a:spcPct val="150000"/>
+              </a:lnSpc>
               <a:buSzPct val="100000"/>
               <a:buChar char="•"/>
             </a:pPr>
             <a:r>
               <a:rPr lang="en-US" sz="1200" dirty="0">
                 <a:solidFill>
-                  <a:srgbClr val="495670"/>
+                  <a:srgbClr val="2D3748"/>
                 </a:solidFill>
                 <a:latin typeface="Calibri" pitchFamily="34" charset="0"/>
                 <a:ea typeface="Calibri" pitchFamily="34" charset="-122"/>
@@ -5242,34 +6708,14 @@
       </p:sp>
       <p:sp>
         <p:nvSpPr>
-          <p:cNvPr id="20" name="Shape 18"/>
-          <p:cNvSpPr/>
-          <p:nvPr/>
-        </p:nvSpPr>
-        <p:spPr>
-          <a:xfrm>
-            <a:off x="0" y="4754880"/>
-            <a:ext cx="9144000" cy="388620"/>
-          </a:xfrm>
-          <a:prstGeom prst="rect">
-            <a:avLst/>
-          </a:prstGeom>
-          <a:solidFill>
-            <a:srgbClr val="1E2761"/>
-          </a:solidFill>
-          <a:ln/>
-        </p:spPr>
-      </p:sp>
-      <p:sp>
-        <p:nvSpPr>
-          <p:cNvPr id="21" name="Text 19"/>
-          <p:cNvSpPr/>
-          <p:nvPr/>
-        </p:nvSpPr>
-        <p:spPr>
-          <a:xfrm>
-            <a:off x="457200" y="4754880"/>
-            <a:ext cx="6400800" cy="388620"/>
+          <p:cNvPr id="19" name="Text 17"/>
+          <p:cNvSpPr/>
+          <p:nvPr/>
+        </p:nvSpPr>
+        <p:spPr>
+          <a:xfrm>
+            <a:off x="457200" y="4663440"/>
+            <a:ext cx="6400800" cy="365760"/>
           </a:xfrm>
           <a:prstGeom prst="rect">
             <a:avLst/>
@@ -5287,8 +6733,11 @@
             <a:r>
               <a:rPr lang="en-US" sz="900" dirty="0">
                 <a:solidFill>
-                  <a:srgbClr val="CADCFC"/>
-                </a:solidFill>
+                  <a:srgbClr val="718096"/>
+                </a:solidFill>
+                <a:latin typeface="Calibri" pitchFamily="34" charset="0"/>
+                <a:ea typeface="Calibri" pitchFamily="34" charset="-122"/>
+                <a:cs typeface="Calibri" pitchFamily="34" charset="-120"/>
               </a:rPr>
               <a:t>ProfAI – UYG338 Software Project Management</a:t>
             </a:r>
@@ -5298,14 +6747,14 @@
       </p:sp>
       <p:sp>
         <p:nvSpPr>
-          <p:cNvPr id="22" name="Text 20"/>
-          <p:cNvSpPr/>
-          <p:nvPr/>
-        </p:nvSpPr>
-        <p:spPr>
-          <a:xfrm>
-            <a:off x="7772400" y="4754880"/>
-            <a:ext cx="914400" cy="388620"/>
+          <p:cNvPr id="20" name="Text 18"/>
+          <p:cNvSpPr/>
+          <p:nvPr/>
+        </p:nvSpPr>
+        <p:spPr>
+          <a:xfrm>
+            <a:off x="7772400" y="4663440"/>
+            <a:ext cx="914400" cy="365760"/>
           </a:xfrm>
           <a:prstGeom prst="rect">
             <a:avLst/>
@@ -5323,10 +6772,13 @@
             <a:r>
               <a:rPr lang="en-US" sz="900" dirty="0">
                 <a:solidFill>
-                  <a:srgbClr val="CADCFC"/>
-                </a:solidFill>
-              </a:rPr>
-              <a:t>6/8</a:t>
+                  <a:srgbClr val="718096"/>
+                </a:solidFill>
+                <a:latin typeface="Calibri" pitchFamily="34" charset="0"/>
+                <a:ea typeface="Calibri" pitchFamily="34" charset="-122"/>
+                <a:cs typeface="Calibri" pitchFamily="34" charset="-120"/>
+              </a:rPr>
+              <a:t>6/9</a:t>
             </a:r>
             <a:endParaRPr lang="en-US" sz="900" dirty="0"/>
           </a:p>
@@ -5346,7 +6798,7 @@
     <p:bg>
       <p:bgPr>
         <a:solidFill>
-          <a:srgbClr val="F0F3FA"/>
+          <a:srgbClr val="F0F4F8"/>
         </a:solidFill>
       </p:bgPr>
     </p:bg>
@@ -5373,13 +6825,13 @@
         <p:spPr>
           <a:xfrm>
             <a:off x="0" y="0"/>
-            <a:ext cx="9144000" cy="822960"/>
+            <a:ext cx="9144000" cy="54864"/>
           </a:xfrm>
           <a:prstGeom prst="rect">
             <a:avLst/>
           </a:prstGeom>
           <a:solidFill>
-            <a:srgbClr val="1E2761"/>
+            <a:srgbClr val="00B4D8"/>
           </a:solidFill>
           <a:ln/>
         </p:spPr>
@@ -5392,26 +6844,26 @@
         </p:nvSpPr>
         <p:spPr>
           <a:xfrm>
-            <a:off x="548640" y="0"/>
-            <a:ext cx="8229600" cy="822960"/>
-          </a:xfrm>
-          <a:prstGeom prst="rect">
-            <a:avLst/>
-          </a:prstGeom>
-          <a:noFill/>
-          <a:ln/>
-        </p:spPr>
-        <p:txBody>
-          <a:bodyPr wrap="square" rtlCol="0" anchor="ctr"/>
+            <a:off x="548640" y="228600"/>
+            <a:ext cx="8229600" cy="548640"/>
+          </a:xfrm>
+          <a:prstGeom prst="rect">
+            <a:avLst/>
+          </a:prstGeom>
+          <a:noFill/>
+          <a:ln/>
+        </p:spPr>
+        <p:txBody>
+          <a:bodyPr wrap="square" lIns="0" tIns="0" rIns="0" bIns="0" rtlCol="0" anchor="ctr"/>
           <a:lstStyle/>
           <a:p>
             <a:pPr indent="0" marL="0">
               <a:buNone/>
             </a:pPr>
             <a:r>
-              <a:rPr lang="en-US" sz="2200" b="1" dirty="0">
-                <a:solidFill>
-                  <a:srgbClr val="FFFFFF"/>
+              <a:rPr lang="en-US" sz="2800" b="1" dirty="0">
+                <a:solidFill>
+                  <a:srgbClr val="1B2A4A"/>
                 </a:solidFill>
                 <a:latin typeface="Calibri" pitchFamily="34" charset="0"/>
                 <a:ea typeface="Calibri" pitchFamily="34" charset="-122"/>
@@ -5419,7 +6871,7 @@
               </a:rPr>
               <a:t>Live Demo Plan</a:t>
             </a:r>
-            <a:endParaRPr lang="en-US" sz="2200" dirty="0"/>
+            <a:endParaRPr lang="en-US" sz="2800" dirty="0"/>
           </a:p>
         </p:txBody>
       </p:sp>
@@ -5431,20 +6883,22 @@
         </p:nvSpPr>
         <p:spPr>
           <a:xfrm>
-            <a:off x="457200" y="1051560"/>
-            <a:ext cx="4023360" cy="1005840"/>
-          </a:xfrm>
-          <a:prstGeom prst="rect">
-            <a:avLst/>
+            <a:off x="548640" y="1005840"/>
+            <a:ext cx="3931920" cy="1051560"/>
+          </a:xfrm>
+          <a:prstGeom prst="roundRect">
+            <a:avLst>
+              <a:gd name="adj" fmla="val 8696"/>
+            </a:avLst>
           </a:prstGeom>
           <a:solidFill>
             <a:srgbClr val="FFFFFF"/>
           </a:solidFill>
           <a:ln/>
           <a:effectLst>
-            <a:outerShdw sx="100000" sy="100000" kx="0" ky="0" algn="bl" rotWithShape="0" blurRad="101600" dist="38100" dir="8100000">
+            <a:outerShdw sx="100000" sy="100000" kx="0" ky="0" algn="bl" rotWithShape="0" blurRad="76200" dist="12700" dir="8100000">
               <a:srgbClr val="000000">
-                <a:alpha val="12000"/>
+                <a:alpha val="6000"/>
               </a:srgbClr>
             </a:outerShdw>
           </a:effectLst>
@@ -5458,14 +6912,14 @@
         </p:nvSpPr>
         <p:spPr>
           <a:xfrm>
-            <a:off x="594360" y="1280160"/>
+            <a:off x="685800" y="1234440"/>
             <a:ext cx="548640" cy="548640"/>
           </a:xfrm>
           <a:prstGeom prst="ellipse">
             <a:avLst/>
           </a:prstGeom>
           <a:solidFill>
-            <a:srgbClr val="4A6CF7"/>
+            <a:srgbClr val="0066CC"/>
           </a:solidFill>
           <a:ln/>
         </p:spPr>
@@ -5478,7 +6932,7 @@
         </p:nvSpPr>
         <p:spPr>
           <a:xfrm>
-            <a:off x="594360" y="1280160"/>
+            <a:off x="685800" y="1234440"/>
             <a:ext cx="548640" cy="548640"/>
           </a:xfrm>
           <a:prstGeom prst="rect">
@@ -5517,8 +6971,8 @@
         </p:nvSpPr>
         <p:spPr>
           <a:xfrm>
-            <a:off x="1280160" y="1097280"/>
-            <a:ext cx="2286000" cy="365760"/>
+            <a:off x="1371600" y="1115568"/>
+            <a:ext cx="2377440" cy="320040"/>
           </a:xfrm>
           <a:prstGeom prst="rect">
             <a:avLst/>
@@ -5536,7 +6990,7 @@
             <a:r>
               <a:rPr lang="en-US" sz="1300" b="1" dirty="0">
                 <a:solidFill>
-                  <a:srgbClr val="1E2761"/>
+                  <a:srgbClr val="1B2A4A"/>
                 </a:solidFill>
                 <a:latin typeface="Calibri" pitchFamily="34" charset="0"/>
                 <a:ea typeface="Calibri" pitchFamily="34" charset="-122"/>
@@ -5556,8 +7010,8 @@
         </p:nvSpPr>
         <p:spPr>
           <a:xfrm>
-            <a:off x="3657600" y="1097280"/>
-            <a:ext cx="731520" cy="365760"/>
+            <a:off x="1371600" y="1417320"/>
+            <a:ext cx="2377440" cy="320040"/>
           </a:xfrm>
           <a:prstGeom prst="rect">
             <a:avLst/>
@@ -5569,13 +7023,74 @@
           <a:bodyPr wrap="square" lIns="0" tIns="0" rIns="0" bIns="0" rtlCol="0" anchor="ctr"/>
           <a:lstStyle/>
           <a:p>
-            <a:pPr algn="r" indent="0" marL="0">
-              <a:buNone/>
-            </a:pPr>
-            <a:r>
-              <a:rPr lang="en-US" sz="1100" b="1" dirty="0">
-                <a:solidFill>
-                  <a:srgbClr val="4A6CF7"/>
+            <a:pPr indent="0" marL="0">
+              <a:buNone/>
+            </a:pPr>
+            <a:r>
+              <a:rPr lang="en-US" sz="1000" dirty="0">
+                <a:solidFill>
+                  <a:srgbClr val="718096"/>
+                </a:solidFill>
+                <a:latin typeface="Calibri" pitchFamily="34" charset="0"/>
+                <a:ea typeface="Calibri" pitchFamily="34" charset="-122"/>
+                <a:cs typeface="Calibri" pitchFamily="34" charset="-120"/>
+              </a:rPr>
+              <a:t>Docker Compose with 3 containers</a:t>
+            </a:r>
+            <a:endParaRPr lang="en-US" sz="1000" dirty="0"/>
+          </a:p>
+        </p:txBody>
+      </p:sp>
+      <p:sp>
+        <p:nvSpPr>
+          <p:cNvPr id="9" name="Shape 7"/>
+          <p:cNvSpPr/>
+          <p:nvPr/>
+        </p:nvSpPr>
+        <p:spPr>
+          <a:xfrm>
+            <a:off x="3749040" y="1325880"/>
+            <a:ext cx="594360" cy="320040"/>
+          </a:xfrm>
+          <a:prstGeom prst="roundRect">
+            <a:avLst>
+              <a:gd name="adj" fmla="val 17143"/>
+            </a:avLst>
+          </a:prstGeom>
+          <a:solidFill>
+            <a:srgbClr val="E8F0FE"/>
+          </a:solidFill>
+          <a:ln/>
+        </p:spPr>
+      </p:sp>
+      <p:sp>
+        <p:nvSpPr>
+          <p:cNvPr id="10" name="Text 8"/>
+          <p:cNvSpPr/>
+          <p:nvPr/>
+        </p:nvSpPr>
+        <p:spPr>
+          <a:xfrm>
+            <a:off x="3749040" y="1325880"/>
+            <a:ext cx="594360" cy="320040"/>
+          </a:xfrm>
+          <a:prstGeom prst="rect">
+            <a:avLst/>
+          </a:prstGeom>
+          <a:noFill/>
+          <a:ln/>
+        </p:spPr>
+        <p:txBody>
+          <a:bodyPr wrap="square" rtlCol="0" anchor="ctr"/>
+          <a:lstStyle/>
+          <a:p>
+            <a:pPr algn="ctr" indent="0" marL="0">
+              <a:buNone/>
+            </a:pPr>
+            <a:r>
+              <a:rPr lang="en-US" sz="900" b="1" dirty="0">
+                <a:solidFill>
+                  <a:srgbClr val="0066CC"/>
                 </a:solidFill>
                 <a:latin typeface="Calibri" pitchFamily="34" charset="0"/>
                 <a:ea typeface="Calibri" pitchFamily="34" charset="-122"/>
@@ -5583,71 +7098,34 @@
               </a:rPr>
               <a:t>2 min</a:t>
             </a:r>
-            <a:endParaRPr lang="en-US" sz="1100" dirty="0"/>
-          </a:p>
-        </p:txBody>
-      </p:sp>
-      <p:sp>
-        <p:nvSpPr>
-          <p:cNvPr id="9" name="Text 7"/>
-          <p:cNvSpPr/>
-          <p:nvPr/>
-        </p:nvSpPr>
-        <p:spPr>
-          <a:xfrm>
-            <a:off x="1280160" y="1508760"/>
-            <a:ext cx="3017520" cy="457200"/>
-          </a:xfrm>
-          <a:prstGeom prst="rect">
-            <a:avLst/>
-          </a:prstGeom>
-          <a:noFill/>
-          <a:ln/>
-        </p:spPr>
-        <p:txBody>
-          <a:bodyPr wrap="square" lIns="0" tIns="0" rIns="0" bIns="0" rtlCol="0" anchor="ctr"/>
-          <a:lstStyle/>
-          <a:p>
-            <a:pPr indent="0" marL="0">
-              <a:buNone/>
-            </a:pPr>
-            <a:r>
-              <a:rPr lang="en-US" sz="1100" dirty="0">
-                <a:solidFill>
-                  <a:srgbClr val="495670"/>
-                </a:solidFill>
-                <a:latin typeface="Calibri" pitchFamily="34" charset="0"/>
-                <a:ea typeface="Calibri" pitchFamily="34" charset="-122"/>
-                <a:cs typeface="Calibri" pitchFamily="34" charset="-120"/>
-              </a:rPr>
-              <a:t>Docker Compose with 3 containers</a:t>
-            </a:r>
-            <a:endParaRPr lang="en-US" sz="1100" dirty="0"/>
-          </a:p>
-        </p:txBody>
-      </p:sp>
-      <p:sp>
-        <p:nvSpPr>
-          <p:cNvPr id="10" name="Shape 8"/>
-          <p:cNvSpPr/>
-          <p:nvPr/>
-        </p:nvSpPr>
-        <p:spPr>
-          <a:xfrm>
-            <a:off x="4754880" y="1051560"/>
-            <a:ext cx="4023360" cy="1005840"/>
-          </a:xfrm>
-          <a:prstGeom prst="rect">
-            <a:avLst/>
+            <a:endParaRPr lang="en-US" sz="900" dirty="0"/>
+          </a:p>
+        </p:txBody>
+      </p:sp>
+      <p:sp>
+        <p:nvSpPr>
+          <p:cNvPr id="11" name="Shape 9"/>
+          <p:cNvSpPr/>
+          <p:nvPr/>
+        </p:nvSpPr>
+        <p:spPr>
+          <a:xfrm>
+            <a:off x="548640" y="2240280"/>
+            <a:ext cx="3931920" cy="1051560"/>
+          </a:xfrm>
+          <a:prstGeom prst="roundRect">
+            <a:avLst>
+              <a:gd name="adj" fmla="val 8696"/>
+            </a:avLst>
           </a:prstGeom>
           <a:solidFill>
             <a:srgbClr val="FFFFFF"/>
           </a:solidFill>
           <a:ln/>
           <a:effectLst>
-            <a:outerShdw sx="100000" sy="100000" kx="0" ky="0" algn="bl" rotWithShape="0" blurRad="101600" dist="38100" dir="8100000">
+            <a:outerShdw sx="100000" sy="100000" kx="0" ky="0" algn="bl" rotWithShape="0" blurRad="76200" dist="12700" dir="8100000">
               <a:srgbClr val="000000">
-                <a:alpha val="12000"/>
+                <a:alpha val="6000"/>
               </a:srgbClr>
             </a:outerShdw>
           </a:effectLst>
@@ -5655,33 +7133,33 @@
       </p:sp>
       <p:sp>
         <p:nvSpPr>
-          <p:cNvPr id="11" name="Shape 9"/>
-          <p:cNvSpPr/>
-          <p:nvPr/>
-        </p:nvSpPr>
-        <p:spPr>
-          <a:xfrm>
-            <a:off x="4892040" y="1280160"/>
+          <p:cNvPr id="12" name="Shape 10"/>
+          <p:cNvSpPr/>
+          <p:nvPr/>
+        </p:nvSpPr>
+        <p:spPr>
+          <a:xfrm>
+            <a:off x="685800" y="2468880"/>
             <a:ext cx="548640" cy="548640"/>
           </a:xfrm>
           <a:prstGeom prst="ellipse">
             <a:avLst/>
           </a:prstGeom>
           <a:solidFill>
-            <a:srgbClr val="4A6CF7"/>
+            <a:srgbClr val="0066CC"/>
           </a:solidFill>
           <a:ln/>
         </p:spPr>
       </p:sp>
       <p:sp>
         <p:nvSpPr>
-          <p:cNvPr id="12" name="Text 10"/>
-          <p:cNvSpPr/>
-          <p:nvPr/>
-        </p:nvSpPr>
-        <p:spPr>
-          <a:xfrm>
-            <a:off x="4892040" y="1280160"/>
+          <p:cNvPr id="13" name="Text 11"/>
+          <p:cNvSpPr/>
+          <p:nvPr/>
+        </p:nvSpPr>
+        <p:spPr>
+          <a:xfrm>
+            <a:off x="685800" y="2468880"/>
             <a:ext cx="548640" cy="548640"/>
           </a:xfrm>
           <a:prstGeom prst="rect">
@@ -5714,14 +7192,14 @@
       </p:sp>
       <p:sp>
         <p:nvSpPr>
-          <p:cNvPr id="13" name="Text 11"/>
-          <p:cNvSpPr/>
-          <p:nvPr/>
-        </p:nvSpPr>
-        <p:spPr>
-          <a:xfrm>
-            <a:off x="5577840" y="1097280"/>
-            <a:ext cx="2286000" cy="365760"/>
+          <p:cNvPr id="14" name="Text 12"/>
+          <p:cNvSpPr/>
+          <p:nvPr/>
+        </p:nvSpPr>
+        <p:spPr>
+          <a:xfrm>
+            <a:off x="1371600" y="2350008"/>
+            <a:ext cx="2377440" cy="320040"/>
           </a:xfrm>
           <a:prstGeom prst="rect">
             <a:avLst/>
@@ -5739,7 +7217,7 @@
             <a:r>
               <a:rPr lang="en-US" sz="1300" b="1" dirty="0">
                 <a:solidFill>
-                  <a:srgbClr val="1E2761"/>
+                  <a:srgbClr val="1B2A4A"/>
                 </a:solidFill>
                 <a:latin typeface="Calibri" pitchFamily="34" charset="0"/>
                 <a:ea typeface="Calibri" pitchFamily="34" charset="-122"/>
@@ -5753,14 +7231,14 @@
       </p:sp>
       <p:sp>
         <p:nvSpPr>
-          <p:cNvPr id="14" name="Text 12"/>
-          <p:cNvSpPr/>
-          <p:nvPr/>
-        </p:nvSpPr>
-        <p:spPr>
-          <a:xfrm>
-            <a:off x="7955280" y="1097280"/>
-            <a:ext cx="731520" cy="365760"/>
+          <p:cNvPr id="15" name="Text 13"/>
+          <p:cNvSpPr/>
+          <p:nvPr/>
+        </p:nvSpPr>
+        <p:spPr>
+          <a:xfrm>
+            <a:off x="1371600" y="2651760"/>
+            <a:ext cx="2377440" cy="320040"/>
           </a:xfrm>
           <a:prstGeom prst="rect">
             <a:avLst/>
@@ -5772,13 +7250,74 @@
           <a:bodyPr wrap="square" lIns="0" tIns="0" rIns="0" bIns="0" rtlCol="0" anchor="ctr"/>
           <a:lstStyle/>
           <a:p>
-            <a:pPr algn="r" indent="0" marL="0">
-              <a:buNone/>
-            </a:pPr>
-            <a:r>
-              <a:rPr lang="en-US" sz="1100" b="1" dirty="0">
-                <a:solidFill>
-                  <a:srgbClr val="4A6CF7"/>
+            <a:pPr indent="0" marL="0">
+              <a:buNone/>
+            </a:pPr>
+            <a:r>
+              <a:rPr lang="en-US" sz="1000" dirty="0">
+                <a:solidFill>
+                  <a:srgbClr val="718096"/>
+                </a:solidFill>
+                <a:latin typeface="Calibri" pitchFamily="34" charset="0"/>
+                <a:ea typeface="Calibri" pitchFamily="34" charset="-122"/>
+                <a:cs typeface="Calibri" pitchFamily="34" charset="-120"/>
+              </a:rPr>
+              <a:t>Create user, JWT authentication</a:t>
+            </a:r>
+            <a:endParaRPr lang="en-US" sz="1000" dirty="0"/>
+          </a:p>
+        </p:txBody>
+      </p:sp>
+      <p:sp>
+        <p:nvSpPr>
+          <p:cNvPr id="16" name="Shape 14"/>
+          <p:cNvSpPr/>
+          <p:nvPr/>
+        </p:nvSpPr>
+        <p:spPr>
+          <a:xfrm>
+            <a:off x="3749040" y="2560320"/>
+            <a:ext cx="594360" cy="320040"/>
+          </a:xfrm>
+          <a:prstGeom prst="roundRect">
+            <a:avLst>
+              <a:gd name="adj" fmla="val 17143"/>
+            </a:avLst>
+          </a:prstGeom>
+          <a:solidFill>
+            <a:srgbClr val="E8F0FE"/>
+          </a:solidFill>
+          <a:ln/>
+        </p:spPr>
+      </p:sp>
+      <p:sp>
+        <p:nvSpPr>
+          <p:cNvPr id="17" name="Text 15"/>
+          <p:cNvSpPr/>
+          <p:nvPr/>
+        </p:nvSpPr>
+        <p:spPr>
+          <a:xfrm>
+            <a:off x="3749040" y="2560320"/>
+            <a:ext cx="594360" cy="320040"/>
+          </a:xfrm>
+          <a:prstGeom prst="rect">
+            <a:avLst/>
+          </a:prstGeom>
+          <a:noFill/>
+          <a:ln/>
+        </p:spPr>
+        <p:txBody>
+          <a:bodyPr wrap="square" rtlCol="0" anchor="ctr"/>
+          <a:lstStyle/>
+          <a:p>
+            <a:pPr algn="ctr" indent="0" marL="0">
+              <a:buNone/>
+            </a:pPr>
+            <a:r>
+              <a:rPr lang="en-US" sz="900" b="1" dirty="0">
+                <a:solidFill>
+                  <a:srgbClr val="0066CC"/>
                 </a:solidFill>
                 <a:latin typeface="Calibri" pitchFamily="34" charset="0"/>
                 <a:ea typeface="Calibri" pitchFamily="34" charset="-122"/>
@@ -5786,71 +7325,34 @@
               </a:rPr>
               <a:t>2 min</a:t>
             </a:r>
-            <a:endParaRPr lang="en-US" sz="1100" dirty="0"/>
-          </a:p>
-        </p:txBody>
-      </p:sp>
-      <p:sp>
-        <p:nvSpPr>
-          <p:cNvPr id="15" name="Text 13"/>
-          <p:cNvSpPr/>
-          <p:nvPr/>
-        </p:nvSpPr>
-        <p:spPr>
-          <a:xfrm>
-            <a:off x="5577840" y="1508760"/>
-            <a:ext cx="3017520" cy="457200"/>
-          </a:xfrm>
-          <a:prstGeom prst="rect">
-            <a:avLst/>
-          </a:prstGeom>
-          <a:noFill/>
-          <a:ln/>
-        </p:spPr>
-        <p:txBody>
-          <a:bodyPr wrap="square" lIns="0" tIns="0" rIns="0" bIns="0" rtlCol="0" anchor="ctr"/>
-          <a:lstStyle/>
-          <a:p>
-            <a:pPr indent="0" marL="0">
-              <a:buNone/>
-            </a:pPr>
-            <a:r>
-              <a:rPr lang="en-US" sz="1100" dirty="0">
-                <a:solidFill>
-                  <a:srgbClr val="495670"/>
-                </a:solidFill>
-                <a:latin typeface="Calibri" pitchFamily="34" charset="0"/>
-                <a:ea typeface="Calibri" pitchFamily="34" charset="-122"/>
-                <a:cs typeface="Calibri" pitchFamily="34" charset="-120"/>
-              </a:rPr>
-              <a:t>Create user, JWT authentication</a:t>
-            </a:r>
-            <a:endParaRPr lang="en-US" sz="1100" dirty="0"/>
-          </a:p>
-        </p:txBody>
-      </p:sp>
-      <p:sp>
-        <p:nvSpPr>
-          <p:cNvPr id="16" name="Shape 14"/>
-          <p:cNvSpPr/>
-          <p:nvPr/>
-        </p:nvSpPr>
-        <p:spPr>
-          <a:xfrm>
-            <a:off x="457200" y="2240280"/>
-            <a:ext cx="4023360" cy="1005840"/>
-          </a:xfrm>
-          <a:prstGeom prst="rect">
-            <a:avLst/>
+            <a:endParaRPr lang="en-US" sz="900" dirty="0"/>
+          </a:p>
+        </p:txBody>
+      </p:sp>
+      <p:sp>
+        <p:nvSpPr>
+          <p:cNvPr id="18" name="Shape 16"/>
+          <p:cNvSpPr/>
+          <p:nvPr/>
+        </p:nvSpPr>
+        <p:spPr>
+          <a:xfrm>
+            <a:off x="548640" y="3474720"/>
+            <a:ext cx="3931920" cy="1051560"/>
+          </a:xfrm>
+          <a:prstGeom prst="roundRect">
+            <a:avLst>
+              <a:gd name="adj" fmla="val 8696"/>
+            </a:avLst>
           </a:prstGeom>
           <a:solidFill>
             <a:srgbClr val="FFFFFF"/>
           </a:solidFill>
           <a:ln/>
           <a:effectLst>
-            <a:outerShdw sx="100000" sy="100000" kx="0" ky="0" algn="bl" rotWithShape="0" blurRad="101600" dist="38100" dir="8100000">
+            <a:outerShdw sx="100000" sy="100000" kx="0" ky="0" algn="bl" rotWithShape="0" blurRad="76200" dist="12700" dir="8100000">
               <a:srgbClr val="000000">
-                <a:alpha val="12000"/>
+                <a:alpha val="6000"/>
               </a:srgbClr>
             </a:outerShdw>
           </a:effectLst>
@@ -5858,33 +7360,33 @@
       </p:sp>
       <p:sp>
         <p:nvSpPr>
-          <p:cNvPr id="17" name="Shape 15"/>
-          <p:cNvSpPr/>
-          <p:nvPr/>
-        </p:nvSpPr>
-        <p:spPr>
-          <a:xfrm>
-            <a:off x="594360" y="2468880"/>
+          <p:cNvPr id="19" name="Shape 17"/>
+          <p:cNvSpPr/>
+          <p:nvPr/>
+        </p:nvSpPr>
+        <p:spPr>
+          <a:xfrm>
+            <a:off x="685800" y="3703320"/>
             <a:ext cx="548640" cy="548640"/>
           </a:xfrm>
           <a:prstGeom prst="ellipse">
             <a:avLst/>
           </a:prstGeom>
           <a:solidFill>
-            <a:srgbClr val="4A6CF7"/>
+            <a:srgbClr val="0066CC"/>
           </a:solidFill>
           <a:ln/>
         </p:spPr>
       </p:sp>
       <p:sp>
         <p:nvSpPr>
-          <p:cNvPr id="18" name="Text 16"/>
-          <p:cNvSpPr/>
-          <p:nvPr/>
-        </p:nvSpPr>
-        <p:spPr>
-          <a:xfrm>
-            <a:off x="594360" y="2468880"/>
+          <p:cNvPr id="20" name="Text 18"/>
+          <p:cNvSpPr/>
+          <p:nvPr/>
+        </p:nvSpPr>
+        <p:spPr>
+          <a:xfrm>
+            <a:off x="685800" y="3703320"/>
             <a:ext cx="548640" cy="548640"/>
           </a:xfrm>
           <a:prstGeom prst="rect">
@@ -5917,14 +7419,14 @@
       </p:sp>
       <p:sp>
         <p:nvSpPr>
-          <p:cNvPr id="19" name="Text 17"/>
-          <p:cNvSpPr/>
-          <p:nvPr/>
-        </p:nvSpPr>
-        <p:spPr>
-          <a:xfrm>
-            <a:off x="1280160" y="2286000"/>
-            <a:ext cx="2286000" cy="365760"/>
+          <p:cNvPr id="21" name="Text 19"/>
+          <p:cNvSpPr/>
+          <p:nvPr/>
+        </p:nvSpPr>
+        <p:spPr>
+          <a:xfrm>
+            <a:off x="1371600" y="3584448"/>
+            <a:ext cx="2377440" cy="320040"/>
           </a:xfrm>
           <a:prstGeom prst="rect">
             <a:avLst/>
@@ -5942,7 +7444,7 @@
             <a:r>
               <a:rPr lang="en-US" sz="1300" b="1" dirty="0">
                 <a:solidFill>
-                  <a:srgbClr val="1E2761"/>
+                  <a:srgbClr val="1B2A4A"/>
                 </a:solidFill>
                 <a:latin typeface="Calibri" pitchFamily="34" charset="0"/>
                 <a:ea typeface="Calibri" pitchFamily="34" charset="-122"/>
@@ -5956,14 +7458,14 @@
       </p:sp>
       <p:sp>
         <p:nvSpPr>
-          <p:cNvPr id="20" name="Text 18"/>
-          <p:cNvSpPr/>
-          <p:nvPr/>
-        </p:nvSpPr>
-        <p:spPr>
-          <a:xfrm>
-            <a:off x="3657600" y="2286000"/>
-            <a:ext cx="731520" cy="365760"/>
+          <p:cNvPr id="22" name="Text 20"/>
+          <p:cNvSpPr/>
+          <p:nvPr/>
+        </p:nvSpPr>
+        <p:spPr>
+          <a:xfrm>
+            <a:off x="1371600" y="3886200"/>
+            <a:ext cx="2377440" cy="320040"/>
           </a:xfrm>
           <a:prstGeom prst="rect">
             <a:avLst/>
@@ -5975,13 +7477,74 @@
           <a:bodyPr wrap="square" lIns="0" tIns="0" rIns="0" bIns="0" rtlCol="0" anchor="ctr"/>
           <a:lstStyle/>
           <a:p>
-            <a:pPr algn="r" indent="0" marL="0">
-              <a:buNone/>
-            </a:pPr>
-            <a:r>
-              <a:rPr lang="en-US" sz="1100" b="1" dirty="0">
-                <a:solidFill>
-                  <a:srgbClr val="4A6CF7"/>
+            <a:pPr indent="0" marL="0">
+              <a:buNone/>
+            </a:pPr>
+            <a:r>
+              <a:rPr lang="en-US" sz="1000" dirty="0">
+                <a:solidFill>
+                  <a:srgbClr val="718096"/>
+                </a:solidFill>
+                <a:latin typeface="Calibri" pitchFamily="34" charset="0"/>
+                <a:ea typeface="Calibri" pitchFamily="34" charset="-122"/>
+                <a:cs typeface="Calibri" pitchFamily="34" charset="-120"/>
+              </a:rPr>
+              <a:t>Search, filter, detail page</a:t>
+            </a:r>
+            <a:endParaRPr lang="en-US" sz="1000" dirty="0"/>
+          </a:p>
+        </p:txBody>
+      </p:sp>
+      <p:sp>
+        <p:nvSpPr>
+          <p:cNvPr id="23" name="Shape 21"/>
+          <p:cNvSpPr/>
+          <p:nvPr/>
+        </p:nvSpPr>
+        <p:spPr>
+          <a:xfrm>
+            <a:off x="3749040" y="3794760"/>
+            <a:ext cx="594360" cy="320040"/>
+          </a:xfrm>
+          <a:prstGeom prst="roundRect">
+            <a:avLst>
+              <a:gd name="adj" fmla="val 17143"/>
+            </a:avLst>
+          </a:prstGeom>
+          <a:solidFill>
+            <a:srgbClr val="E8F0FE"/>
+          </a:solidFill>
+          <a:ln/>
+        </p:spPr>
+      </p:sp>
+      <p:sp>
+        <p:nvSpPr>
+          <p:cNvPr id="24" name="Text 22"/>
+          <p:cNvSpPr/>
+          <p:nvPr/>
+        </p:nvSpPr>
+        <p:spPr>
+          <a:xfrm>
+            <a:off x="3749040" y="3794760"/>
+            <a:ext cx="594360" cy="320040"/>
+          </a:xfrm>
+          <a:prstGeom prst="rect">
+            <a:avLst/>
+          </a:prstGeom>
+          <a:noFill/>
+          <a:ln/>
+        </p:spPr>
+        <p:txBody>
+          <a:bodyPr wrap="square" rtlCol="0" anchor="ctr"/>
+          <a:lstStyle/>
+          <a:p>
+            <a:pPr algn="ctr" indent="0" marL="0">
+              <a:buNone/>
+            </a:pPr>
+            <a:r>
+              <a:rPr lang="en-US" sz="900" b="1" dirty="0">
+                <a:solidFill>
+                  <a:srgbClr val="0066CC"/>
                 </a:solidFill>
                 <a:latin typeface="Calibri" pitchFamily="34" charset="0"/>
                 <a:ea typeface="Calibri" pitchFamily="34" charset="-122"/>
@@ -5989,71 +7552,34 @@
               </a:rPr>
               <a:t>3 min</a:t>
             </a:r>
-            <a:endParaRPr lang="en-US" sz="1100" dirty="0"/>
-          </a:p>
-        </p:txBody>
-      </p:sp>
-      <p:sp>
-        <p:nvSpPr>
-          <p:cNvPr id="21" name="Text 19"/>
-          <p:cNvSpPr/>
-          <p:nvPr/>
-        </p:nvSpPr>
-        <p:spPr>
-          <a:xfrm>
-            <a:off x="1280160" y="2697480"/>
-            <a:ext cx="3017520" cy="457200"/>
-          </a:xfrm>
-          <a:prstGeom prst="rect">
-            <a:avLst/>
-          </a:prstGeom>
-          <a:noFill/>
-          <a:ln/>
-        </p:spPr>
-        <p:txBody>
-          <a:bodyPr wrap="square" lIns="0" tIns="0" rIns="0" bIns="0" rtlCol="0" anchor="ctr"/>
-          <a:lstStyle/>
-          <a:p>
-            <a:pPr indent="0" marL="0">
-              <a:buNone/>
-            </a:pPr>
-            <a:r>
-              <a:rPr lang="en-US" sz="1100" dirty="0">
-                <a:solidFill>
-                  <a:srgbClr val="495670"/>
-                </a:solidFill>
-                <a:latin typeface="Calibri" pitchFamily="34" charset="0"/>
-                <a:ea typeface="Calibri" pitchFamily="34" charset="-122"/>
-                <a:cs typeface="Calibri" pitchFamily="34" charset="-120"/>
-              </a:rPr>
-              <a:t>Search, filter, detail page</a:t>
-            </a:r>
-            <a:endParaRPr lang="en-US" sz="1100" dirty="0"/>
-          </a:p>
-        </p:txBody>
-      </p:sp>
-      <p:sp>
-        <p:nvSpPr>
-          <p:cNvPr id="22" name="Shape 20"/>
-          <p:cNvSpPr/>
-          <p:nvPr/>
-        </p:nvSpPr>
-        <p:spPr>
-          <a:xfrm>
-            <a:off x="4754880" y="2240280"/>
-            <a:ext cx="4023360" cy="1005840"/>
-          </a:xfrm>
-          <a:prstGeom prst="rect">
-            <a:avLst/>
+            <a:endParaRPr lang="en-US" sz="900" dirty="0"/>
+          </a:p>
+        </p:txBody>
+      </p:sp>
+      <p:sp>
+        <p:nvSpPr>
+          <p:cNvPr id="25" name="Shape 23"/>
+          <p:cNvSpPr/>
+          <p:nvPr/>
+        </p:nvSpPr>
+        <p:spPr>
+          <a:xfrm>
+            <a:off x="4754880" y="1005840"/>
+            <a:ext cx="3931920" cy="1051560"/>
+          </a:xfrm>
+          <a:prstGeom prst="roundRect">
+            <a:avLst>
+              <a:gd name="adj" fmla="val 8696"/>
+            </a:avLst>
           </a:prstGeom>
           <a:solidFill>
             <a:srgbClr val="FFFFFF"/>
           </a:solidFill>
           <a:ln/>
           <a:effectLst>
-            <a:outerShdw sx="100000" sy="100000" kx="0" ky="0" algn="bl" rotWithShape="0" blurRad="101600" dist="38100" dir="8100000">
+            <a:outerShdw sx="100000" sy="100000" kx="0" ky="0" algn="bl" rotWithShape="0" blurRad="76200" dist="12700" dir="8100000">
               <a:srgbClr val="000000">
-                <a:alpha val="12000"/>
+                <a:alpha val="6000"/>
               </a:srgbClr>
             </a:outerShdw>
           </a:effectLst>
@@ -6061,33 +7587,33 @@
       </p:sp>
       <p:sp>
         <p:nvSpPr>
-          <p:cNvPr id="23" name="Shape 21"/>
-          <p:cNvSpPr/>
-          <p:nvPr/>
-        </p:nvSpPr>
-        <p:spPr>
-          <a:xfrm>
-            <a:off x="4892040" y="2468880"/>
+          <p:cNvPr id="26" name="Shape 24"/>
+          <p:cNvSpPr/>
+          <p:nvPr/>
+        </p:nvSpPr>
+        <p:spPr>
+          <a:xfrm>
+            <a:off x="4892040" y="1234440"/>
             <a:ext cx="548640" cy="548640"/>
           </a:xfrm>
           <a:prstGeom prst="ellipse">
             <a:avLst/>
           </a:prstGeom>
           <a:solidFill>
-            <a:srgbClr val="4A6CF7"/>
+            <a:srgbClr val="0066CC"/>
           </a:solidFill>
           <a:ln/>
         </p:spPr>
       </p:sp>
       <p:sp>
         <p:nvSpPr>
-          <p:cNvPr id="24" name="Text 22"/>
-          <p:cNvSpPr/>
-          <p:nvPr/>
-        </p:nvSpPr>
-        <p:spPr>
-          <a:xfrm>
-            <a:off x="4892040" y="2468880"/>
+          <p:cNvPr id="27" name="Text 25"/>
+          <p:cNvSpPr/>
+          <p:nvPr/>
+        </p:nvSpPr>
+        <p:spPr>
+          <a:xfrm>
+            <a:off x="4892040" y="1234440"/>
             <a:ext cx="548640" cy="548640"/>
           </a:xfrm>
           <a:prstGeom prst="rect">
@@ -6120,14 +7646,14 @@
       </p:sp>
       <p:sp>
         <p:nvSpPr>
-          <p:cNvPr id="25" name="Text 23"/>
-          <p:cNvSpPr/>
-          <p:nvPr/>
-        </p:nvSpPr>
-        <p:spPr>
-          <a:xfrm>
-            <a:off x="5577840" y="2286000"/>
-            <a:ext cx="2286000" cy="365760"/>
+          <p:cNvPr id="28" name="Text 26"/>
+          <p:cNvSpPr/>
+          <p:nvPr/>
+        </p:nvSpPr>
+        <p:spPr>
+          <a:xfrm>
+            <a:off x="5577840" y="1115568"/>
+            <a:ext cx="2377440" cy="320040"/>
           </a:xfrm>
           <a:prstGeom prst="rect">
             <a:avLst/>
@@ -6145,7 +7671,7 @@
             <a:r>
               <a:rPr lang="en-US" sz="1300" b="1" dirty="0">
                 <a:solidFill>
-                  <a:srgbClr val="1E2761"/>
+                  <a:srgbClr val="1B2A4A"/>
                 </a:solidFill>
                 <a:latin typeface="Calibri" pitchFamily="34" charset="0"/>
                 <a:ea typeface="Calibri" pitchFamily="34" charset="-122"/>
@@ -6159,14 +7685,14 @@
       </p:sp>
       <p:sp>
         <p:nvSpPr>
-          <p:cNvPr id="26" name="Text 24"/>
-          <p:cNvSpPr/>
-          <p:nvPr/>
-        </p:nvSpPr>
-        <p:spPr>
-          <a:xfrm>
-            <a:off x="7955280" y="2286000"/>
-            <a:ext cx="731520" cy="365760"/>
+          <p:cNvPr id="29" name="Text 27"/>
+          <p:cNvSpPr/>
+          <p:nvPr/>
+        </p:nvSpPr>
+        <p:spPr>
+          <a:xfrm>
+            <a:off x="5577840" y="1417320"/>
+            <a:ext cx="2377440" cy="320040"/>
           </a:xfrm>
           <a:prstGeom prst="rect">
             <a:avLst/>
@@ -6178,13 +7704,74 @@
           <a:bodyPr wrap="square" lIns="0" tIns="0" rIns="0" bIns="0" rtlCol="0" anchor="ctr"/>
           <a:lstStyle/>
           <a:p>
-            <a:pPr algn="r" indent="0" marL="0">
-              <a:buNone/>
-            </a:pPr>
-            <a:r>
-              <a:rPr lang="en-US" sz="1100" b="1" dirty="0">
-                <a:solidFill>
-                  <a:srgbClr val="4A6CF7"/>
+            <a:pPr indent="0" marL="0">
+              <a:buNone/>
+            </a:pPr>
+            <a:r>
+              <a:rPr lang="en-US" sz="1000" dirty="0">
+                <a:solidFill>
+                  <a:srgbClr val="718096"/>
+                </a:solidFill>
+                <a:latin typeface="Calibri" pitchFamily="34" charset="0"/>
+                <a:ea typeface="Calibri" pitchFamily="34" charset="-122"/>
+                <a:cs typeface="Calibri" pitchFamily="34" charset="-120"/>
+              </a:rPr>
+              <a:t>PDF/JPG file upload</a:t>
+            </a:r>
+            <a:endParaRPr lang="en-US" sz="1000" dirty="0"/>
+          </a:p>
+        </p:txBody>
+      </p:sp>
+      <p:sp>
+        <p:nvSpPr>
+          <p:cNvPr id="30" name="Shape 28"/>
+          <p:cNvSpPr/>
+          <p:nvPr/>
+        </p:nvSpPr>
+        <p:spPr>
+          <a:xfrm>
+            <a:off x="7955280" y="1325880"/>
+            <a:ext cx="594360" cy="320040"/>
+          </a:xfrm>
+          <a:prstGeom prst="roundRect">
+            <a:avLst>
+              <a:gd name="adj" fmla="val 17143"/>
+            </a:avLst>
+          </a:prstGeom>
+          <a:solidFill>
+            <a:srgbClr val="E8F0FE"/>
+          </a:solidFill>
+          <a:ln/>
+        </p:spPr>
+      </p:sp>
+      <p:sp>
+        <p:nvSpPr>
+          <p:cNvPr id="31" name="Text 29"/>
+          <p:cNvSpPr/>
+          <p:nvPr/>
+        </p:nvSpPr>
+        <p:spPr>
+          <a:xfrm>
+            <a:off x="7955280" y="1325880"/>
+            <a:ext cx="594360" cy="320040"/>
+          </a:xfrm>
+          <a:prstGeom prst="rect">
+            <a:avLst/>
+          </a:prstGeom>
+          <a:noFill/>
+          <a:ln/>
+        </p:spPr>
+        <p:txBody>
+          <a:bodyPr wrap="square" rtlCol="0" anchor="ctr"/>
+          <a:lstStyle/>
+          <a:p>
+            <a:pPr algn="ctr" indent="0" marL="0">
+              <a:buNone/>
+            </a:pPr>
+            <a:r>
+              <a:rPr lang="en-US" sz="900" b="1" dirty="0">
+                <a:solidFill>
+                  <a:srgbClr val="0066CC"/>
                 </a:solidFill>
                 <a:latin typeface="Calibri" pitchFamily="34" charset="0"/>
                 <a:ea typeface="Calibri" pitchFamily="34" charset="-122"/>
@@ -6192,71 +7779,34 @@
               </a:rPr>
               <a:t>2 min</a:t>
             </a:r>
-            <a:endParaRPr lang="en-US" sz="1100" dirty="0"/>
-          </a:p>
-        </p:txBody>
-      </p:sp>
-      <p:sp>
-        <p:nvSpPr>
-          <p:cNvPr id="27" name="Text 25"/>
-          <p:cNvSpPr/>
-          <p:nvPr/>
-        </p:nvSpPr>
-        <p:spPr>
-          <a:xfrm>
-            <a:off x="5577840" y="2697480"/>
-            <a:ext cx="3017520" cy="457200"/>
-          </a:xfrm>
-          <a:prstGeom prst="rect">
-            <a:avLst/>
-          </a:prstGeom>
-          <a:noFill/>
-          <a:ln/>
-        </p:spPr>
-        <p:txBody>
-          <a:bodyPr wrap="square" lIns="0" tIns="0" rIns="0" bIns="0" rtlCol="0" anchor="ctr"/>
-          <a:lstStyle/>
-          <a:p>
-            <a:pPr indent="0" marL="0">
-              <a:buNone/>
-            </a:pPr>
-            <a:r>
-              <a:rPr lang="en-US" sz="1100" dirty="0">
-                <a:solidFill>
-                  <a:srgbClr val="495670"/>
-                </a:solidFill>
-                <a:latin typeface="Calibri" pitchFamily="34" charset="0"/>
-                <a:ea typeface="Calibri" pitchFamily="34" charset="-122"/>
-                <a:cs typeface="Calibri" pitchFamily="34" charset="-120"/>
-              </a:rPr>
-              <a:t>PDF/JPG file upload</a:t>
-            </a:r>
-            <a:endParaRPr lang="en-US" sz="1100" dirty="0"/>
-          </a:p>
-        </p:txBody>
-      </p:sp>
-      <p:sp>
-        <p:nvSpPr>
-          <p:cNvPr id="28" name="Shape 26"/>
-          <p:cNvSpPr/>
-          <p:nvPr/>
-        </p:nvSpPr>
-        <p:spPr>
-          <a:xfrm>
-            <a:off x="457200" y="3429000"/>
-            <a:ext cx="4023360" cy="1005840"/>
-          </a:xfrm>
-          <a:prstGeom prst="rect">
-            <a:avLst/>
+            <a:endParaRPr lang="en-US" sz="900" dirty="0"/>
+          </a:p>
+        </p:txBody>
+      </p:sp>
+      <p:sp>
+        <p:nvSpPr>
+          <p:cNvPr id="32" name="Shape 30"/>
+          <p:cNvSpPr/>
+          <p:nvPr/>
+        </p:nvSpPr>
+        <p:spPr>
+          <a:xfrm>
+            <a:off x="4754880" y="2240280"/>
+            <a:ext cx="3931920" cy="1051560"/>
+          </a:xfrm>
+          <a:prstGeom prst="roundRect">
+            <a:avLst>
+              <a:gd name="adj" fmla="val 8696"/>
+            </a:avLst>
           </a:prstGeom>
           <a:solidFill>
             <a:srgbClr val="FFFFFF"/>
           </a:solidFill>
           <a:ln/>
           <a:effectLst>
-            <a:outerShdw sx="100000" sy="100000" kx="0" ky="0" algn="bl" rotWithShape="0" blurRad="101600" dist="38100" dir="8100000">
+            <a:outerShdw sx="100000" sy="100000" kx="0" ky="0" algn="bl" rotWithShape="0" blurRad="76200" dist="12700" dir="8100000">
               <a:srgbClr val="000000">
-                <a:alpha val="12000"/>
+                <a:alpha val="6000"/>
               </a:srgbClr>
             </a:outerShdw>
           </a:effectLst>
@@ -6264,33 +7814,33 @@
       </p:sp>
       <p:sp>
         <p:nvSpPr>
-          <p:cNvPr id="29" name="Shape 27"/>
-          <p:cNvSpPr/>
-          <p:nvPr/>
-        </p:nvSpPr>
-        <p:spPr>
-          <a:xfrm>
-            <a:off x="594360" y="3657600"/>
+          <p:cNvPr id="33" name="Shape 31"/>
+          <p:cNvSpPr/>
+          <p:nvPr/>
+        </p:nvSpPr>
+        <p:spPr>
+          <a:xfrm>
+            <a:off x="4892040" y="2468880"/>
             <a:ext cx="548640" cy="548640"/>
           </a:xfrm>
           <a:prstGeom prst="ellipse">
             <a:avLst/>
           </a:prstGeom>
           <a:solidFill>
-            <a:srgbClr val="4A6CF7"/>
+            <a:srgbClr val="0066CC"/>
           </a:solidFill>
           <a:ln/>
         </p:spPr>
       </p:sp>
       <p:sp>
         <p:nvSpPr>
-          <p:cNvPr id="30" name="Text 28"/>
-          <p:cNvSpPr/>
-          <p:nvPr/>
-        </p:nvSpPr>
-        <p:spPr>
-          <a:xfrm>
-            <a:off x="594360" y="3657600"/>
+          <p:cNvPr id="34" name="Text 32"/>
+          <p:cNvSpPr/>
+          <p:nvPr/>
+        </p:nvSpPr>
+        <p:spPr>
+          <a:xfrm>
+            <a:off x="4892040" y="2468880"/>
             <a:ext cx="548640" cy="548640"/>
           </a:xfrm>
           <a:prstGeom prst="rect">
@@ -6323,14 +7873,14 @@
       </p:sp>
       <p:sp>
         <p:nvSpPr>
-          <p:cNvPr id="31" name="Text 29"/>
-          <p:cNvSpPr/>
-          <p:nvPr/>
-        </p:nvSpPr>
-        <p:spPr>
-          <a:xfrm>
-            <a:off x="1280160" y="3474720"/>
-            <a:ext cx="2286000" cy="365760"/>
+          <p:cNvPr id="35" name="Text 33"/>
+          <p:cNvSpPr/>
+          <p:nvPr/>
+        </p:nvSpPr>
+        <p:spPr>
+          <a:xfrm>
+            <a:off x="5577840" y="2350008"/>
+            <a:ext cx="2377440" cy="320040"/>
           </a:xfrm>
           <a:prstGeom prst="rect">
             <a:avLst/>
@@ -6348,7 +7898,7 @@
             <a:r>
               <a:rPr lang="en-US" sz="1300" b="1" dirty="0">
                 <a:solidFill>
-                  <a:srgbClr val="1E2761"/>
+                  <a:srgbClr val="1B2A4A"/>
                 </a:solidFill>
                 <a:latin typeface="Calibri" pitchFamily="34" charset="0"/>
                 <a:ea typeface="Calibri" pitchFamily="34" charset="-122"/>
@@ -6362,14 +7912,14 @@
       </p:sp>
       <p:sp>
         <p:nvSpPr>
-          <p:cNvPr id="32" name="Text 30"/>
-          <p:cNvSpPr/>
-          <p:nvPr/>
-        </p:nvSpPr>
-        <p:spPr>
-          <a:xfrm>
-            <a:off x="3657600" y="3474720"/>
-            <a:ext cx="731520" cy="365760"/>
+          <p:cNvPr id="36" name="Text 34"/>
+          <p:cNvSpPr/>
+          <p:nvPr/>
+        </p:nvSpPr>
+        <p:spPr>
+          <a:xfrm>
+            <a:off x="5577840" y="2651760"/>
+            <a:ext cx="2377440" cy="320040"/>
           </a:xfrm>
           <a:prstGeom prst="rect">
             <a:avLst/>
@@ -6381,13 +7931,74 @@
           <a:bodyPr wrap="square" lIns="0" tIns="0" rIns="0" bIns="0" rtlCol="0" anchor="ctr"/>
           <a:lstStyle/>
           <a:p>
-            <a:pPr algn="r" indent="0" marL="0">
-              <a:buNone/>
-            </a:pPr>
-            <a:r>
-              <a:rPr lang="en-US" sz="1100" b="1" dirty="0">
-                <a:solidFill>
-                  <a:srgbClr val="4A6CF7"/>
+            <a:pPr indent="0" marL="0">
+              <a:buNone/>
+            </a:pPr>
+            <a:r>
+              <a:rPr lang="en-US" sz="1000" dirty="0">
+                <a:solidFill>
+                  <a:srgbClr val="718096"/>
+                </a:solidFill>
+                <a:latin typeface="Calibri" pitchFamily="34" charset="0"/>
+                <a:ea typeface="Calibri" pitchFamily="34" charset="-122"/>
+                <a:cs typeface="Calibri" pitchFamily="34" charset="-120"/>
+              </a:rPr>
+              <a:t>Pie chart, bar chart, difficulty score</a:t>
+            </a:r>
+            <a:endParaRPr lang="en-US" sz="1000" dirty="0"/>
+          </a:p>
+        </p:txBody>
+      </p:sp>
+      <p:sp>
+        <p:nvSpPr>
+          <p:cNvPr id="37" name="Shape 35"/>
+          <p:cNvSpPr/>
+          <p:nvPr/>
+        </p:nvSpPr>
+        <p:spPr>
+          <a:xfrm>
+            <a:off x="7955280" y="2560320"/>
+            <a:ext cx="594360" cy="320040"/>
+          </a:xfrm>
+          <a:prstGeom prst="roundRect">
+            <a:avLst>
+              <a:gd name="adj" fmla="val 17143"/>
+            </a:avLst>
+          </a:prstGeom>
+          <a:solidFill>
+            <a:srgbClr val="E8F0FE"/>
+          </a:solidFill>
+          <a:ln/>
+        </p:spPr>
+      </p:sp>
+      <p:sp>
+        <p:nvSpPr>
+          <p:cNvPr id="38" name="Text 36"/>
+          <p:cNvSpPr/>
+          <p:nvPr/>
+        </p:nvSpPr>
+        <p:spPr>
+          <a:xfrm>
+            <a:off x="7955280" y="2560320"/>
+            <a:ext cx="594360" cy="320040"/>
+          </a:xfrm>
+          <a:prstGeom prst="rect">
+            <a:avLst/>
+          </a:prstGeom>
+          <a:noFill/>
+          <a:ln/>
+        </p:spPr>
+        <p:txBody>
+          <a:bodyPr wrap="square" rtlCol="0" anchor="ctr"/>
+          <a:lstStyle/>
+          <a:p>
+            <a:pPr algn="ctr" indent="0" marL="0">
+              <a:buNone/>
+            </a:pPr>
+            <a:r>
+              <a:rPr lang="en-US" sz="900" b="1" dirty="0">
+                <a:solidFill>
+                  <a:srgbClr val="0066CC"/>
                 </a:solidFill>
                 <a:latin typeface="Calibri" pitchFamily="34" charset="0"/>
                 <a:ea typeface="Calibri" pitchFamily="34" charset="-122"/>
@@ -6395,71 +8006,34 @@
               </a:rPr>
               <a:t>3 min</a:t>
             </a:r>
-            <a:endParaRPr lang="en-US" sz="1100" dirty="0"/>
-          </a:p>
-        </p:txBody>
-      </p:sp>
-      <p:sp>
-        <p:nvSpPr>
-          <p:cNvPr id="33" name="Text 31"/>
-          <p:cNvSpPr/>
-          <p:nvPr/>
-        </p:nvSpPr>
-        <p:spPr>
-          <a:xfrm>
-            <a:off x="1280160" y="3886200"/>
-            <a:ext cx="3017520" cy="457200"/>
-          </a:xfrm>
-          <a:prstGeom prst="rect">
-            <a:avLst/>
-          </a:prstGeom>
-          <a:noFill/>
-          <a:ln/>
-        </p:spPr>
-        <p:txBody>
-          <a:bodyPr wrap="square" lIns="0" tIns="0" rIns="0" bIns="0" rtlCol="0" anchor="ctr"/>
-          <a:lstStyle/>
-          <a:p>
-            <a:pPr indent="0" marL="0">
-              <a:buNone/>
-            </a:pPr>
-            <a:r>
-              <a:rPr lang="en-US" sz="1100" dirty="0">
-                <a:solidFill>
-                  <a:srgbClr val="495670"/>
-                </a:solidFill>
-                <a:latin typeface="Calibri" pitchFamily="34" charset="0"/>
-                <a:ea typeface="Calibri" pitchFamily="34" charset="-122"/>
-                <a:cs typeface="Calibri" pitchFamily="34" charset="-120"/>
-              </a:rPr>
-              <a:t>Pie chart, bar chart, difficulty score</a:t>
-            </a:r>
-            <a:endParaRPr lang="en-US" sz="1100" dirty="0"/>
-          </a:p>
-        </p:txBody>
-      </p:sp>
-      <p:sp>
-        <p:nvSpPr>
-          <p:cNvPr id="34" name="Shape 32"/>
-          <p:cNvSpPr/>
-          <p:nvPr/>
-        </p:nvSpPr>
-        <p:spPr>
-          <a:xfrm>
-            <a:off x="4754880" y="3429000"/>
-            <a:ext cx="4023360" cy="1005840"/>
-          </a:xfrm>
-          <a:prstGeom prst="rect">
-            <a:avLst/>
+            <a:endParaRPr lang="en-US" sz="900" dirty="0"/>
+          </a:p>
+        </p:txBody>
+      </p:sp>
+      <p:sp>
+        <p:nvSpPr>
+          <p:cNvPr id="39" name="Shape 37"/>
+          <p:cNvSpPr/>
+          <p:nvPr/>
+        </p:nvSpPr>
+        <p:spPr>
+          <a:xfrm>
+            <a:off x="4754880" y="3474720"/>
+            <a:ext cx="3931920" cy="1051560"/>
+          </a:xfrm>
+          <a:prstGeom prst="roundRect">
+            <a:avLst>
+              <a:gd name="adj" fmla="val 8696"/>
+            </a:avLst>
           </a:prstGeom>
           <a:solidFill>
             <a:srgbClr val="FFFFFF"/>
           </a:solidFill>
           <a:ln/>
           <a:effectLst>
-            <a:outerShdw sx="100000" sy="100000" kx="0" ky="0" algn="bl" rotWithShape="0" blurRad="101600" dist="38100" dir="8100000">
+            <a:outerShdw sx="100000" sy="100000" kx="0" ky="0" algn="bl" rotWithShape="0" blurRad="76200" dist="12700" dir="8100000">
               <a:srgbClr val="000000">
-                <a:alpha val="12000"/>
+                <a:alpha val="6000"/>
               </a:srgbClr>
             </a:outerShdw>
           </a:effectLst>
@@ -6467,33 +8041,33 @@
       </p:sp>
       <p:sp>
         <p:nvSpPr>
-          <p:cNvPr id="35" name="Shape 33"/>
-          <p:cNvSpPr/>
-          <p:nvPr/>
-        </p:nvSpPr>
-        <p:spPr>
-          <a:xfrm>
-            <a:off x="4892040" y="3657600"/>
+          <p:cNvPr id="40" name="Shape 38"/>
+          <p:cNvSpPr/>
+          <p:nvPr/>
+        </p:nvSpPr>
+        <p:spPr>
+          <a:xfrm>
+            <a:off x="4892040" y="3703320"/>
             <a:ext cx="548640" cy="548640"/>
           </a:xfrm>
           <a:prstGeom prst="ellipse">
             <a:avLst/>
           </a:prstGeom>
           <a:solidFill>
-            <a:srgbClr val="4A6CF7"/>
+            <a:srgbClr val="0066CC"/>
           </a:solidFill>
           <a:ln/>
         </p:spPr>
       </p:sp>
       <p:sp>
         <p:nvSpPr>
-          <p:cNvPr id="36" name="Text 34"/>
-          <p:cNvSpPr/>
-          <p:nvPr/>
-        </p:nvSpPr>
-        <p:spPr>
-          <a:xfrm>
-            <a:off x="4892040" y="3657600"/>
+          <p:cNvPr id="41" name="Text 39"/>
+          <p:cNvSpPr/>
+          <p:nvPr/>
+        </p:nvSpPr>
+        <p:spPr>
+          <a:xfrm>
+            <a:off x="4892040" y="3703320"/>
             <a:ext cx="548640" cy="548640"/>
           </a:xfrm>
           <a:prstGeom prst="rect">
@@ -6526,14 +8100,14 @@
       </p:sp>
       <p:sp>
         <p:nvSpPr>
-          <p:cNvPr id="37" name="Text 35"/>
-          <p:cNvSpPr/>
-          <p:nvPr/>
-        </p:nvSpPr>
-        <p:spPr>
-          <a:xfrm>
-            <a:off x="5577840" y="3474720"/>
-            <a:ext cx="2286000" cy="365760"/>
+          <p:cNvPr id="42" name="Text 40"/>
+          <p:cNvSpPr/>
+          <p:nvPr/>
+        </p:nvSpPr>
+        <p:spPr>
+          <a:xfrm>
+            <a:off x="5577840" y="3584448"/>
+            <a:ext cx="2377440" cy="320040"/>
           </a:xfrm>
           <a:prstGeom prst="rect">
             <a:avLst/>
@@ -6551,7 +8125,7 @@
             <a:r>
               <a:rPr lang="en-US" sz="1300" b="1" dirty="0">
                 <a:solidFill>
-                  <a:srgbClr val="1E2761"/>
+                  <a:srgbClr val="1B2A4A"/>
                 </a:solidFill>
                 <a:latin typeface="Calibri" pitchFamily="34" charset="0"/>
                 <a:ea typeface="Calibri" pitchFamily="34" charset="-122"/>
@@ -6565,14 +8139,14 @@
       </p:sp>
       <p:sp>
         <p:nvSpPr>
-          <p:cNvPr id="38" name="Text 36"/>
-          <p:cNvSpPr/>
-          <p:nvPr/>
-        </p:nvSpPr>
-        <p:spPr>
-          <a:xfrm>
-            <a:off x="7955280" y="3474720"/>
-            <a:ext cx="731520" cy="365760"/>
+          <p:cNvPr id="43" name="Text 41"/>
+          <p:cNvSpPr/>
+          <p:nvPr/>
+        </p:nvSpPr>
+        <p:spPr>
+          <a:xfrm>
+            <a:off x="5577840" y="3886200"/>
+            <a:ext cx="2377440" cy="320040"/>
           </a:xfrm>
           <a:prstGeom prst="rect">
             <a:avLst/>
@@ -6584,150 +8158,158 @@
           <a:bodyPr wrap="square" lIns="0" tIns="0" rIns="0" bIns="0" rtlCol="0" anchor="ctr"/>
           <a:lstStyle/>
           <a:p>
+            <a:pPr indent="0" marL="0">
+              <a:buNone/>
+            </a:pPr>
+            <a:r>
+              <a:rPr lang="en-US" sz="1000" dirty="0">
+                <a:solidFill>
+                  <a:srgbClr val="718096"/>
+                </a:solidFill>
+                <a:latin typeface="Calibri" pitchFamily="34" charset="0"/>
+                <a:ea typeface="Calibri" pitchFamily="34" charset="-122"/>
+                <a:cs typeface="Calibri" pitchFamily="34" charset="-120"/>
+              </a:rPr>
+              <a:t>Repo structure, Actions, sprint board</a:t>
+            </a:r>
+            <a:endParaRPr lang="en-US" sz="1000" dirty="0"/>
+          </a:p>
+        </p:txBody>
+      </p:sp>
+      <p:sp>
+        <p:nvSpPr>
+          <p:cNvPr id="44" name="Shape 42"/>
+          <p:cNvSpPr/>
+          <p:nvPr/>
+        </p:nvSpPr>
+        <p:spPr>
+          <a:xfrm>
+            <a:off x="7955280" y="3794760"/>
+            <a:ext cx="594360" cy="320040"/>
+          </a:xfrm>
+          <a:prstGeom prst="roundRect">
+            <a:avLst>
+              <a:gd name="adj" fmla="val 17143"/>
+            </a:avLst>
+          </a:prstGeom>
+          <a:solidFill>
+            <a:srgbClr val="E8F0FE"/>
+          </a:solidFill>
+          <a:ln/>
+        </p:spPr>
+      </p:sp>
+      <p:sp>
+        <p:nvSpPr>
+          <p:cNvPr id="45" name="Text 43"/>
+          <p:cNvSpPr/>
+          <p:nvPr/>
+        </p:nvSpPr>
+        <p:spPr>
+          <a:xfrm>
+            <a:off x="7955280" y="3794760"/>
+            <a:ext cx="594360" cy="320040"/>
+          </a:xfrm>
+          <a:prstGeom prst="rect">
+            <a:avLst/>
+          </a:prstGeom>
+          <a:noFill/>
+          <a:ln/>
+        </p:spPr>
+        <p:txBody>
+          <a:bodyPr wrap="square" rtlCol="0" anchor="ctr"/>
+          <a:lstStyle/>
+          <a:p>
+            <a:pPr algn="ctr" indent="0" marL="0">
+              <a:buNone/>
+            </a:pPr>
+            <a:r>
+              <a:rPr lang="en-US" sz="900" b="1" dirty="0">
+                <a:solidFill>
+                  <a:srgbClr val="0066CC"/>
+                </a:solidFill>
+                <a:latin typeface="Calibri" pitchFamily="34" charset="0"/>
+                <a:ea typeface="Calibri" pitchFamily="34" charset="-122"/>
+                <a:cs typeface="Calibri" pitchFamily="34" charset="-120"/>
+              </a:rPr>
+              <a:t>3 min</a:t>
+            </a:r>
+            <a:endParaRPr lang="en-US" sz="900" dirty="0"/>
+          </a:p>
+        </p:txBody>
+      </p:sp>
+      <p:sp>
+        <p:nvSpPr>
+          <p:cNvPr id="46" name="Text 44"/>
+          <p:cNvSpPr/>
+          <p:nvPr/>
+        </p:nvSpPr>
+        <p:spPr>
+          <a:xfrm>
+            <a:off x="457200" y="4663440"/>
+            <a:ext cx="6400800" cy="365760"/>
+          </a:xfrm>
+          <a:prstGeom prst="rect">
+            <a:avLst/>
+          </a:prstGeom>
+          <a:noFill/>
+          <a:ln/>
+        </p:spPr>
+        <p:txBody>
+          <a:bodyPr wrap="square" rtlCol="0" anchor="ctr"/>
+          <a:lstStyle/>
+          <a:p>
+            <a:pPr indent="0" marL="0">
+              <a:buNone/>
+            </a:pPr>
+            <a:r>
+              <a:rPr lang="en-US" sz="900" dirty="0">
+                <a:solidFill>
+                  <a:srgbClr val="718096"/>
+                </a:solidFill>
+                <a:latin typeface="Calibri" pitchFamily="34" charset="0"/>
+                <a:ea typeface="Calibri" pitchFamily="34" charset="-122"/>
+                <a:cs typeface="Calibri" pitchFamily="34" charset="-120"/>
+              </a:rPr>
+              <a:t>ProfAI – UYG338 Software Project Management</a:t>
+            </a:r>
+            <a:endParaRPr lang="en-US" sz="900" dirty="0"/>
+          </a:p>
+        </p:txBody>
+      </p:sp>
+      <p:sp>
+        <p:nvSpPr>
+          <p:cNvPr id="47" name="Text 45"/>
+          <p:cNvSpPr/>
+          <p:nvPr/>
+        </p:nvSpPr>
+        <p:spPr>
+          <a:xfrm>
+            <a:off x="7772400" y="4663440"/>
+            <a:ext cx="914400" cy="365760"/>
+          </a:xfrm>
+          <a:prstGeom prst="rect">
+            <a:avLst/>
+          </a:prstGeom>
+          <a:noFill/>
+          <a:ln/>
+        </p:spPr>
+        <p:txBody>
+          <a:bodyPr wrap="square" rtlCol="0" anchor="ctr"/>
+          <a:lstStyle/>
+          <a:p>
             <a:pPr algn="r" indent="0" marL="0">
               <a:buNone/>
             </a:pPr>
             <a:r>
-              <a:rPr lang="en-US" sz="1100" b="1" dirty="0">
-                <a:solidFill>
-                  <a:srgbClr val="4A6CF7"/>
-                </a:solidFill>
-                <a:latin typeface="Calibri" pitchFamily="34" charset="0"/>
-                <a:ea typeface="Calibri" pitchFamily="34" charset="-122"/>
-                <a:cs typeface="Calibri" pitchFamily="34" charset="-120"/>
-              </a:rPr>
-              <a:t>3 min</a:t>
-            </a:r>
-            <a:endParaRPr lang="en-US" sz="1100" dirty="0"/>
-          </a:p>
-        </p:txBody>
-      </p:sp>
-      <p:sp>
-        <p:nvSpPr>
-          <p:cNvPr id="39" name="Text 37"/>
-          <p:cNvSpPr/>
-          <p:nvPr/>
-        </p:nvSpPr>
-        <p:spPr>
-          <a:xfrm>
-            <a:off x="5577840" y="3886200"/>
-            <a:ext cx="3017520" cy="457200"/>
-          </a:xfrm>
-          <a:prstGeom prst="rect">
-            <a:avLst/>
-          </a:prstGeom>
-          <a:noFill/>
-          <a:ln/>
-        </p:spPr>
-        <p:txBody>
-          <a:bodyPr wrap="square" lIns="0" tIns="0" rIns="0" bIns="0" rtlCol="0" anchor="ctr"/>
-          <a:lstStyle/>
-          <a:p>
-            <a:pPr indent="0" marL="0">
-              <a:buNone/>
-            </a:pPr>
-            <a:r>
-              <a:rPr lang="en-US" sz="1100" dirty="0">
-                <a:solidFill>
-                  <a:srgbClr val="495670"/>
-                </a:solidFill>
-                <a:latin typeface="Calibri" pitchFamily="34" charset="0"/>
-                <a:ea typeface="Calibri" pitchFamily="34" charset="-122"/>
-                <a:cs typeface="Calibri" pitchFamily="34" charset="-120"/>
-              </a:rPr>
-              <a:t>Repo structure, Actions, sprint board</a:t>
-            </a:r>
-            <a:endParaRPr lang="en-US" sz="1100" dirty="0"/>
-          </a:p>
-        </p:txBody>
-      </p:sp>
-      <p:sp>
-        <p:nvSpPr>
-          <p:cNvPr id="40" name="Shape 38"/>
-          <p:cNvSpPr/>
-          <p:nvPr/>
-        </p:nvSpPr>
-        <p:spPr>
-          <a:xfrm>
-            <a:off x="0" y="4754880"/>
-            <a:ext cx="9144000" cy="388620"/>
-          </a:xfrm>
-          <a:prstGeom prst="rect">
-            <a:avLst/>
-          </a:prstGeom>
-          <a:solidFill>
-            <a:srgbClr val="1E2761"/>
-          </a:solidFill>
-          <a:ln/>
-        </p:spPr>
-      </p:sp>
-      <p:sp>
-        <p:nvSpPr>
-          <p:cNvPr id="41" name="Text 39"/>
-          <p:cNvSpPr/>
-          <p:nvPr/>
-        </p:nvSpPr>
-        <p:spPr>
-          <a:xfrm>
-            <a:off x="457200" y="4754880"/>
-            <a:ext cx="6400800" cy="388620"/>
-          </a:xfrm>
-          <a:prstGeom prst="rect">
-            <a:avLst/>
-          </a:prstGeom>
-          <a:noFill/>
-          <a:ln/>
-        </p:spPr>
-        <p:txBody>
-          <a:bodyPr wrap="square" rtlCol="0" anchor="ctr"/>
-          <a:lstStyle/>
-          <a:p>
-            <a:pPr indent="0" marL="0">
-              <a:buNone/>
-            </a:pPr>
-            <a:r>
               <a:rPr lang="en-US" sz="900" dirty="0">
                 <a:solidFill>
-                  <a:srgbClr val="CADCFC"/>
-                </a:solidFill>
-              </a:rPr>
-              <a:t>ProfAI – UYG338 Software Project Management</a:t>
-            </a:r>
-            <a:endParaRPr lang="en-US" sz="900" dirty="0"/>
-          </a:p>
-        </p:txBody>
-      </p:sp>
-      <p:sp>
-        <p:nvSpPr>
-          <p:cNvPr id="42" name="Text 40"/>
-          <p:cNvSpPr/>
-          <p:nvPr/>
-        </p:nvSpPr>
-        <p:spPr>
-          <a:xfrm>
-            <a:off x="7772400" y="4754880"/>
-            <a:ext cx="914400" cy="388620"/>
-          </a:xfrm>
-          <a:prstGeom prst="rect">
-            <a:avLst/>
-          </a:prstGeom>
-          <a:noFill/>
-          <a:ln/>
-        </p:spPr>
-        <p:txBody>
-          <a:bodyPr wrap="square" rtlCol="0" anchor="ctr"/>
-          <a:lstStyle/>
-          <a:p>
-            <a:pPr algn="r" indent="0" marL="0">
-              <a:buNone/>
-            </a:pPr>
-            <a:r>
-              <a:rPr lang="en-US" sz="900" dirty="0">
-                <a:solidFill>
-                  <a:srgbClr val="CADCFC"/>
-                </a:solidFill>
-              </a:rPr>
-              <a:t>7/8</a:t>
+                  <a:srgbClr val="718096"/>
+                </a:solidFill>
+                <a:latin typeface="Calibri" pitchFamily="34" charset="0"/>
+                <a:ea typeface="Calibri" pitchFamily="34" charset="-122"/>
+                <a:cs typeface="Calibri" pitchFamily="34" charset="-120"/>
+              </a:rPr>
+              <a:t>7/9</a:t>
             </a:r>
             <a:endParaRPr lang="en-US" sz="900" dirty="0"/>
           </a:p>
@@ -6747,7 +8329,7 @@
     <p:bg>
       <p:bgPr>
         <a:solidFill>
-          <a:srgbClr val="1E2761"/>
+          <a:srgbClr val="F0F4F8"/>
         </a:solidFill>
       </p:bgPr>
     </p:bg>
@@ -6774,36 +8356,514 @@
         <p:spPr>
           <a:xfrm>
             <a:off x="0" y="0"/>
-            <a:ext cx="137160" cy="5143500"/>
+            <a:ext cx="9144000" cy="54864"/>
           </a:xfrm>
           <a:prstGeom prst="rect">
             <a:avLst/>
           </a:prstGeom>
           <a:solidFill>
-            <a:srgbClr val="4A6CF7"/>
+            <a:srgbClr val="00B4D8"/>
           </a:solidFill>
           <a:ln/>
         </p:spPr>
       </p:sp>
       <p:sp>
         <p:nvSpPr>
-          <p:cNvPr id="3" name="Shape 1"/>
-          <p:cNvSpPr/>
-          <p:nvPr/>
-        </p:nvSpPr>
-        <p:spPr>
-          <a:xfrm>
-            <a:off x="0" y="4389120"/>
-            <a:ext cx="9144000" cy="54864"/>
-          </a:xfrm>
-          <a:prstGeom prst="rect">
-            <a:avLst/>
+          <p:cNvPr id="3" name="Text 1"/>
+          <p:cNvSpPr/>
+          <p:nvPr/>
+        </p:nvSpPr>
+        <p:spPr>
+          <a:xfrm>
+            <a:off x="548640" y="137160"/>
+            <a:ext cx="8229600" cy="457200"/>
+          </a:xfrm>
+          <a:prstGeom prst="rect">
+            <a:avLst/>
+          </a:prstGeom>
+          <a:noFill/>
+          <a:ln/>
+        </p:spPr>
+        <p:txBody>
+          <a:bodyPr wrap="square" lIns="0" tIns="0" rIns="0" bIns="0" rtlCol="0" anchor="ctr"/>
+          <a:lstStyle/>
+          <a:p>
+            <a:pPr indent="0" marL="0">
+              <a:buNone/>
+            </a:pPr>
+            <a:r>
+              <a:rPr lang="en-US" sz="2400" b="1" dirty="0">
+                <a:solidFill>
+                  <a:srgbClr val="1B2A4A"/>
+                </a:solidFill>
+                <a:latin typeface="Calibri" pitchFamily="34" charset="0"/>
+                <a:ea typeface="Calibri" pitchFamily="34" charset="-122"/>
+                <a:cs typeface="Calibri" pitchFamily="34" charset="-120"/>
+              </a:rPr>
+              <a:t>Application Screenshots</a:t>
+            </a:r>
+            <a:endParaRPr lang="en-US" sz="2400" dirty="0"/>
+          </a:p>
+        </p:txBody>
+      </p:sp>
+      <p:sp>
+        <p:nvSpPr>
+          <p:cNvPr id="4" name="Shape 2"/>
+          <p:cNvSpPr/>
+          <p:nvPr/>
+        </p:nvSpPr>
+        <p:spPr>
+          <a:xfrm>
+            <a:off x="320040" y="685800"/>
+            <a:ext cx="4114800" cy="1783080"/>
+          </a:xfrm>
+          <a:prstGeom prst="roundRect">
+            <a:avLst>
+              <a:gd name="adj" fmla="val 5128"/>
+            </a:avLst>
           </a:prstGeom>
           <a:solidFill>
-            <a:srgbClr val="4A6CF7"/>
+            <a:srgbClr val="FFFFFF"/>
           </a:solidFill>
           <a:ln/>
-        </p:spPr>
+          <a:effectLst>
+            <a:outerShdw sx="100000" sy="100000" kx="0" ky="0" algn="bl" rotWithShape="0" blurRad="101600" dist="25400" dir="8100000">
+              <a:srgbClr val="000000">
+                <a:alpha val="12000"/>
+              </a:srgbClr>
+            </a:outerShdw>
+          </a:effectLst>
+        </p:spPr>
+      </p:sp>
+      <p:pic>
+        <p:nvPicPr>
+          <p:cNvPr id="5" name="Image 0" descr="screenshots/home.png">    </p:cNvPr>
+          <p:cNvPicPr>
+            <a:picLocks noChangeAspect="1"/>
+          </p:cNvPicPr>
+          <p:nvPr/>
+        </p:nvPicPr>
+        <p:blipFill>
+          <a:blip r:embed="rId1"/>
+          <a:stretch>
+            <a:fillRect/>
+          </a:stretch>
+        </p:blipFill>
+        <p:spPr>
+          <a:xfrm>
+            <a:off x="365760" y="731520"/>
+            <a:ext cx="4023360" cy="1691640"/>
+          </a:xfrm>
+          <a:prstGeom prst="rect">
+            <a:avLst/>
+          </a:prstGeom>
+        </p:spPr>
+      </p:pic>
+      <p:sp>
+        <p:nvSpPr>
+          <p:cNvPr id="6" name="Text 3"/>
+          <p:cNvSpPr/>
+          <p:nvPr/>
+        </p:nvSpPr>
+        <p:spPr>
+          <a:xfrm>
+            <a:off x="365760" y="2423160"/>
+            <a:ext cx="4023360" cy="274320"/>
+          </a:xfrm>
+          <a:prstGeom prst="rect">
+            <a:avLst/>
+          </a:prstGeom>
+          <a:noFill/>
+          <a:ln/>
+        </p:spPr>
+        <p:txBody>
+          <a:bodyPr wrap="square" rtlCol="0" anchor="ctr"/>
+          <a:lstStyle/>
+          <a:p>
+            <a:pPr algn="ctr" indent="0" marL="0">
+              <a:buNone/>
+            </a:pPr>
+            <a:r>
+              <a:rPr lang="en-US" sz="1100" b="1" dirty="0">
+                <a:solidFill>
+                  <a:srgbClr val="0066CC"/>
+                </a:solidFill>
+                <a:latin typeface="Calibri" pitchFamily="34" charset="0"/>
+                <a:ea typeface="Calibri" pitchFamily="34" charset="-122"/>
+                <a:cs typeface="Calibri" pitchFamily="34" charset="-120"/>
+              </a:rPr>
+              <a:t>Home Page</a:t>
+            </a:r>
+            <a:endParaRPr lang="en-US" sz="1100" dirty="0"/>
+          </a:p>
+        </p:txBody>
+      </p:sp>
+      <p:sp>
+        <p:nvSpPr>
+          <p:cNvPr id="7" name="Shape 4"/>
+          <p:cNvSpPr/>
+          <p:nvPr/>
+        </p:nvSpPr>
+        <p:spPr>
+          <a:xfrm>
+            <a:off x="4617720" y="685800"/>
+            <a:ext cx="4114800" cy="1783080"/>
+          </a:xfrm>
+          <a:prstGeom prst="roundRect">
+            <a:avLst>
+              <a:gd name="adj" fmla="val 5128"/>
+            </a:avLst>
+          </a:prstGeom>
+          <a:solidFill>
+            <a:srgbClr val="FFFFFF"/>
+          </a:solidFill>
+          <a:ln/>
+          <a:effectLst>
+            <a:outerShdw sx="100000" sy="100000" kx="0" ky="0" algn="bl" rotWithShape="0" blurRad="101600" dist="25400" dir="8100000">
+              <a:srgbClr val="000000">
+                <a:alpha val="12000"/>
+              </a:srgbClr>
+            </a:outerShdw>
+          </a:effectLst>
+        </p:spPr>
+      </p:sp>
+      <p:pic>
+        <p:nvPicPr>
+          <p:cNvPr id="8" name="Image 1" descr="screenshots/professors.png">    </p:cNvPr>
+          <p:cNvPicPr>
+            <a:picLocks noChangeAspect="1"/>
+          </p:cNvPicPr>
+          <p:nvPr/>
+        </p:nvPicPr>
+        <p:blipFill>
+          <a:blip r:embed="rId2"/>
+          <a:stretch>
+            <a:fillRect/>
+          </a:stretch>
+        </p:blipFill>
+        <p:spPr>
+          <a:xfrm>
+            <a:off x="4663440" y="731520"/>
+            <a:ext cx="4023360" cy="1691640"/>
+          </a:xfrm>
+          <a:prstGeom prst="rect">
+            <a:avLst/>
+          </a:prstGeom>
+        </p:spPr>
+      </p:pic>
+      <p:sp>
+        <p:nvSpPr>
+          <p:cNvPr id="9" name="Text 5"/>
+          <p:cNvSpPr/>
+          <p:nvPr/>
+        </p:nvSpPr>
+        <p:spPr>
+          <a:xfrm>
+            <a:off x="4663440" y="2423160"/>
+            <a:ext cx="4023360" cy="274320"/>
+          </a:xfrm>
+          <a:prstGeom prst="rect">
+            <a:avLst/>
+          </a:prstGeom>
+          <a:noFill/>
+          <a:ln/>
+        </p:spPr>
+        <p:txBody>
+          <a:bodyPr wrap="square" rtlCol="0" anchor="ctr"/>
+          <a:lstStyle/>
+          <a:p>
+            <a:pPr algn="ctr" indent="0" marL="0">
+              <a:buNone/>
+            </a:pPr>
+            <a:r>
+              <a:rPr lang="en-US" sz="1100" b="1" dirty="0">
+                <a:solidFill>
+                  <a:srgbClr val="0066CC"/>
+                </a:solidFill>
+                <a:latin typeface="Calibri" pitchFamily="34" charset="0"/>
+                <a:ea typeface="Calibri" pitchFamily="34" charset="-122"/>
+                <a:cs typeface="Calibri" pitchFamily="34" charset="-120"/>
+              </a:rPr>
+              <a:t>Professors</a:t>
+            </a:r>
+            <a:endParaRPr lang="en-US" sz="1100" dirty="0"/>
+          </a:p>
+        </p:txBody>
+      </p:sp>
+      <p:sp>
+        <p:nvSpPr>
+          <p:cNvPr id="10" name="Shape 6"/>
+          <p:cNvSpPr/>
+          <p:nvPr/>
+        </p:nvSpPr>
+        <p:spPr>
+          <a:xfrm>
+            <a:off x="320040" y="2743200"/>
+            <a:ext cx="4114800" cy="1783080"/>
+          </a:xfrm>
+          <a:prstGeom prst="roundRect">
+            <a:avLst>
+              <a:gd name="adj" fmla="val 5128"/>
+            </a:avLst>
+          </a:prstGeom>
+          <a:solidFill>
+            <a:srgbClr val="FFFFFF"/>
+          </a:solidFill>
+          <a:ln/>
+          <a:effectLst>
+            <a:outerShdw sx="100000" sy="100000" kx="0" ky="0" algn="bl" rotWithShape="0" blurRad="101600" dist="25400" dir="8100000">
+              <a:srgbClr val="000000">
+                <a:alpha val="12000"/>
+              </a:srgbClr>
+            </a:outerShdw>
+          </a:effectLst>
+        </p:spPr>
+      </p:sp>
+      <p:pic>
+        <p:nvPicPr>
+          <p:cNvPr id="11" name="Image 2" descr="screenshots/dashboard.png">    </p:cNvPr>
+          <p:cNvPicPr>
+            <a:picLocks noChangeAspect="1"/>
+          </p:cNvPicPr>
+          <p:nvPr/>
+        </p:nvPicPr>
+        <p:blipFill>
+          <a:blip r:embed="rId3"/>
+          <a:stretch>
+            <a:fillRect/>
+          </a:stretch>
+        </p:blipFill>
+        <p:spPr>
+          <a:xfrm>
+            <a:off x="365760" y="2788920"/>
+            <a:ext cx="4023360" cy="1691640"/>
+          </a:xfrm>
+          <a:prstGeom prst="rect">
+            <a:avLst/>
+          </a:prstGeom>
+        </p:spPr>
+      </p:pic>
+      <p:sp>
+        <p:nvSpPr>
+          <p:cNvPr id="12" name="Text 7"/>
+          <p:cNvSpPr/>
+          <p:nvPr/>
+        </p:nvSpPr>
+        <p:spPr>
+          <a:xfrm>
+            <a:off x="365760" y="4480560"/>
+            <a:ext cx="4023360" cy="274320"/>
+          </a:xfrm>
+          <a:prstGeom prst="rect">
+            <a:avLst/>
+          </a:prstGeom>
+          <a:noFill/>
+          <a:ln/>
+        </p:spPr>
+        <p:txBody>
+          <a:bodyPr wrap="square" rtlCol="0" anchor="ctr"/>
+          <a:lstStyle/>
+          <a:p>
+            <a:pPr algn="ctr" indent="0" marL="0">
+              <a:buNone/>
+            </a:pPr>
+            <a:r>
+              <a:rPr lang="en-US" sz="1100" b="1" dirty="0">
+                <a:solidFill>
+                  <a:srgbClr val="0066CC"/>
+                </a:solidFill>
+                <a:latin typeface="Calibri" pitchFamily="34" charset="0"/>
+                <a:ea typeface="Calibri" pitchFamily="34" charset="-122"/>
+                <a:cs typeface="Calibri" pitchFamily="34" charset="-120"/>
+              </a:rPr>
+              <a:t>Dashboard</a:t>
+            </a:r>
+            <a:endParaRPr lang="en-US" sz="1100" dirty="0"/>
+          </a:p>
+        </p:txBody>
+      </p:sp>
+      <p:sp>
+        <p:nvSpPr>
+          <p:cNvPr id="13" name="Shape 8"/>
+          <p:cNvSpPr/>
+          <p:nvPr/>
+        </p:nvSpPr>
+        <p:spPr>
+          <a:xfrm>
+            <a:off x="4617720" y="2743200"/>
+            <a:ext cx="4114800" cy="1783080"/>
+          </a:xfrm>
+          <a:prstGeom prst="roundRect">
+            <a:avLst>
+              <a:gd name="adj" fmla="val 5128"/>
+            </a:avLst>
+          </a:prstGeom>
+          <a:solidFill>
+            <a:srgbClr val="FFFFFF"/>
+          </a:solidFill>
+          <a:ln/>
+          <a:effectLst>
+            <a:outerShdw sx="100000" sy="100000" kx="0" ky="0" algn="bl" rotWithShape="0" blurRad="101600" dist="25400" dir="8100000">
+              <a:srgbClr val="000000">
+                <a:alpha val="12000"/>
+              </a:srgbClr>
+            </a:outerShdw>
+          </a:effectLst>
+        </p:spPr>
+      </p:sp>
+      <p:pic>
+        <p:nvPicPr>
+          <p:cNvPr id="14" name="Image 3" descr="screenshots/upload.png">    </p:cNvPr>
+          <p:cNvPicPr>
+            <a:picLocks noChangeAspect="1"/>
+          </p:cNvPicPr>
+          <p:nvPr/>
+        </p:nvPicPr>
+        <p:blipFill>
+          <a:blip r:embed="rId4"/>
+          <a:stretch>
+            <a:fillRect/>
+          </a:stretch>
+        </p:blipFill>
+        <p:spPr>
+          <a:xfrm>
+            <a:off x="4663440" y="2788920"/>
+            <a:ext cx="4023360" cy="1691640"/>
+          </a:xfrm>
+          <a:prstGeom prst="rect">
+            <a:avLst/>
+          </a:prstGeom>
+        </p:spPr>
+      </p:pic>
+      <p:sp>
+        <p:nvSpPr>
+          <p:cNvPr id="15" name="Text 9"/>
+          <p:cNvSpPr/>
+          <p:nvPr/>
+        </p:nvSpPr>
+        <p:spPr>
+          <a:xfrm>
+            <a:off x="4663440" y="4480560"/>
+            <a:ext cx="4023360" cy="274320"/>
+          </a:xfrm>
+          <a:prstGeom prst="rect">
+            <a:avLst/>
+          </a:prstGeom>
+          <a:noFill/>
+          <a:ln/>
+        </p:spPr>
+        <p:txBody>
+          <a:bodyPr wrap="square" rtlCol="0" anchor="ctr"/>
+          <a:lstStyle/>
+          <a:p>
+            <a:pPr algn="ctr" indent="0" marL="0">
+              <a:buNone/>
+            </a:pPr>
+            <a:r>
+              <a:rPr lang="en-US" sz="1100" b="1" dirty="0">
+                <a:solidFill>
+                  <a:srgbClr val="0066CC"/>
+                </a:solidFill>
+                <a:latin typeface="Calibri" pitchFamily="34" charset="0"/>
+                <a:ea typeface="Calibri" pitchFamily="34" charset="-122"/>
+                <a:cs typeface="Calibri" pitchFamily="34" charset="-120"/>
+              </a:rPr>
+              <a:t>Exam Upload</a:t>
+            </a:r>
+            <a:endParaRPr lang="en-US" sz="1100" dirty="0"/>
+          </a:p>
+        </p:txBody>
+      </p:sp>
+    </p:spTree>
+  </p:cSld>
+  <p:clrMapOvr>
+    <a:masterClrMapping/>
+  </p:clrMapOvr>
+</p:sld>
+</file>
+
+<file path=ppt/slides/slide9.xml><?xml version="1.0" encoding="utf-8"?>
+<p:sld xmlns:a="http://schemas.openxmlformats.org/drawingml/2006/main" xmlns:r="http://schemas.openxmlformats.org/officeDocument/2006/relationships" xmlns:p="http://schemas.openxmlformats.org/presentationml/2006/main">
+  <p:cSld name="Slide 9">
+    <p:bg>
+      <p:bgPr>
+        <a:solidFill>
+          <a:srgbClr val="1B2A4A"/>
+        </a:solidFill>
+      </p:bgPr>
+    </p:bg>
+    <p:spTree>
+      <p:nvGrpSpPr>
+        <p:cNvPr id="1" name=""/>
+        <p:cNvGrpSpPr/>
+        <p:nvPr/>
+      </p:nvGrpSpPr>
+      <p:grpSpPr>
+        <a:xfrm>
+          <a:off x="0" y="0"/>
+          <a:ext cx="0" cy="0"/>
+          <a:chOff x="0" y="0"/>
+          <a:chExt cx="0" cy="0"/>
+        </a:xfrm>
+      </p:grpSpPr>
+      <p:sp>
+        <p:nvSpPr>
+          <p:cNvPr id="2" name="Shape 0"/>
+          <p:cNvSpPr/>
+          <p:nvPr/>
+        </p:nvSpPr>
+        <p:spPr>
+          <a:xfrm>
+            <a:off x="0" y="0"/>
+            <a:ext cx="9144000" cy="73152"/>
+          </a:xfrm>
+          <a:prstGeom prst="rect">
+            <a:avLst/>
+          </a:prstGeom>
+          <a:solidFill>
+            <a:srgbClr val="00B4D8"/>
+          </a:solidFill>
+          <a:ln/>
+        </p:spPr>
+      </p:sp>
+      <p:sp>
+        <p:nvSpPr>
+          <p:cNvPr id="3" name="Text 1"/>
+          <p:cNvSpPr/>
+          <p:nvPr/>
+        </p:nvSpPr>
+        <p:spPr>
+          <a:xfrm>
+            <a:off x="457200" y="1188720"/>
+            <a:ext cx="8229600" cy="914400"/>
+          </a:xfrm>
+          <a:prstGeom prst="rect">
+            <a:avLst/>
+          </a:prstGeom>
+          <a:noFill/>
+          <a:ln/>
+        </p:spPr>
+        <p:txBody>
+          <a:bodyPr wrap="square" rtlCol="0" anchor="ctr"/>
+          <a:lstStyle/>
+          <a:p>
+            <a:pPr algn="ctr" indent="0" marL="0">
+              <a:buNone/>
+            </a:pPr>
+            <a:r>
+              <a:rPr lang="en-US" sz="4400" b="1" dirty="0">
+                <a:solidFill>
+                  <a:srgbClr val="FFFFFF"/>
+                </a:solidFill>
+                <a:latin typeface="Calibri" pitchFamily="34" charset="0"/>
+                <a:ea typeface="Calibri" pitchFamily="34" charset="-122"/>
+                <a:cs typeface="Calibri" pitchFamily="34" charset="-120"/>
+              </a:rPr>
+              <a:t>Thank You!</a:t>
+            </a:r>
+            <a:endParaRPr lang="en-US" sz="4400" dirty="0"/>
+          </a:p>
+        </p:txBody>
       </p:sp>
       <p:sp>
         <p:nvSpPr>
@@ -6813,181 +8873,196 @@
         </p:nvSpPr>
         <p:spPr>
           <a:xfrm>
-            <a:off x="731520" y="1188720"/>
-            <a:ext cx="7772400" cy="1097280"/>
-          </a:xfrm>
-          <a:prstGeom prst="rect">
-            <a:avLst/>
-          </a:prstGeom>
-          <a:noFill/>
-          <a:ln/>
-        </p:spPr>
-        <p:txBody>
-          <a:bodyPr wrap="square" lIns="0" tIns="0" rIns="0" bIns="0" rtlCol="0" anchor="ctr"/>
+            <a:off x="457200" y="2103120"/>
+            <a:ext cx="8229600" cy="457200"/>
+          </a:xfrm>
+          <a:prstGeom prst="rect">
+            <a:avLst/>
+          </a:prstGeom>
+          <a:noFill/>
+          <a:ln/>
+        </p:spPr>
+        <p:txBody>
+          <a:bodyPr wrap="square" rtlCol="0" anchor="ctr"/>
+          <a:lstStyle/>
+          <a:p>
+            <a:pPr algn="ctr" indent="0" marL="0">
+              <a:buNone/>
+            </a:pPr>
+            <a:r>
+              <a:rPr lang="en-US" sz="1600" dirty="0">
+                <a:solidFill>
+                  <a:srgbClr val="A0AEC0"/>
+                </a:solidFill>
+                <a:latin typeface="Calibri" pitchFamily="34" charset="0"/>
+                <a:ea typeface="Calibri" pitchFamily="34" charset="-122"/>
+                <a:cs typeface="Calibri" pitchFamily="34" charset="-120"/>
+              </a:rPr>
+              <a:t>We appreciate your questions.</a:t>
+            </a:r>
+            <a:endParaRPr lang="en-US" sz="1600" dirty="0"/>
+          </a:p>
+        </p:txBody>
+      </p:sp>
+      <p:sp>
+        <p:nvSpPr>
+          <p:cNvPr id="5" name="Text 3"/>
+          <p:cNvSpPr/>
+          <p:nvPr/>
+        </p:nvSpPr>
+        <p:spPr>
+          <a:xfrm>
+            <a:off x="457200" y="2926080"/>
+            <a:ext cx="8229600" cy="365760"/>
+          </a:xfrm>
+          <a:prstGeom prst="rect">
+            <a:avLst/>
+          </a:prstGeom>
+          <a:noFill/>
+          <a:ln/>
+        </p:spPr>
+        <p:txBody>
+          <a:bodyPr wrap="square" rtlCol="0" anchor="ctr"/>
+          <a:lstStyle/>
+          <a:p>
+            <a:pPr algn="ctr" indent="0" marL="0">
+              <a:buNone/>
+            </a:pPr>
+            <a:r>
+              <a:rPr lang="en-US" sz="1400" dirty="0">
+                <a:solidFill>
+                  <a:srgbClr val="00B4D8"/>
+                </a:solidFill>
+                <a:latin typeface="Calibri" pitchFamily="34" charset="0"/>
+                <a:ea typeface="Calibri" pitchFamily="34" charset="-122"/>
+                <a:cs typeface="Calibri" pitchFamily="34" charset="-120"/>
+              </a:rPr>
+              <a:t>Erdem Acar  •  Enes Albas  •  Ali Emir Erten</a:t>
+            </a:r>
+            <a:endParaRPr lang="en-US" sz="1400" dirty="0"/>
+          </a:p>
+        </p:txBody>
+      </p:sp>
+      <p:sp>
+        <p:nvSpPr>
+          <p:cNvPr id="6" name="Shape 4"/>
+          <p:cNvSpPr/>
+          <p:nvPr/>
+        </p:nvSpPr>
+        <p:spPr>
+          <a:xfrm>
+            <a:off x="2286000" y="3566160"/>
+            <a:ext cx="4572000" cy="1097280"/>
+          </a:xfrm>
+          <a:prstGeom prst="roundRect">
+            <a:avLst>
+              <a:gd name="adj" fmla="val 8333"/>
+            </a:avLst>
+          </a:prstGeom>
+          <a:solidFill>
+            <a:srgbClr val="1B2A4A"/>
+          </a:solidFill>
+          <a:ln w="12700">
+            <a:solidFill>
+              <a:srgbClr val="2D3748"/>
+            </a:solidFill>
+            <a:prstDash val="solid"/>
+          </a:ln>
+        </p:spPr>
+      </p:sp>
+      <p:sp>
+        <p:nvSpPr>
+          <p:cNvPr id="7" name="Text 5"/>
+          <p:cNvSpPr/>
+          <p:nvPr/>
+        </p:nvSpPr>
+        <p:spPr>
+          <a:xfrm>
+            <a:off x="2468880" y="3657600"/>
+            <a:ext cx="4206240" cy="914400"/>
+          </a:xfrm>
+          <a:prstGeom prst="rect">
+            <a:avLst/>
+          </a:prstGeom>
+          <a:noFill/>
+          <a:ln/>
+        </p:spPr>
+        <p:txBody>
+          <a:bodyPr wrap="square" rtlCol="0" anchor="ctr"/>
           <a:lstStyle/>
           <a:p>
             <a:pPr indent="0" marL="0">
-              <a:buNone/>
-            </a:pPr>
-            <a:r>
-              <a:rPr lang="en-US" sz="4800" b="1" dirty="0">
-                <a:solidFill>
-                  <a:srgbClr val="FFFFFF"/>
-                </a:solidFill>
-                <a:latin typeface="Calibri" pitchFamily="34" charset="0"/>
-                <a:ea typeface="Calibri" pitchFamily="34" charset="-122"/>
-                <a:cs typeface="Calibri" pitchFamily="34" charset="-120"/>
-              </a:rPr>
-              <a:t>Thank You!</a:t>
-            </a:r>
-            <a:endParaRPr lang="en-US" sz="4800" dirty="0"/>
-          </a:p>
-        </p:txBody>
-      </p:sp>
-      <p:sp>
-        <p:nvSpPr>
-          <p:cNvPr id="5" name="Text 3"/>
-          <p:cNvSpPr/>
-          <p:nvPr/>
-        </p:nvSpPr>
-        <p:spPr>
-          <a:xfrm>
-            <a:off x="731520" y="2194560"/>
-            <a:ext cx="7772400" cy="548640"/>
-          </a:xfrm>
-          <a:prstGeom prst="rect">
-            <a:avLst/>
-          </a:prstGeom>
-          <a:noFill/>
-          <a:ln/>
-        </p:spPr>
-        <p:txBody>
-          <a:bodyPr wrap="square" lIns="0" tIns="0" rIns="0" bIns="0" rtlCol="0" anchor="ctr"/>
-          <a:lstStyle/>
-          <a:p>
+              <a:lnSpc>
+                <a:spcPct val="180000"/>
+              </a:lnSpc>
+              <a:buNone/>
+            </a:pPr>
+            <a:r>
+              <a:rPr lang="en-US" sz="1200" b="1" dirty="0">
+                <a:solidFill>
+                  <a:srgbClr val="A0AEC0"/>
+                </a:solidFill>
+                <a:latin typeface="Calibri" pitchFamily="34" charset="0"/>
+                <a:ea typeface="Calibri" pitchFamily="34" charset="-122"/>
+                <a:cs typeface="Calibri" pitchFamily="34" charset="-120"/>
+              </a:rPr>
+              <a:t>GitHub: </a:t>
+            </a:r>
             <a:pPr indent="0" marL="0">
-              <a:buNone/>
-            </a:pPr>
-            <a:r>
-              <a:rPr lang="en-US" sz="1800" dirty="0">
-                <a:solidFill>
-                  <a:srgbClr val="CADCFC"/>
-                </a:solidFill>
-                <a:latin typeface="Calibri" pitchFamily="34" charset="0"/>
-                <a:ea typeface="Calibri" pitchFamily="34" charset="-122"/>
-                <a:cs typeface="Calibri" pitchFamily="34" charset="-120"/>
-              </a:rPr>
-              <a:t>We appreciate your questions.</a:t>
-            </a:r>
-            <a:endParaRPr lang="en-US" sz="1800" dirty="0"/>
-          </a:p>
-        </p:txBody>
-      </p:sp>
-      <p:sp>
-        <p:nvSpPr>
-          <p:cNvPr id="6" name="Shape 4"/>
-          <p:cNvSpPr/>
-          <p:nvPr/>
-        </p:nvSpPr>
-        <p:spPr>
-          <a:xfrm>
-            <a:off x="731520" y="3017520"/>
-            <a:ext cx="1371600" cy="36576"/>
-          </a:xfrm>
-          <a:prstGeom prst="rect">
-            <a:avLst/>
-          </a:prstGeom>
-          <a:solidFill>
-            <a:srgbClr val="4A6CF7"/>
-          </a:solidFill>
-          <a:ln/>
-        </p:spPr>
-      </p:sp>
-      <p:sp>
-        <p:nvSpPr>
-          <p:cNvPr id="7" name="Text 5"/>
-          <p:cNvSpPr/>
-          <p:nvPr/>
-        </p:nvSpPr>
-        <p:spPr>
-          <a:xfrm>
-            <a:off x="731520" y="3291840"/>
-            <a:ext cx="7772400" cy="1097280"/>
-          </a:xfrm>
-          <a:prstGeom prst="rect">
-            <a:avLst/>
-          </a:prstGeom>
-          <a:noFill/>
-          <a:ln/>
-        </p:spPr>
-        <p:txBody>
-          <a:bodyPr wrap="square" rtlCol="0" anchor="ctr"/>
-          <a:lstStyle/>
+              <a:lnSpc>
+                <a:spcPct val="180000"/>
+              </a:lnSpc>
+              <a:buNone/>
+            </a:pPr>
+            <a:r>
+              <a:rPr lang="en-US" sz="1200" dirty="0">
+                <a:solidFill>
+                  <a:srgbClr val="00B4D8"/>
+                </a:solidFill>
+                <a:latin typeface="Calibri" pitchFamily="34" charset="0"/>
+                <a:ea typeface="Calibri" pitchFamily="34" charset="-122"/>
+                <a:cs typeface="Calibri" pitchFamily="34" charset="-120"/>
+              </a:rPr>
+              <a:t>github.com/ProfAI-Team/ProfAI</a:t>
+            </a:r>
+            <a:endParaRPr lang="en-US" sz="1200" dirty="0"/>
+          </a:p>
           <a:p>
             <a:pPr indent="0" marL="0">
-              <a:buNone/>
-            </a:pPr>
-            <a:r>
-              <a:rPr lang="en-US" sz="1300" b="1" dirty="0">
-                <a:solidFill>
-                  <a:srgbClr val="CADCFC"/>
-                </a:solidFill>
-                <a:latin typeface="Calibri" pitchFamily="34" charset="0"/>
-                <a:ea typeface="Calibri" pitchFamily="34" charset="-122"/>
-                <a:cs typeface="Calibri" pitchFamily="34" charset="-120"/>
-              </a:rPr>
-              <a:t>Erdem Acar  ·  Enes Albas  ·  Ali Emir Erten</a:t>
-            </a:r>
-            <a:endParaRPr lang="en-US" sz="1300" dirty="0"/>
-          </a:p>
-          <a:p>
+              <a:lnSpc>
+                <a:spcPct val="180000"/>
+              </a:lnSpc>
+              <a:buNone/>
+            </a:pPr>
+            <a:r>
+              <a:rPr lang="en-US" sz="1200" b="1" dirty="0">
+                <a:solidFill>
+                  <a:srgbClr val="A0AEC0"/>
+                </a:solidFill>
+                <a:latin typeface="Calibri" pitchFamily="34" charset="0"/>
+                <a:ea typeface="Calibri" pitchFamily="34" charset="-122"/>
+                <a:cs typeface="Calibri" pitchFamily="34" charset="-120"/>
+              </a:rPr>
+              <a:t>Jira: </a:t>
+            </a:r>
             <a:pPr indent="0" marL="0">
-              <a:buNone/>
-            </a:pPr>
-            <a:r>
-              <a:rPr lang="en-US" sz="1300" dirty="0">
-                <a:solidFill>
-                  <a:srgbClr val="CADCFC"/>
-                </a:solidFill>
-                <a:latin typeface="Calibri" pitchFamily="34" charset="0"/>
-                <a:ea typeface="Calibri" pitchFamily="34" charset="-122"/>
-                <a:cs typeface="Calibri" pitchFamily="34" charset="-120"/>
-              </a:rPr>
-              <a:t>
-</a:t>
-            </a:r>
-            <a:pPr indent="0" marL="0">
-              <a:buNone/>
-            </a:pPr>
-            <a:r>
-              <a:rPr lang="en-US" sz="1300" dirty="0">
-                <a:solidFill>
-                  <a:srgbClr val="CADCFC"/>
-                </a:solidFill>
-                <a:latin typeface="Calibri" pitchFamily="34" charset="0"/>
-                <a:ea typeface="Calibri" pitchFamily="34" charset="-122"/>
-                <a:cs typeface="Calibri" pitchFamily="34" charset="-120"/>
-              </a:rPr>
-              <a:t>GitHub: github.com/ProfAI-Team/ProfAI</a:t>
-            </a:r>
-            <a:endParaRPr lang="en-US" sz="1300" dirty="0"/>
-          </a:p>
-          <a:p>
-            <a:pPr indent="0" marL="0">
-              <a:buNone/>
-            </a:pPr>
-            <a:r>
-              <a:rPr lang="en-US" sz="1300" dirty="0">
-                <a:solidFill>
-                  <a:srgbClr val="CADCFC"/>
-                </a:solidFill>
-                <a:latin typeface="Calibri" pitchFamily="34" charset="0"/>
-                <a:ea typeface="Calibri" pitchFamily="34" charset="-122"/>
-                <a:cs typeface="Calibri" pitchFamily="34" charset="-120"/>
-              </a:rPr>
-              <a:t>Jira: devmeet-app.atlassian.net</a:t>
-            </a:r>
-            <a:endParaRPr lang="en-US" sz="1300" dirty="0"/>
+              <a:lnSpc>
+                <a:spcPct val="180000"/>
+              </a:lnSpc>
+              <a:buNone/>
+            </a:pPr>
+            <a:r>
+              <a:rPr lang="en-US" sz="1200" dirty="0">
+                <a:solidFill>
+                  <a:srgbClr val="00B4D8"/>
+                </a:solidFill>
+                <a:latin typeface="Calibri" pitchFamily="34" charset="0"/>
+                <a:ea typeface="Calibri" pitchFamily="34" charset="-122"/>
+                <a:cs typeface="Calibri" pitchFamily="34" charset="-120"/>
+              </a:rPr>
+              <a:t>devmeet-app.atlassian.net</a:t>
+            </a:r>
+            <a:endParaRPr lang="en-US" sz="1200" dirty="0"/>
           </a:p>
         </p:txBody>
       </p:sp>
